--- a/Crossplane_Enterprise_IaC.pptx
+++ b/Crossplane_Enterprise_IaC.pptx
@@ -2750,6 +2750,96 @@
           </a:p>
         </p:txBody>
       </p:sp>
+      <p:sp>
+        <p:nvSpPr>
+          <p:cNvPr id="19" name="Shape 12"/>
+          <p:cNvSpPr/>
+          <p:nvPr/>
+        </p:nvSpPr>
+        <p:spPr>
+          <a:xfrm>
+            <a:off x="9235440" y="4892040"/>
+            <a:ext cx="1737360" cy="1417320"/>
+          </a:xfrm>
+          <a:prstGeom prst="roundRect">
+            <a:avLst>
+              <a:gd name="adj" fmla="val 5161"/>
+            </a:avLst>
+          </a:prstGeom>
+          <a:solidFill>
+            <a:srgbClr val="FFFFFF"/>
+          </a:solidFill>
+          <a:ln w="12700">
+            <a:solidFill>
+              <a:srgbClr val="5FD0C0"/>
+            </a:solidFill>
+            <a:prstDash val="solid"/>
+          </a:ln>
+        </p:spPr>
+      </p:sp>
+      <p:sp>
+        <p:nvSpPr>
+          <p:cNvPr id="20" name="Text 13"/>
+          <p:cNvSpPr/>
+          <p:nvPr/>
+        </p:nvSpPr>
+        <p:spPr>
+          <a:xfrm>
+            <a:off x="9235440" y="4965192"/>
+            <a:ext cx="1737360" cy="219456"/>
+          </a:xfrm>
+          <a:prstGeom prst="rect">
+            <a:avLst/>
+          </a:prstGeom>
+          <a:noFill/>
+          <a:ln/>
+        </p:spPr>
+        <p:txBody>
+          <a:bodyPr wrap="square" lIns="0" tIns="0" rIns="0" bIns="0" rtlCol="0" anchor="ctr"/>
+          <a:lstStyle/>
+          <a:p>
+            <a:pPr algn="ctr" indent="0" marL="0">
+              <a:buNone/>
+            </a:pPr>
+            <a:r>
+              <a:rPr lang="en-US" sz="850" b="1" dirty="0">
+                <a:solidFill>
+                  <a:srgbClr val="0B1E3D"/>
+                </a:solidFill>
+                <a:latin typeface="Calibri" pitchFamily="34" charset="0"/>
+                <a:ea typeface="Calibri" pitchFamily="34" charset="-122"/>
+                <a:cs typeface="Calibri" pitchFamily="34" charset="-120"/>
+              </a:rPr>
+              <a:t>Scan for the repo</a:t>
+            </a:r>
+            <a:endParaRPr lang="en-US" sz="850" dirty="0"/>
+          </a:p>
+        </p:txBody>
+      </p:sp>
+      <p:pic>
+        <p:nvPicPr>
+          <p:cNvPr id="21" name="Image 5" descr="icons/qrcode.png">    </p:cNvPr>
+          <p:cNvPicPr>
+            <a:picLocks noChangeAspect="1"/>
+          </p:cNvPicPr>
+          <p:nvPr/>
+        </p:nvPicPr>
+        <p:blipFill>
+          <a:blip r:embed="rId6"/>
+          <a:stretch>
+            <a:fillRect/>
+          </a:stretch>
+        </p:blipFill>
+        <p:spPr>
+          <a:xfrm>
+            <a:off x="9601200" y="5212080"/>
+            <a:ext cx="1005840" cy="1005840"/>
+          </a:xfrm>
+          <a:prstGeom prst="rect">
+            <a:avLst/>
+          </a:prstGeom>
+        </p:spPr>
+      </p:pic>
     </p:spTree>
   </p:cSld>
   <p:clrMapOvr>

--- a/Crossplane_Enterprise_IaC.pptx
+++ b/Crossplane_Enterprise_IaC.pptx
@@ -21,9 +21,10 @@
     <p:sldId id="269" r:id="rId15"/>
     <p:sldId id="270" r:id="rId16"/>
     <p:sldId id="271" r:id="rId17"/>
+    <p:sldId id="272" r:id="rId18"/>
   </p:sldIdLst>
   <p:notesMasterIdLst>
-    <p:notesMasterId r:id="rId18"/>
+    <p:notesMasterId r:id="rId19"/>
   </p:notesMasterIdLst>
   <p:sldSz cx="12192000" cy="6858000"/>
   <p:notesSz cx="6858000" cy="12192000"/>
@@ -1157,6 +1158,94 @@
             <a:fld id="{F7021451-1387-4CA6-816F-3879F97B5CBC}" type="slidenum">
               <a:rPr lang="en-US"/>
               <a:t>16</a:t>
+            </a:fld>
+            <a:endParaRPr lang="en-US"/>
+          </a:p>
+        </p:txBody>
+      </p:sp>
+    </p:spTree>
+    <p:extLst>
+      <p:ext uri="{BB962C8B-B14F-4D97-AF65-F5344CB8AC3E}">
+        <p14:creationId xmlns:p14="http://schemas.microsoft.com/office/powerpoint/2010/main" val="1024086991"/>
+      </p:ext>
+    </p:extLst>
+  </p:cSld>
+  <p:clrMapOvr>
+    <a:masterClrMapping/>
+  </p:clrMapOvr>
+</p:notes>
+</file>
+
+<file path=ppt/notesSlides/notesSlide17.xml><?xml version="1.0" encoding="utf-8"?>
+<p:notes xmlns:a="http://schemas.openxmlformats.org/drawingml/2006/main" xmlns:r="http://schemas.openxmlformats.org/officeDocument/2006/relationships" xmlns:p="http://schemas.openxmlformats.org/presentationml/2006/main">
+  <p:cSld>
+    <p:spTree>
+      <p:nvGrpSpPr>
+        <p:cNvPr id="1" name=""/>
+        <p:cNvGrpSpPr/>
+        <p:nvPr/>
+      </p:nvGrpSpPr>
+      <p:grpSpPr>
+        <a:xfrm>
+          <a:off x="0" y="0"/>
+          <a:ext cx="0" cy="0"/>
+          <a:chOff x="0" y="0"/>
+          <a:chExt cx="0" cy="0"/>
+        </a:xfrm>
+      </p:grpSpPr>
+      <p:sp>
+        <p:nvSpPr>
+          <p:cNvPr id="2" name="Slide Image Placeholder 1"/>
+          <p:cNvSpPr>
+            <a:spLocks noGrp="1" noRot="1" noChangeAspect="1"/>
+          </p:cNvSpPr>
+          <p:nvPr>
+            <p:ph type="sldImg"/>
+          </p:nvPr>
+        </p:nvSpPr>
+        <p:spPr/>
+      </p:sp>
+      <p:sp>
+        <p:nvSpPr>
+          <p:cNvPr id="3" name="Notes Placeholder 2"/>
+          <p:cNvSpPr>
+            <a:spLocks noGrp="1"/>
+          </p:cNvSpPr>
+          <p:nvPr>
+            <p:ph type="body" idx="1"/>
+          </p:nvPr>
+        </p:nvSpPr>
+        <p:spPr/>
+        <p:txBody>
+          <a:bodyPr/>
+          <a:lstStyle/>
+          <a:p>
+            <a:r>
+              <a:rPr lang="en-US" dirty="0"/>
+              <a:t/>
+            </a:r>
+            <a:endParaRPr lang="en-US" dirty="0"/>
+          </a:p>
+        </p:txBody>
+      </p:sp>
+      <p:sp>
+        <p:nvSpPr>
+          <p:cNvPr id="4" name="Slide Number Placeholder 3"/>
+          <p:cNvSpPr>
+            <a:spLocks noGrp="1"/>
+          </p:cNvSpPr>
+          <p:nvPr>
+            <p:ph type="sldNum" sz="quarter" idx="10"/>
+          </p:nvPr>
+        </p:nvSpPr>
+        <p:spPr/>
+        <p:txBody>
+          <a:bodyPr/>
+          <a:lstStyle/>
+          <a:p>
+            <a:fld id="{F7021451-1387-4CA6-816F-3879F97B5CBC}" type="slidenum">
+              <a:rPr lang="en-US"/>
+              <a:t>17</a:t>
             </a:fld>
             <a:endParaRPr lang="en-US"/>
           </a:p>
@@ -6755,7 +6844,7 @@
     <p:bg>
       <p:bgPr>
         <a:solidFill>
-          <a:srgbClr val="F4F7FA"/>
+          <a:srgbClr val="0B1E3D"/>
         </a:solidFill>
       </p:bgPr>
     </p:bg>
@@ -6781,26 +6870,26 @@
         </p:nvSpPr>
         <p:spPr>
           <a:xfrm>
-            <a:off x="548640" y="411480"/>
-            <a:ext cx="10058400" cy="548640"/>
-          </a:xfrm>
-          <a:prstGeom prst="rect">
-            <a:avLst/>
-          </a:prstGeom>
-          <a:noFill/>
-          <a:ln/>
-        </p:spPr>
-        <p:txBody>
-          <a:bodyPr wrap="square" lIns="0" tIns="0" rIns="0" bIns="0" rtlCol="0" anchor="ctr"/>
-          <a:lstStyle/>
-          <a:p>
-            <a:pPr indent="0" marL="0">
-              <a:buNone/>
-            </a:pPr>
-            <a:r>
-              <a:rPr lang="en-US" sz="2800" b="1" dirty="0">
-                <a:solidFill>
-                  <a:srgbClr val="0B1E3D"/>
+            <a:off x="548640" y="365760"/>
+            <a:ext cx="10058400" cy="502920"/>
+          </a:xfrm>
+          <a:prstGeom prst="rect">
+            <a:avLst/>
+          </a:prstGeom>
+          <a:noFill/>
+          <a:ln/>
+        </p:spPr>
+        <p:txBody>
+          <a:bodyPr wrap="square" lIns="0" tIns="0" rIns="0" bIns="0" rtlCol="0" anchor="ctr"/>
+          <a:lstStyle/>
+          <a:p>
+            <a:pPr indent="0" marL="0">
+              <a:buNone/>
+            </a:pPr>
+            <a:r>
+              <a:rPr lang="en-US" sz="2700" b="1" dirty="0">
+                <a:solidFill>
+                  <a:srgbClr val="FFFFFF"/>
                 </a:solidFill>
                 <a:latin typeface="Cambria" pitchFamily="34" charset="0"/>
                 <a:ea typeface="Cambria" pitchFamily="34" charset="-122"/>
@@ -6808,7 +6897,7 @@
               </a:rPr>
               <a:t>Live Demo: A More Involved Deployment</a:t>
             </a:r>
-            <a:endParaRPr lang="en-US" sz="2800" dirty="0"/>
+            <a:endParaRPr lang="en-US" sz="2700" dirty="0"/>
           </a:p>
         </p:txBody>
       </p:sp>
@@ -6820,8 +6909,8 @@
         </p:nvSpPr>
         <p:spPr>
           <a:xfrm>
-            <a:off x="548640" y="960120"/>
-            <a:ext cx="10789920" cy="457200"/>
+            <a:off x="548640" y="868680"/>
+            <a:ext cx="11064240" cy="411480"/>
           </a:xfrm>
           <a:prstGeom prst="rect">
             <a:avLst/>
@@ -6839,17 +6928,17 @@
               <a:buNone/>
             </a:pPr>
             <a:r>
-              <a:rPr lang="en-US" sz="1200" i="1" dirty="0">
-                <a:solidFill>
-                  <a:srgbClr val="36454F"/>
-                </a:solidFill>
-                <a:latin typeface="Calibri" pitchFamily="34" charset="0"/>
-                <a:ea typeface="Calibri" pitchFamily="34" charset="-122"/>
-                <a:cs typeface="Calibri" pitchFamily="34" charset="-120"/>
-              </a:rPr>
-              <a:t>Virtual network, storage account, private DNS zone, and a private endpoint — wired together with resource selectors.</a:t>
-            </a:r>
-            <a:endParaRPr lang="en-US" sz="1200" dirty="0"/>
+              <a:rPr lang="en-US" sz="1150" i="1" dirty="0">
+                <a:solidFill>
+                  <a:srgbClr val="CADCFC"/>
+                </a:solidFill>
+                <a:latin typeface="Calibri" pitchFamily="34" charset="0"/>
+                <a:ea typeface="Calibri" pitchFamily="34" charset="-122"/>
+                <a:cs typeface="Calibri" pitchFamily="34" charset="-120"/>
+              </a:rPr>
+              <a:t>One namespaced XR, one Composition Function pipeline — wiring 6 resources (VNet, Subnet, Storage, Private DNS Zone &amp; Endpoint) into a single apply.</a:t>
+            </a:r>
+            <a:endParaRPr lang="en-US" sz="1150" dirty="0"/>
           </a:p>
         </p:txBody>
       </p:sp>
@@ -6861,18 +6950,23 @@
         </p:nvSpPr>
         <p:spPr>
           <a:xfrm>
-            <a:off x="548640" y="1920240"/>
-            <a:ext cx="1691640" cy="914400"/>
+            <a:off x="548640" y="1325880"/>
+            <a:ext cx="6400800" cy="4590288"/>
           </a:xfrm>
           <a:prstGeom prst="roundRect">
             <a:avLst>
-              <a:gd name="adj" fmla="val 10000"/>
+              <a:gd name="adj" fmla="val 1594"/>
             </a:avLst>
           </a:prstGeom>
           <a:solidFill>
-            <a:srgbClr val="5B7FA6"/>
+            <a:srgbClr val="0A1830"/>
           </a:solidFill>
-          <a:ln/>
+          <a:ln w="12700">
+            <a:solidFill>
+              <a:srgbClr val="5FD0C0"/>
+            </a:solidFill>
+            <a:prstDash val="solid"/>
+          </a:ln>
         </p:spPr>
       </p:sp>
       <p:sp>
@@ -6883,34 +6977,34 @@
         </p:nvSpPr>
         <p:spPr>
           <a:xfrm>
-            <a:off x="640080" y="2029968"/>
-            <a:ext cx="1508760" cy="365760"/>
-          </a:xfrm>
-          <a:prstGeom prst="rect">
-            <a:avLst/>
-          </a:prstGeom>
-          <a:noFill/>
-          <a:ln/>
-        </p:spPr>
-        <p:txBody>
-          <a:bodyPr wrap="square" lIns="0" tIns="0" rIns="0" bIns="0" rtlCol="0" anchor="ctr"/>
-          <a:lstStyle/>
-          <a:p>
-            <a:pPr algn="ctr" indent="0" marL="0">
-              <a:buNone/>
-            </a:pPr>
-            <a:r>
-              <a:rPr lang="en-US" sz="1150" b="1" dirty="0">
-                <a:solidFill>
-                  <a:srgbClr val="FFFFFF"/>
-                </a:solidFill>
-                <a:latin typeface="Calibri" pitchFamily="34" charset="0"/>
-                <a:ea typeface="Calibri" pitchFamily="34" charset="-122"/>
-                <a:cs typeface="Calibri" pitchFamily="34" charset="-120"/>
-              </a:rPr>
-              <a:t>Virtual Network</a:t>
-            </a:r>
-            <a:endParaRPr lang="en-US" sz="1150" dirty="0"/>
+            <a:off x="749808" y="1399032"/>
+            <a:ext cx="5998464" cy="292608"/>
+          </a:xfrm>
+          <a:prstGeom prst="rect">
+            <a:avLst/>
+          </a:prstGeom>
+          <a:noFill/>
+          <a:ln/>
+        </p:spPr>
+        <p:txBody>
+          <a:bodyPr wrap="square" lIns="0" tIns="0" rIns="0" bIns="0" rtlCol="0" anchor="ctr"/>
+          <a:lstStyle/>
+          <a:p>
+            <a:pPr indent="0" marL="0">
+              <a:buNone/>
+            </a:pPr>
+            <a:r>
+              <a:rPr lang="en-US" sz="1000" b="1" dirty="0">
+                <a:solidFill>
+                  <a:srgbClr val="5FD0C0"/>
+                </a:solidFill>
+                <a:latin typeface="Calibri" pitchFamily="34" charset="0"/>
+                <a:ea typeface="Calibri" pitchFamily="34" charset="-122"/>
+                <a:cs typeface="Calibri" pitchFamily="34" charset="-120"/>
+              </a:rPr>
+              <a:t>composition.yaml</a:t>
+            </a:r>
+            <a:endParaRPr lang="en-US" sz="1000" dirty="0"/>
           </a:p>
         </p:txBody>
       </p:sp>
@@ -6922,32 +7016,32 @@
         </p:nvSpPr>
         <p:spPr>
           <a:xfrm>
-            <a:off x="640080" y="2423160"/>
-            <a:ext cx="1508760" cy="320040"/>
-          </a:xfrm>
-          <a:prstGeom prst="rect">
-            <a:avLst/>
-          </a:prstGeom>
-          <a:noFill/>
-          <a:ln/>
-        </p:spPr>
-        <p:txBody>
-          <a:bodyPr wrap="square" lIns="0" tIns="0" rIns="0" bIns="0" rtlCol="0" anchor="ctr"/>
-          <a:lstStyle/>
-          <a:p>
-            <a:pPr algn="ctr" indent="0" marL="0">
+            <a:off x="749808" y="1709928"/>
+            <a:ext cx="5998464" cy="164592"/>
+          </a:xfrm>
+          <a:prstGeom prst="rect">
+            <a:avLst/>
+          </a:prstGeom>
+          <a:noFill/>
+          <a:ln/>
+        </p:spPr>
+        <p:txBody>
+          <a:bodyPr wrap="square" lIns="0" tIns="0" rIns="0" bIns="0" rtlCol="0" anchor="ctr"/>
+          <a:lstStyle/>
+          <a:p>
+            <a:pPr indent="0" marL="0">
               <a:buNone/>
             </a:pPr>
             <a:r>
               <a:rPr lang="en-US" sz="900" dirty="0">
                 <a:solidFill>
-                  <a:srgbClr val="E5EEF7"/>
+                  <a:srgbClr val="5FD0C0"/>
                 </a:solidFill>
                 <a:latin typeface="Courier New" pitchFamily="34" charset="0"/>
                 <a:ea typeface="Courier New" pitchFamily="34" charset="-122"/>
                 <a:cs typeface="Courier New" pitchFamily="34" charset="-120"/>
               </a:rPr>
-              <a:t>VirtualNetwork</a:t>
+              <a:t>apiVersion: apiextensions.crossplane.io/v1</a:t>
             </a:r>
             <a:endParaRPr lang="en-US" sz="900" dirty="0"/>
           </a:p>
@@ -6961,132 +7055,32 @@
         </p:nvSpPr>
         <p:spPr>
           <a:xfrm>
-            <a:off x="2240280" y="2194560"/>
-            <a:ext cx="320040" cy="365760"/>
-          </a:xfrm>
-          <a:prstGeom prst="rect">
-            <a:avLst/>
-          </a:prstGeom>
-          <a:noFill/>
-          <a:ln/>
-        </p:spPr>
-        <p:txBody>
-          <a:bodyPr wrap="square" lIns="0" tIns="0" rIns="0" bIns="0" rtlCol="0" anchor="ctr"/>
-          <a:lstStyle/>
-          <a:p>
-            <a:pPr algn="ctr" indent="0" marL="0">
-              <a:buNone/>
-            </a:pPr>
-            <a:r>
-              <a:rPr lang="en-US" sz="1800" b="1" dirty="0">
-                <a:solidFill>
-                  <a:srgbClr val="1C7293"/>
-                </a:solidFill>
-                <a:latin typeface="Calibri" pitchFamily="34" charset="0"/>
-                <a:ea typeface="Calibri" pitchFamily="34" charset="-122"/>
-                <a:cs typeface="Calibri" pitchFamily="34" charset="-120"/>
-              </a:rPr>
-              <a:t>→</a:t>
-            </a:r>
-            <a:endParaRPr lang="en-US" sz="1800" dirty="0"/>
-          </a:p>
-        </p:txBody>
-      </p:sp>
-      <p:sp>
-        <p:nvSpPr>
-          <p:cNvPr id="8" name="Shape 6"/>
-          <p:cNvSpPr/>
-          <p:nvPr/>
-        </p:nvSpPr>
-        <p:spPr>
-          <a:xfrm>
-            <a:off x="2560320" y="1920240"/>
-            <a:ext cx="1691640" cy="914400"/>
-          </a:xfrm>
-          <a:prstGeom prst="roundRect">
-            <a:avLst>
-              <a:gd name="adj" fmla="val 10000"/>
-            </a:avLst>
-          </a:prstGeom>
-          <a:solidFill>
-            <a:srgbClr val="1C7293"/>
-          </a:solidFill>
-          <a:ln/>
-        </p:spPr>
-      </p:sp>
-      <p:sp>
-        <p:nvSpPr>
-          <p:cNvPr id="9" name="Text 7"/>
-          <p:cNvSpPr/>
-          <p:nvPr/>
-        </p:nvSpPr>
-        <p:spPr>
-          <a:xfrm>
-            <a:off x="2651760" y="2029968"/>
-            <a:ext cx="1508760" cy="365760"/>
-          </a:xfrm>
-          <a:prstGeom prst="rect">
-            <a:avLst/>
-          </a:prstGeom>
-          <a:noFill/>
-          <a:ln/>
-        </p:spPr>
-        <p:txBody>
-          <a:bodyPr wrap="square" lIns="0" tIns="0" rIns="0" bIns="0" rtlCol="0" anchor="ctr"/>
-          <a:lstStyle/>
-          <a:p>
-            <a:pPr algn="ctr" indent="0" marL="0">
-              <a:buNone/>
-            </a:pPr>
-            <a:r>
-              <a:rPr lang="en-US" sz="1150" b="1" dirty="0">
-                <a:solidFill>
-                  <a:srgbClr val="FFFFFF"/>
-                </a:solidFill>
-                <a:latin typeface="Calibri" pitchFamily="34" charset="0"/>
-                <a:ea typeface="Calibri" pitchFamily="34" charset="-122"/>
-                <a:cs typeface="Calibri" pitchFamily="34" charset="-120"/>
-              </a:rPr>
-              <a:t>Subnet</a:t>
-            </a:r>
-            <a:endParaRPr lang="en-US" sz="1150" dirty="0"/>
-          </a:p>
-        </p:txBody>
-      </p:sp>
-      <p:sp>
-        <p:nvSpPr>
-          <p:cNvPr id="10" name="Text 8"/>
-          <p:cNvSpPr/>
-          <p:nvPr/>
-        </p:nvSpPr>
-        <p:spPr>
-          <a:xfrm>
-            <a:off x="2651760" y="2423160"/>
-            <a:ext cx="1508760" cy="320040"/>
-          </a:xfrm>
-          <a:prstGeom prst="rect">
-            <a:avLst/>
-          </a:prstGeom>
-          <a:noFill/>
-          <a:ln/>
-        </p:spPr>
-        <p:txBody>
-          <a:bodyPr wrap="square" lIns="0" tIns="0" rIns="0" bIns="0" rtlCol="0" anchor="ctr"/>
-          <a:lstStyle/>
-          <a:p>
-            <a:pPr algn="ctr" indent="0" marL="0">
+            <a:off x="749808" y="1874520"/>
+            <a:ext cx="5998464" cy="164592"/>
+          </a:xfrm>
+          <a:prstGeom prst="rect">
+            <a:avLst/>
+          </a:prstGeom>
+          <a:noFill/>
+          <a:ln/>
+        </p:spPr>
+        <p:txBody>
+          <a:bodyPr wrap="square" lIns="0" tIns="0" rIns="0" bIns="0" rtlCol="0" anchor="ctr"/>
+          <a:lstStyle/>
+          <a:p>
+            <a:pPr indent="0" marL="0">
               <a:buNone/>
             </a:pPr>
             <a:r>
               <a:rPr lang="en-US" sz="900" dirty="0">
                 <a:solidFill>
-                  <a:srgbClr val="E5EEF7"/>
+                  <a:srgbClr val="5FD0C0"/>
                 </a:solidFill>
                 <a:latin typeface="Courier New" pitchFamily="34" charset="0"/>
                 <a:ea typeface="Courier New" pitchFamily="34" charset="-122"/>
                 <a:cs typeface="Courier New" pitchFamily="34" charset="-120"/>
               </a:rPr>
-              <a:t>Subnet</a:t>
+              <a:t>kind: Composition</a:t>
             </a:r>
             <a:endParaRPr lang="en-US" sz="900" dirty="0"/>
           </a:p>
@@ -7094,138 +7088,38 @@
       </p:sp>
       <p:sp>
         <p:nvSpPr>
-          <p:cNvPr id="11" name="Text 9"/>
-          <p:cNvSpPr/>
-          <p:nvPr/>
-        </p:nvSpPr>
-        <p:spPr>
-          <a:xfrm>
-            <a:off x="4251960" y="2194560"/>
-            <a:ext cx="320040" cy="365760"/>
-          </a:xfrm>
-          <a:prstGeom prst="rect">
-            <a:avLst/>
-          </a:prstGeom>
-          <a:noFill/>
-          <a:ln/>
-        </p:spPr>
-        <p:txBody>
-          <a:bodyPr wrap="square" lIns="0" tIns="0" rIns="0" bIns="0" rtlCol="0" anchor="ctr"/>
-          <a:lstStyle/>
-          <a:p>
-            <a:pPr algn="ctr" indent="0" marL="0">
-              <a:buNone/>
-            </a:pPr>
-            <a:r>
-              <a:rPr lang="en-US" sz="1800" b="1" dirty="0">
-                <a:solidFill>
-                  <a:srgbClr val="1C7293"/>
-                </a:solidFill>
-                <a:latin typeface="Calibri" pitchFamily="34" charset="0"/>
-                <a:ea typeface="Calibri" pitchFamily="34" charset="-122"/>
-                <a:cs typeface="Calibri" pitchFamily="34" charset="-120"/>
-              </a:rPr>
-              <a:t>→</a:t>
-            </a:r>
-            <a:endParaRPr lang="en-US" sz="1800" dirty="0"/>
-          </a:p>
-        </p:txBody>
-      </p:sp>
-      <p:sp>
-        <p:nvSpPr>
-          <p:cNvPr id="12" name="Shape 10"/>
-          <p:cNvSpPr/>
-          <p:nvPr/>
-        </p:nvSpPr>
-        <p:spPr>
-          <a:xfrm>
-            <a:off x="4572000" y="1920240"/>
-            <a:ext cx="1691640" cy="914400"/>
-          </a:xfrm>
-          <a:prstGeom prst="roundRect">
-            <a:avLst>
-              <a:gd name="adj" fmla="val 10000"/>
-            </a:avLst>
-          </a:prstGeom>
-          <a:solidFill>
-            <a:srgbClr val="3E6B99"/>
-          </a:solidFill>
-          <a:ln/>
-        </p:spPr>
-      </p:sp>
-      <p:sp>
-        <p:nvSpPr>
-          <p:cNvPr id="13" name="Text 11"/>
-          <p:cNvSpPr/>
-          <p:nvPr/>
-        </p:nvSpPr>
-        <p:spPr>
-          <a:xfrm>
-            <a:off x="4663440" y="2029968"/>
-            <a:ext cx="1508760" cy="365760"/>
-          </a:xfrm>
-          <a:prstGeom prst="rect">
-            <a:avLst/>
-          </a:prstGeom>
-          <a:noFill/>
-          <a:ln/>
-        </p:spPr>
-        <p:txBody>
-          <a:bodyPr wrap="square" lIns="0" tIns="0" rIns="0" bIns="0" rtlCol="0" anchor="ctr"/>
-          <a:lstStyle/>
-          <a:p>
-            <a:pPr algn="ctr" indent="0" marL="0">
-              <a:buNone/>
-            </a:pPr>
-            <a:r>
-              <a:rPr lang="en-US" sz="1150" b="1" dirty="0">
-                <a:solidFill>
-                  <a:srgbClr val="FFFFFF"/>
-                </a:solidFill>
-                <a:latin typeface="Calibri" pitchFamily="34" charset="0"/>
-                <a:ea typeface="Calibri" pitchFamily="34" charset="-122"/>
-                <a:cs typeface="Calibri" pitchFamily="34" charset="-120"/>
-              </a:rPr>
-              <a:t>Private Endpoint</a:t>
-            </a:r>
-            <a:endParaRPr lang="en-US" sz="1150" dirty="0"/>
-          </a:p>
-        </p:txBody>
-      </p:sp>
-      <p:sp>
-        <p:nvSpPr>
-          <p:cNvPr id="14" name="Text 12"/>
-          <p:cNvSpPr/>
-          <p:nvPr/>
-        </p:nvSpPr>
-        <p:spPr>
-          <a:xfrm>
-            <a:off x="4663440" y="2423160"/>
-            <a:ext cx="1508760" cy="320040"/>
-          </a:xfrm>
-          <a:prstGeom prst="rect">
-            <a:avLst/>
-          </a:prstGeom>
-          <a:noFill/>
-          <a:ln/>
-        </p:spPr>
-        <p:txBody>
-          <a:bodyPr wrap="square" lIns="0" tIns="0" rIns="0" bIns="0" rtlCol="0" anchor="ctr"/>
-          <a:lstStyle/>
-          <a:p>
-            <a:pPr algn="ctr" indent="0" marL="0">
+          <p:cNvPr id="8" name="Text 6"/>
+          <p:cNvSpPr/>
+          <p:nvPr/>
+        </p:nvSpPr>
+        <p:spPr>
+          <a:xfrm>
+            <a:off x="749808" y="2039112"/>
+            <a:ext cx="5998464" cy="164592"/>
+          </a:xfrm>
+          <a:prstGeom prst="rect">
+            <a:avLst/>
+          </a:prstGeom>
+          <a:noFill/>
+          <a:ln/>
+        </p:spPr>
+        <p:txBody>
+          <a:bodyPr wrap="square" lIns="0" tIns="0" rIns="0" bIns="0" rtlCol="0" anchor="ctr"/>
+          <a:lstStyle/>
+          <a:p>
+            <a:pPr indent="0" marL="0">
               <a:buNone/>
             </a:pPr>
             <a:r>
               <a:rPr lang="en-US" sz="900" dirty="0">
                 <a:solidFill>
-                  <a:srgbClr val="E5EEF7"/>
+                  <a:srgbClr val="5FD0C0"/>
                 </a:solidFill>
                 <a:latin typeface="Courier New" pitchFamily="34" charset="0"/>
                 <a:ea typeface="Courier New" pitchFamily="34" charset="-122"/>
                 <a:cs typeface="Courier New" pitchFamily="34" charset="-120"/>
               </a:rPr>
-              <a:t>PrivateEndpoint</a:t>
+              <a:t>metadata:</a:t>
             </a:r>
             <a:endParaRPr lang="en-US" sz="900" dirty="0"/>
           </a:p>
@@ -7233,138 +7127,38 @@
       </p:sp>
       <p:sp>
         <p:nvSpPr>
-          <p:cNvPr id="15" name="Text 13"/>
-          <p:cNvSpPr/>
-          <p:nvPr/>
-        </p:nvSpPr>
-        <p:spPr>
-          <a:xfrm>
-            <a:off x="6263640" y="2194560"/>
-            <a:ext cx="320040" cy="365760"/>
-          </a:xfrm>
-          <a:prstGeom prst="rect">
-            <a:avLst/>
-          </a:prstGeom>
-          <a:noFill/>
-          <a:ln/>
-        </p:spPr>
-        <p:txBody>
-          <a:bodyPr wrap="square" lIns="0" tIns="0" rIns="0" bIns="0" rtlCol="0" anchor="ctr"/>
-          <a:lstStyle/>
-          <a:p>
-            <a:pPr algn="ctr" indent="0" marL="0">
-              <a:buNone/>
-            </a:pPr>
-            <a:r>
-              <a:rPr lang="en-US" sz="1800" b="1" dirty="0">
-                <a:solidFill>
-                  <a:srgbClr val="1C7293"/>
-                </a:solidFill>
-                <a:latin typeface="Calibri" pitchFamily="34" charset="0"/>
-                <a:ea typeface="Calibri" pitchFamily="34" charset="-122"/>
-                <a:cs typeface="Calibri" pitchFamily="34" charset="-120"/>
-              </a:rPr>
-              <a:t>→</a:t>
-            </a:r>
-            <a:endParaRPr lang="en-US" sz="1800" dirty="0"/>
-          </a:p>
-        </p:txBody>
-      </p:sp>
-      <p:sp>
-        <p:nvSpPr>
-          <p:cNvPr id="16" name="Shape 14"/>
-          <p:cNvSpPr/>
-          <p:nvPr/>
-        </p:nvSpPr>
-        <p:spPr>
-          <a:xfrm>
-            <a:off x="6583680" y="1920240"/>
-            <a:ext cx="1691640" cy="914400"/>
-          </a:xfrm>
-          <a:prstGeom prst="roundRect">
-            <a:avLst>
-              <a:gd name="adj" fmla="val 10000"/>
-            </a:avLst>
-          </a:prstGeom>
-          <a:solidFill>
-            <a:srgbClr val="0E8C74"/>
-          </a:solidFill>
-          <a:ln/>
-        </p:spPr>
-      </p:sp>
-      <p:sp>
-        <p:nvSpPr>
-          <p:cNvPr id="17" name="Text 15"/>
-          <p:cNvSpPr/>
-          <p:nvPr/>
-        </p:nvSpPr>
-        <p:spPr>
-          <a:xfrm>
-            <a:off x="6675120" y="2029968"/>
-            <a:ext cx="1508760" cy="365760"/>
-          </a:xfrm>
-          <a:prstGeom prst="rect">
-            <a:avLst/>
-          </a:prstGeom>
-          <a:noFill/>
-          <a:ln/>
-        </p:spPr>
-        <p:txBody>
-          <a:bodyPr wrap="square" lIns="0" tIns="0" rIns="0" bIns="0" rtlCol="0" anchor="ctr"/>
-          <a:lstStyle/>
-          <a:p>
-            <a:pPr algn="ctr" indent="0" marL="0">
-              <a:buNone/>
-            </a:pPr>
-            <a:r>
-              <a:rPr lang="en-US" sz="1150" b="1" dirty="0">
-                <a:solidFill>
-                  <a:srgbClr val="FFFFFF"/>
-                </a:solidFill>
-                <a:latin typeface="Calibri" pitchFamily="34" charset="0"/>
-                <a:ea typeface="Calibri" pitchFamily="34" charset="-122"/>
-                <a:cs typeface="Calibri" pitchFamily="34" charset="-120"/>
-              </a:rPr>
-              <a:t>Storage Account</a:t>
-            </a:r>
-            <a:endParaRPr lang="en-US" sz="1150" dirty="0"/>
-          </a:p>
-        </p:txBody>
-      </p:sp>
-      <p:sp>
-        <p:nvSpPr>
-          <p:cNvPr id="18" name="Text 16"/>
-          <p:cNvSpPr/>
-          <p:nvPr/>
-        </p:nvSpPr>
-        <p:spPr>
-          <a:xfrm>
-            <a:off x="6675120" y="2423160"/>
-            <a:ext cx="1508760" cy="320040"/>
-          </a:xfrm>
-          <a:prstGeom prst="rect">
-            <a:avLst/>
-          </a:prstGeom>
-          <a:noFill/>
-          <a:ln/>
-        </p:spPr>
-        <p:txBody>
-          <a:bodyPr wrap="square" lIns="0" tIns="0" rIns="0" bIns="0" rtlCol="0" anchor="ctr"/>
-          <a:lstStyle/>
-          <a:p>
-            <a:pPr algn="ctr" indent="0" marL="0">
+          <p:cNvPr id="9" name="Text 7"/>
+          <p:cNvSpPr/>
+          <p:nvPr/>
+        </p:nvSpPr>
+        <p:spPr>
+          <a:xfrm>
+            <a:off x="749808" y="2203704"/>
+            <a:ext cx="5998464" cy="164592"/>
+          </a:xfrm>
+          <a:prstGeom prst="rect">
+            <a:avLst/>
+          </a:prstGeom>
+          <a:noFill/>
+          <a:ln/>
+        </p:spPr>
+        <p:txBody>
+          <a:bodyPr wrap="square" lIns="0" tIns="0" rIns="0" bIns="0" rtlCol="0" anchor="ctr"/>
+          <a:lstStyle/>
+          <a:p>
+            <a:pPr indent="0" marL="0">
               <a:buNone/>
             </a:pPr>
             <a:r>
               <a:rPr lang="en-US" sz="900" dirty="0">
                 <a:solidFill>
-                  <a:srgbClr val="E5EEF7"/>
+                  <a:srgbClr val="D7E3F0"/>
                 </a:solidFill>
                 <a:latin typeface="Courier New" pitchFamily="34" charset="0"/>
                 <a:ea typeface="Courier New" pitchFamily="34" charset="-122"/>
                 <a:cs typeface="Courier New" pitchFamily="34" charset="-120"/>
               </a:rPr>
-              <a:t>Account</a:t>
+              <a:t>  name: private-storage-azure</a:t>
             </a:r>
             <a:endParaRPr lang="en-US" sz="900" dirty="0"/>
           </a:p>
@@ -7372,138 +7166,38 @@
       </p:sp>
       <p:sp>
         <p:nvSpPr>
-          <p:cNvPr id="19" name="Text 17"/>
-          <p:cNvSpPr/>
-          <p:nvPr/>
-        </p:nvSpPr>
-        <p:spPr>
-          <a:xfrm>
-            <a:off x="5234940" y="2880360"/>
-            <a:ext cx="365760" cy="320040"/>
-          </a:xfrm>
-          <a:prstGeom prst="rect">
-            <a:avLst/>
-          </a:prstGeom>
-          <a:noFill/>
-          <a:ln/>
-        </p:spPr>
-        <p:txBody>
-          <a:bodyPr wrap="square" lIns="0" tIns="0" rIns="0" bIns="0" rtlCol="0" anchor="ctr"/>
-          <a:lstStyle/>
-          <a:p>
-            <a:pPr algn="ctr" indent="0" marL="0">
-              <a:buNone/>
-            </a:pPr>
-            <a:r>
-              <a:rPr lang="en-US" sz="1600" b="1" dirty="0">
-                <a:solidFill>
-                  <a:srgbClr val="1C7293"/>
-                </a:solidFill>
-                <a:latin typeface="Calibri" pitchFamily="34" charset="0"/>
-                <a:ea typeface="Calibri" pitchFamily="34" charset="-122"/>
-                <a:cs typeface="Calibri" pitchFamily="34" charset="-120"/>
-              </a:rPr>
-              <a:t>↓</a:t>
-            </a:r>
-            <a:endParaRPr lang="en-US" sz="1600" dirty="0"/>
-          </a:p>
-        </p:txBody>
-      </p:sp>
-      <p:sp>
-        <p:nvSpPr>
-          <p:cNvPr id="20" name="Shape 18"/>
-          <p:cNvSpPr/>
-          <p:nvPr/>
-        </p:nvSpPr>
-        <p:spPr>
-          <a:xfrm>
-            <a:off x="4206240" y="3246120"/>
-            <a:ext cx="2423160" cy="777240"/>
-          </a:xfrm>
-          <a:prstGeom prst="roundRect">
-            <a:avLst>
-              <a:gd name="adj" fmla="val 11765"/>
-            </a:avLst>
-          </a:prstGeom>
-          <a:solidFill>
-            <a:srgbClr val="1C7293"/>
-          </a:solidFill>
-          <a:ln/>
-        </p:spPr>
-      </p:sp>
-      <p:sp>
-        <p:nvSpPr>
-          <p:cNvPr id="21" name="Text 19"/>
-          <p:cNvSpPr/>
-          <p:nvPr/>
-        </p:nvSpPr>
-        <p:spPr>
-          <a:xfrm>
-            <a:off x="4206240" y="3337560"/>
-            <a:ext cx="2423160" cy="320040"/>
-          </a:xfrm>
-          <a:prstGeom prst="rect">
-            <a:avLst/>
-          </a:prstGeom>
-          <a:noFill/>
-          <a:ln/>
-        </p:spPr>
-        <p:txBody>
-          <a:bodyPr wrap="square" lIns="0" tIns="0" rIns="0" bIns="0" rtlCol="0" anchor="ctr"/>
-          <a:lstStyle/>
-          <a:p>
-            <a:pPr algn="ctr" indent="0" marL="0">
-              <a:buNone/>
-            </a:pPr>
-            <a:r>
-              <a:rPr lang="en-US" sz="1150" b="1" dirty="0">
-                <a:solidFill>
-                  <a:srgbClr val="FFFFFF"/>
-                </a:solidFill>
-                <a:latin typeface="Calibri" pitchFamily="34" charset="0"/>
-                <a:ea typeface="Calibri" pitchFamily="34" charset="-122"/>
-                <a:cs typeface="Calibri" pitchFamily="34" charset="-120"/>
-              </a:rPr>
-              <a:t>Private DNS Zone</a:t>
-            </a:r>
-            <a:endParaRPr lang="en-US" sz="1150" dirty="0"/>
-          </a:p>
-        </p:txBody>
-      </p:sp>
-      <p:sp>
-        <p:nvSpPr>
-          <p:cNvPr id="22" name="Text 20"/>
-          <p:cNvSpPr/>
-          <p:nvPr/>
-        </p:nvSpPr>
-        <p:spPr>
-          <a:xfrm>
-            <a:off x="4206240" y="3657600"/>
-            <a:ext cx="2423160" cy="320040"/>
-          </a:xfrm>
-          <a:prstGeom prst="rect">
-            <a:avLst/>
-          </a:prstGeom>
-          <a:noFill/>
-          <a:ln/>
-        </p:spPr>
-        <p:txBody>
-          <a:bodyPr wrap="square" lIns="0" tIns="0" rIns="0" bIns="0" rtlCol="0" anchor="ctr"/>
-          <a:lstStyle/>
-          <a:p>
-            <a:pPr algn="ctr" indent="0" marL="0">
+          <p:cNvPr id="10" name="Text 8"/>
+          <p:cNvSpPr/>
+          <p:nvPr/>
+        </p:nvSpPr>
+        <p:spPr>
+          <a:xfrm>
+            <a:off x="749808" y="2368296"/>
+            <a:ext cx="5998464" cy="164592"/>
+          </a:xfrm>
+          <a:prstGeom prst="rect">
+            <a:avLst/>
+          </a:prstGeom>
+          <a:noFill/>
+          <a:ln/>
+        </p:spPr>
+        <p:txBody>
+          <a:bodyPr wrap="square" lIns="0" tIns="0" rIns="0" bIns="0" rtlCol="0" anchor="ctr"/>
+          <a:lstStyle/>
+          <a:p>
+            <a:pPr indent="0" marL="0">
               <a:buNone/>
             </a:pPr>
             <a:r>
               <a:rPr lang="en-US" sz="900" dirty="0">
                 <a:solidFill>
-                  <a:srgbClr val="E5EEF7"/>
+                  <a:srgbClr val="5FD0C0"/>
                 </a:solidFill>
                 <a:latin typeface="Courier New" pitchFamily="34" charset="0"/>
                 <a:ea typeface="Courier New" pitchFamily="34" charset="-122"/>
                 <a:cs typeface="Courier New" pitchFamily="34" charset="-120"/>
               </a:rPr>
-              <a:t>PrivateDNSZone + ZoneGroup</a:t>
+              <a:t>spec:</a:t>
             </a:r>
             <a:endParaRPr lang="en-US" sz="900" dirty="0"/>
           </a:p>
@@ -7511,14 +7205,1160 @@
       </p:sp>
       <p:sp>
         <p:nvSpPr>
+          <p:cNvPr id="11" name="Text 9"/>
+          <p:cNvSpPr/>
+          <p:nvPr/>
+        </p:nvSpPr>
+        <p:spPr>
+          <a:xfrm>
+            <a:off x="749808" y="2532888"/>
+            <a:ext cx="5998464" cy="164592"/>
+          </a:xfrm>
+          <a:prstGeom prst="rect">
+            <a:avLst/>
+          </a:prstGeom>
+          <a:noFill/>
+          <a:ln/>
+        </p:spPr>
+        <p:txBody>
+          <a:bodyPr wrap="square" lIns="0" tIns="0" rIns="0" bIns="0" rtlCol="0" anchor="ctr"/>
+          <a:lstStyle/>
+          <a:p>
+            <a:pPr indent="0" marL="0">
+              <a:buNone/>
+            </a:pPr>
+            <a:r>
+              <a:rPr lang="en-US" sz="900" dirty="0">
+                <a:solidFill>
+                  <a:srgbClr val="D7E3F0"/>
+                </a:solidFill>
+                <a:latin typeface="Courier New" pitchFamily="34" charset="0"/>
+                <a:ea typeface="Courier New" pitchFamily="34" charset="-122"/>
+                <a:cs typeface="Courier New" pitchFamily="34" charset="-120"/>
+              </a:rPr>
+              <a:t>  compositeTypeRef: {kind: XPrivateStorage}</a:t>
+            </a:r>
+            <a:endParaRPr lang="en-US" sz="900" dirty="0"/>
+          </a:p>
+        </p:txBody>
+      </p:sp>
+      <p:sp>
+        <p:nvSpPr>
+          <p:cNvPr id="12" name="Text 10"/>
+          <p:cNvSpPr/>
+          <p:nvPr/>
+        </p:nvSpPr>
+        <p:spPr>
+          <a:xfrm>
+            <a:off x="749808" y="2697480"/>
+            <a:ext cx="5998464" cy="164592"/>
+          </a:xfrm>
+          <a:prstGeom prst="rect">
+            <a:avLst/>
+          </a:prstGeom>
+          <a:noFill/>
+          <a:ln/>
+        </p:spPr>
+        <p:txBody>
+          <a:bodyPr wrap="square" lIns="0" tIns="0" rIns="0" bIns="0" rtlCol="0" anchor="ctr"/>
+          <a:lstStyle/>
+          <a:p>
+            <a:pPr indent="0" marL="0">
+              <a:buNone/>
+            </a:pPr>
+            <a:r>
+              <a:rPr lang="en-US" sz="900" dirty="0">
+                <a:solidFill>
+                  <a:srgbClr val="D7E3F0"/>
+                </a:solidFill>
+                <a:latin typeface="Courier New" pitchFamily="34" charset="0"/>
+                <a:ea typeface="Courier New" pitchFamily="34" charset="-122"/>
+                <a:cs typeface="Courier New" pitchFamily="34" charset="-120"/>
+              </a:rPr>
+              <a:t>  mode: Pipeline</a:t>
+            </a:r>
+            <a:endParaRPr lang="en-US" sz="900" dirty="0"/>
+          </a:p>
+        </p:txBody>
+      </p:sp>
+      <p:sp>
+        <p:nvSpPr>
+          <p:cNvPr id="13" name="Text 11"/>
+          <p:cNvSpPr/>
+          <p:nvPr/>
+        </p:nvSpPr>
+        <p:spPr>
+          <a:xfrm>
+            <a:off x="749808" y="2862072"/>
+            <a:ext cx="5998464" cy="164592"/>
+          </a:xfrm>
+          <a:prstGeom prst="rect">
+            <a:avLst/>
+          </a:prstGeom>
+          <a:noFill/>
+          <a:ln/>
+        </p:spPr>
+        <p:txBody>
+          <a:bodyPr wrap="square" lIns="0" tIns="0" rIns="0" bIns="0" rtlCol="0" anchor="ctr"/>
+          <a:lstStyle/>
+          <a:p>
+            <a:pPr indent="0" marL="0">
+              <a:buNone/>
+            </a:pPr>
+            <a:r>
+              <a:rPr lang="en-US" sz="900" dirty="0">
+                <a:solidFill>
+                  <a:srgbClr val="D7E3F0"/>
+                </a:solidFill>
+                <a:latin typeface="Courier New" pitchFamily="34" charset="0"/>
+                <a:ea typeface="Courier New" pitchFamily="34" charset="-122"/>
+                <a:cs typeface="Courier New" pitchFamily="34" charset="-120"/>
+              </a:rPr>
+              <a:t>  pipeline:</a:t>
+            </a:r>
+            <a:endParaRPr lang="en-US" sz="900" dirty="0"/>
+          </a:p>
+        </p:txBody>
+      </p:sp>
+      <p:sp>
+        <p:nvSpPr>
+          <p:cNvPr id="14" name="Text 12"/>
+          <p:cNvSpPr/>
+          <p:nvPr/>
+        </p:nvSpPr>
+        <p:spPr>
+          <a:xfrm>
+            <a:off x="749808" y="3026664"/>
+            <a:ext cx="5998464" cy="164592"/>
+          </a:xfrm>
+          <a:prstGeom prst="rect">
+            <a:avLst/>
+          </a:prstGeom>
+          <a:noFill/>
+          <a:ln/>
+        </p:spPr>
+        <p:txBody>
+          <a:bodyPr wrap="square" lIns="0" tIns="0" rIns="0" bIns="0" rtlCol="0" anchor="ctr"/>
+          <a:lstStyle/>
+          <a:p>
+            <a:pPr indent="0" marL="0">
+              <a:buNone/>
+            </a:pPr>
+            <a:r>
+              <a:rPr lang="en-US" sz="900" dirty="0">
+                <a:solidFill>
+                  <a:srgbClr val="5FD0C0"/>
+                </a:solidFill>
+                <a:latin typeface="Courier New" pitchFamily="34" charset="0"/>
+                <a:ea typeface="Courier New" pitchFamily="34" charset="-122"/>
+                <a:cs typeface="Courier New" pitchFamily="34" charset="-120"/>
+              </a:rPr>
+              <a:t>    - step: compose-resources</a:t>
+            </a:r>
+            <a:endParaRPr lang="en-US" sz="900" dirty="0"/>
+          </a:p>
+        </p:txBody>
+      </p:sp>
+      <p:sp>
+        <p:nvSpPr>
+          <p:cNvPr id="15" name="Text 13"/>
+          <p:cNvSpPr/>
+          <p:nvPr/>
+        </p:nvSpPr>
+        <p:spPr>
+          <a:xfrm>
+            <a:off x="749808" y="3191256"/>
+            <a:ext cx="5998464" cy="164592"/>
+          </a:xfrm>
+          <a:prstGeom prst="rect">
+            <a:avLst/>
+          </a:prstGeom>
+          <a:noFill/>
+          <a:ln/>
+        </p:spPr>
+        <p:txBody>
+          <a:bodyPr wrap="square" lIns="0" tIns="0" rIns="0" bIns="0" rtlCol="0" anchor="ctr"/>
+          <a:lstStyle/>
+          <a:p>
+            <a:pPr indent="0" marL="0">
+              <a:buNone/>
+            </a:pPr>
+            <a:r>
+              <a:rPr lang="en-US" sz="900" dirty="0">
+                <a:solidFill>
+                  <a:srgbClr val="D7E3F0"/>
+                </a:solidFill>
+                <a:latin typeface="Courier New" pitchFamily="34" charset="0"/>
+                <a:ea typeface="Courier New" pitchFamily="34" charset="-122"/>
+                <a:cs typeface="Courier New" pitchFamily="34" charset="-120"/>
+              </a:rPr>
+              <a:t>      functionRef:</a:t>
+            </a:r>
+            <a:endParaRPr lang="en-US" sz="900" dirty="0"/>
+          </a:p>
+        </p:txBody>
+      </p:sp>
+      <p:sp>
+        <p:nvSpPr>
+          <p:cNvPr id="16" name="Text 14"/>
+          <p:cNvSpPr/>
+          <p:nvPr/>
+        </p:nvSpPr>
+        <p:spPr>
+          <a:xfrm>
+            <a:off x="749808" y="3355848"/>
+            <a:ext cx="5998464" cy="164592"/>
+          </a:xfrm>
+          <a:prstGeom prst="rect">
+            <a:avLst/>
+          </a:prstGeom>
+          <a:noFill/>
+          <a:ln/>
+        </p:spPr>
+        <p:txBody>
+          <a:bodyPr wrap="square" lIns="0" tIns="0" rIns="0" bIns="0" rtlCol="0" anchor="ctr"/>
+          <a:lstStyle/>
+          <a:p>
+            <a:pPr indent="0" marL="0">
+              <a:buNone/>
+            </a:pPr>
+            <a:r>
+              <a:rPr lang="en-US" sz="900" dirty="0">
+                <a:solidFill>
+                  <a:srgbClr val="D7E3F0"/>
+                </a:solidFill>
+                <a:latin typeface="Courier New" pitchFamily="34" charset="0"/>
+                <a:ea typeface="Courier New" pitchFamily="34" charset="-122"/>
+                <a:cs typeface="Courier New" pitchFamily="34" charset="-120"/>
+              </a:rPr>
+              <a:t>        name: function-patch-and-transform</a:t>
+            </a:r>
+            <a:endParaRPr lang="en-US" sz="900" dirty="0"/>
+          </a:p>
+        </p:txBody>
+      </p:sp>
+      <p:sp>
+        <p:nvSpPr>
+          <p:cNvPr id="17" name="Text 15"/>
+          <p:cNvSpPr/>
+          <p:nvPr/>
+        </p:nvSpPr>
+        <p:spPr>
+          <a:xfrm>
+            <a:off x="749808" y="3520440"/>
+            <a:ext cx="5998464" cy="164592"/>
+          </a:xfrm>
+          <a:prstGeom prst="rect">
+            <a:avLst/>
+          </a:prstGeom>
+          <a:noFill/>
+          <a:ln/>
+        </p:spPr>
+        <p:txBody>
+          <a:bodyPr wrap="square" lIns="0" tIns="0" rIns="0" bIns="0" rtlCol="0" anchor="ctr"/>
+          <a:lstStyle/>
+          <a:p>
+            <a:pPr indent="0" marL="0">
+              <a:buNone/>
+            </a:pPr>
+            <a:r>
+              <a:rPr lang="en-US" sz="900" dirty="0">
+                <a:solidFill>
+                  <a:srgbClr val="D7E3F0"/>
+                </a:solidFill>
+                <a:latin typeface="Courier New" pitchFamily="34" charset="0"/>
+                <a:ea typeface="Courier New" pitchFamily="34" charset="-122"/>
+                <a:cs typeface="Courier New" pitchFamily="34" charset="-120"/>
+              </a:rPr>
+              <a:t>      input:</a:t>
+            </a:r>
+            <a:endParaRPr lang="en-US" sz="900" dirty="0"/>
+          </a:p>
+        </p:txBody>
+      </p:sp>
+      <p:sp>
+        <p:nvSpPr>
+          <p:cNvPr id="18" name="Text 16"/>
+          <p:cNvSpPr/>
+          <p:nvPr/>
+        </p:nvSpPr>
+        <p:spPr>
+          <a:xfrm>
+            <a:off x="749808" y="3685032"/>
+            <a:ext cx="5998464" cy="164592"/>
+          </a:xfrm>
+          <a:prstGeom prst="rect">
+            <a:avLst/>
+          </a:prstGeom>
+          <a:noFill/>
+          <a:ln/>
+        </p:spPr>
+        <p:txBody>
+          <a:bodyPr wrap="square" lIns="0" tIns="0" rIns="0" bIns="0" rtlCol="0" anchor="ctr"/>
+          <a:lstStyle/>
+          <a:p>
+            <a:pPr indent="0" marL="0">
+              <a:buNone/>
+            </a:pPr>
+            <a:r>
+              <a:rPr lang="en-US" sz="900" dirty="0">
+                <a:solidFill>
+                  <a:srgbClr val="D7E3F0"/>
+                </a:solidFill>
+                <a:latin typeface="Courier New" pitchFamily="34" charset="0"/>
+                <a:ea typeface="Courier New" pitchFamily="34" charset="-122"/>
+                <a:cs typeface="Courier New" pitchFamily="34" charset="-120"/>
+              </a:rPr>
+              <a:t>        kind: Resources</a:t>
+            </a:r>
+            <a:endParaRPr lang="en-US" sz="900" dirty="0"/>
+          </a:p>
+        </p:txBody>
+      </p:sp>
+      <p:sp>
+        <p:nvSpPr>
+          <p:cNvPr id="19" name="Text 17"/>
+          <p:cNvSpPr/>
+          <p:nvPr/>
+        </p:nvSpPr>
+        <p:spPr>
+          <a:xfrm>
+            <a:off x="749808" y="3849624"/>
+            <a:ext cx="5998464" cy="164592"/>
+          </a:xfrm>
+          <a:prstGeom prst="rect">
+            <a:avLst/>
+          </a:prstGeom>
+          <a:noFill/>
+          <a:ln/>
+        </p:spPr>
+        <p:txBody>
+          <a:bodyPr wrap="square" lIns="0" tIns="0" rIns="0" bIns="0" rtlCol="0" anchor="ctr"/>
+          <a:lstStyle/>
+          <a:p>
+            <a:pPr indent="0" marL="0">
+              <a:buNone/>
+            </a:pPr>
+            <a:r>
+              <a:rPr lang="en-US" sz="900" dirty="0">
+                <a:solidFill>
+                  <a:srgbClr val="D7E3F0"/>
+                </a:solidFill>
+                <a:latin typeface="Courier New" pitchFamily="34" charset="0"/>
+                <a:ea typeface="Courier New" pitchFamily="34" charset="-122"/>
+                <a:cs typeface="Courier New" pitchFamily="34" charset="-120"/>
+              </a:rPr>
+              <a:t>        resources:</a:t>
+            </a:r>
+            <a:endParaRPr lang="en-US" sz="900" dirty="0"/>
+          </a:p>
+        </p:txBody>
+      </p:sp>
+      <p:sp>
+        <p:nvSpPr>
+          <p:cNvPr id="20" name="Text 18"/>
+          <p:cNvSpPr/>
+          <p:nvPr/>
+        </p:nvSpPr>
+        <p:spPr>
+          <a:xfrm>
+            <a:off x="749808" y="4014216"/>
+            <a:ext cx="5998464" cy="164592"/>
+          </a:xfrm>
+          <a:prstGeom prst="rect">
+            <a:avLst/>
+          </a:prstGeom>
+          <a:noFill/>
+          <a:ln/>
+        </p:spPr>
+        <p:txBody>
+          <a:bodyPr wrap="square" lIns="0" tIns="0" rIns="0" bIns="0" rtlCol="0" anchor="ctr"/>
+          <a:lstStyle/>
+          <a:p>
+            <a:pPr indent="0" marL="0">
+              <a:buNone/>
+            </a:pPr>
+            <a:r>
+              <a:rPr lang="en-US" sz="900" dirty="0">
+                <a:solidFill>
+                  <a:srgbClr val="D7E3F0"/>
+                </a:solidFill>
+                <a:latin typeface="Courier New" pitchFamily="34" charset="0"/>
+                <a:ea typeface="Courier New" pitchFamily="34" charset="-122"/>
+                <a:cs typeface="Courier New" pitchFamily="34" charset="-120"/>
+              </a:rPr>
+              <a:t>          - name: vnet</a:t>
+            </a:r>
+            <a:endParaRPr lang="en-US" sz="900" dirty="0"/>
+          </a:p>
+        </p:txBody>
+      </p:sp>
+      <p:sp>
+        <p:nvSpPr>
+          <p:cNvPr id="21" name="Text 19"/>
+          <p:cNvSpPr/>
+          <p:nvPr/>
+        </p:nvSpPr>
+        <p:spPr>
+          <a:xfrm>
+            <a:off x="749808" y="4178808"/>
+            <a:ext cx="5998464" cy="164592"/>
+          </a:xfrm>
+          <a:prstGeom prst="rect">
+            <a:avLst/>
+          </a:prstGeom>
+          <a:noFill/>
+          <a:ln/>
+        </p:spPr>
+        <p:txBody>
+          <a:bodyPr wrap="square" lIns="0" tIns="0" rIns="0" bIns="0" rtlCol="0" anchor="ctr"/>
+          <a:lstStyle/>
+          <a:p>
+            <a:pPr indent="0" marL="0">
+              <a:buNone/>
+            </a:pPr>
+            <a:r>
+              <a:rPr lang="en-US" sz="900" dirty="0">
+                <a:solidFill>
+                  <a:srgbClr val="D7E3F0"/>
+                </a:solidFill>
+                <a:latin typeface="Courier New" pitchFamily="34" charset="0"/>
+                <a:ea typeface="Courier New" pitchFamily="34" charset="-122"/>
+                <a:cs typeface="Courier New" pitchFamily="34" charset="-120"/>
+              </a:rPr>
+              <a:t>            base: {kind: VirtualNetwork}</a:t>
+            </a:r>
+            <a:endParaRPr lang="en-US" sz="900" dirty="0"/>
+          </a:p>
+        </p:txBody>
+      </p:sp>
+      <p:sp>
+        <p:nvSpPr>
+          <p:cNvPr id="22" name="Text 20"/>
+          <p:cNvSpPr/>
+          <p:nvPr/>
+        </p:nvSpPr>
+        <p:spPr>
+          <a:xfrm>
+            <a:off x="749808" y="4343400"/>
+            <a:ext cx="5998464" cy="164592"/>
+          </a:xfrm>
+          <a:prstGeom prst="rect">
+            <a:avLst/>
+          </a:prstGeom>
+          <a:noFill/>
+          <a:ln/>
+        </p:spPr>
+        <p:txBody>
+          <a:bodyPr wrap="square" lIns="0" tIns="0" rIns="0" bIns="0" rtlCol="0" anchor="ctr"/>
+          <a:lstStyle/>
+          <a:p>
+            <a:pPr indent="0" marL="0">
+              <a:buNone/>
+            </a:pPr>
+            <a:r>
+              <a:rPr lang="en-US" sz="900" dirty="0">
+                <a:solidFill>
+                  <a:srgbClr val="D7E3F0"/>
+                </a:solidFill>
+                <a:latin typeface="Courier New" pitchFamily="34" charset="0"/>
+                <a:ea typeface="Courier New" pitchFamily="34" charset="-122"/>
+                <a:cs typeface="Courier New" pitchFamily="34" charset="-120"/>
+              </a:rPr>
+              <a:t>          - name: subnet</a:t>
+            </a:r>
+            <a:endParaRPr lang="en-US" sz="900" dirty="0"/>
+          </a:p>
+        </p:txBody>
+      </p:sp>
+      <p:sp>
+        <p:nvSpPr>
           <p:cNvPr id="23" name="Text 21"/>
           <p:cNvSpPr/>
           <p:nvPr/>
         </p:nvSpPr>
         <p:spPr>
           <a:xfrm>
-            <a:off x="548640" y="4251960"/>
-            <a:ext cx="7726680" cy="502920"/>
+            <a:off x="749808" y="4507992"/>
+            <a:ext cx="5998464" cy="164592"/>
+          </a:xfrm>
+          <a:prstGeom prst="rect">
+            <a:avLst/>
+          </a:prstGeom>
+          <a:noFill/>
+          <a:ln/>
+        </p:spPr>
+        <p:txBody>
+          <a:bodyPr wrap="square" lIns="0" tIns="0" rIns="0" bIns="0" rtlCol="0" anchor="ctr"/>
+          <a:lstStyle/>
+          <a:p>
+            <a:pPr indent="0" marL="0">
+              <a:buNone/>
+            </a:pPr>
+            <a:r>
+              <a:rPr lang="en-US" sz="900" dirty="0">
+                <a:solidFill>
+                  <a:srgbClr val="D7E3F0"/>
+                </a:solidFill>
+                <a:latin typeface="Courier New" pitchFamily="34" charset="0"/>
+                <a:ea typeface="Courier New" pitchFamily="34" charset="-122"/>
+                <a:cs typeface="Courier New" pitchFamily="34" charset="-120"/>
+              </a:rPr>
+              <a:t>            base: {kind: Subnet, spec: {forProvider: {</a:t>
+            </a:r>
+            <a:endParaRPr lang="en-US" sz="900" dirty="0"/>
+          </a:p>
+        </p:txBody>
+      </p:sp>
+      <p:sp>
+        <p:nvSpPr>
+          <p:cNvPr id="24" name="Text 22"/>
+          <p:cNvSpPr/>
+          <p:nvPr/>
+        </p:nvSpPr>
+        <p:spPr>
+          <a:xfrm>
+            <a:off x="749808" y="4672584"/>
+            <a:ext cx="5998464" cy="164592"/>
+          </a:xfrm>
+          <a:prstGeom prst="rect">
+            <a:avLst/>
+          </a:prstGeom>
+          <a:noFill/>
+          <a:ln/>
+        </p:spPr>
+        <p:txBody>
+          <a:bodyPr wrap="square" lIns="0" tIns="0" rIns="0" bIns="0" rtlCol="0" anchor="ctr"/>
+          <a:lstStyle/>
+          <a:p>
+            <a:pPr indent="0" marL="0">
+              <a:buNone/>
+            </a:pPr>
+            <a:r>
+              <a:rPr lang="en-US" sz="900" dirty="0">
+                <a:solidFill>
+                  <a:srgbClr val="5FD0C0"/>
+                </a:solidFill>
+                <a:latin typeface="Courier New" pitchFamily="34" charset="0"/>
+                <a:ea typeface="Courier New" pitchFamily="34" charset="-122"/>
+                <a:cs typeface="Courier New" pitchFamily="34" charset="-120"/>
+              </a:rPr>
+              <a:t>              virtualNetworkNameSelector: {matchControllerRef: true}}}}</a:t>
+            </a:r>
+            <a:endParaRPr lang="en-US" sz="900" dirty="0"/>
+          </a:p>
+        </p:txBody>
+      </p:sp>
+      <p:sp>
+        <p:nvSpPr>
+          <p:cNvPr id="25" name="Text 23"/>
+          <p:cNvSpPr/>
+          <p:nvPr/>
+        </p:nvSpPr>
+        <p:spPr>
+          <a:xfrm>
+            <a:off x="749808" y="4837176"/>
+            <a:ext cx="5998464" cy="164592"/>
+          </a:xfrm>
+          <a:prstGeom prst="rect">
+            <a:avLst/>
+          </a:prstGeom>
+          <a:noFill/>
+          <a:ln/>
+        </p:spPr>
+        <p:txBody>
+          <a:bodyPr wrap="square" lIns="0" tIns="0" rIns="0" bIns="0" rtlCol="0" anchor="ctr"/>
+          <a:lstStyle/>
+          <a:p>
+            <a:pPr indent="0" marL="0">
+              <a:buNone/>
+            </a:pPr>
+            <a:r>
+              <a:rPr lang="en-US" sz="900" dirty="0">
+                <a:solidFill>
+                  <a:srgbClr val="D7E3F0"/>
+                </a:solidFill>
+                <a:latin typeface="Courier New" pitchFamily="34" charset="0"/>
+                <a:ea typeface="Courier New" pitchFamily="34" charset="-122"/>
+                <a:cs typeface="Courier New" pitchFamily="34" charset="-120"/>
+              </a:rPr>
+              <a:t>          - name: endpoint</a:t>
+            </a:r>
+            <a:endParaRPr lang="en-US" sz="900" dirty="0"/>
+          </a:p>
+        </p:txBody>
+      </p:sp>
+      <p:sp>
+        <p:nvSpPr>
+          <p:cNvPr id="26" name="Text 24"/>
+          <p:cNvSpPr/>
+          <p:nvPr/>
+        </p:nvSpPr>
+        <p:spPr>
+          <a:xfrm>
+            <a:off x="749808" y="5001768"/>
+            <a:ext cx="5998464" cy="164592"/>
+          </a:xfrm>
+          <a:prstGeom prst="rect">
+            <a:avLst/>
+          </a:prstGeom>
+          <a:noFill/>
+          <a:ln/>
+        </p:spPr>
+        <p:txBody>
+          <a:bodyPr wrap="square" lIns="0" tIns="0" rIns="0" bIns="0" rtlCol="0" anchor="ctr"/>
+          <a:lstStyle/>
+          <a:p>
+            <a:pPr indent="0" marL="0">
+              <a:buNone/>
+            </a:pPr>
+            <a:r>
+              <a:rPr lang="en-US" sz="900" dirty="0">
+                <a:solidFill>
+                  <a:srgbClr val="D7E3F0"/>
+                </a:solidFill>
+                <a:latin typeface="Courier New" pitchFamily="34" charset="0"/>
+                <a:ea typeface="Courier New" pitchFamily="34" charset="-122"/>
+                <a:cs typeface="Courier New" pitchFamily="34" charset="-120"/>
+              </a:rPr>
+              <a:t>            base: {kind: PrivateEndpoint, spec: {forProvider: {</a:t>
+            </a:r>
+            <a:endParaRPr lang="en-US" sz="900" dirty="0"/>
+          </a:p>
+        </p:txBody>
+      </p:sp>
+      <p:sp>
+        <p:nvSpPr>
+          <p:cNvPr id="27" name="Text 25"/>
+          <p:cNvSpPr/>
+          <p:nvPr/>
+        </p:nvSpPr>
+        <p:spPr>
+          <a:xfrm>
+            <a:off x="749808" y="5166360"/>
+            <a:ext cx="5998464" cy="164592"/>
+          </a:xfrm>
+          <a:prstGeom prst="rect">
+            <a:avLst/>
+          </a:prstGeom>
+          <a:noFill/>
+          <a:ln/>
+        </p:spPr>
+        <p:txBody>
+          <a:bodyPr wrap="square" lIns="0" tIns="0" rIns="0" bIns="0" rtlCol="0" anchor="ctr"/>
+          <a:lstStyle/>
+          <a:p>
+            <a:pPr indent="0" marL="0">
+              <a:buNone/>
+            </a:pPr>
+            <a:r>
+              <a:rPr lang="en-US" sz="900" dirty="0">
+                <a:solidFill>
+                  <a:srgbClr val="5FD0C0"/>
+                </a:solidFill>
+                <a:latin typeface="Courier New" pitchFamily="34" charset="0"/>
+                <a:ea typeface="Courier New" pitchFamily="34" charset="-122"/>
+                <a:cs typeface="Courier New" pitchFamily="34" charset="-120"/>
+              </a:rPr>
+              <a:t>              subnetIdSelector: {matchControllerRef: true}}}}</a:t>
+            </a:r>
+            <a:endParaRPr lang="en-US" sz="900" dirty="0"/>
+          </a:p>
+        </p:txBody>
+      </p:sp>
+      <p:sp>
+        <p:nvSpPr>
+          <p:cNvPr id="28" name="Text 26"/>
+          <p:cNvSpPr/>
+          <p:nvPr/>
+        </p:nvSpPr>
+        <p:spPr>
+          <a:xfrm>
+            <a:off x="749808" y="5330952"/>
+            <a:ext cx="5998464" cy="164592"/>
+          </a:xfrm>
+          <a:prstGeom prst="rect">
+            <a:avLst/>
+          </a:prstGeom>
+          <a:noFill/>
+          <a:ln/>
+        </p:spPr>
+        <p:txBody>
+          <a:bodyPr wrap="square" lIns="0" tIns="0" rIns="0" bIns="0" rtlCol="0" anchor="ctr"/>
+          <a:lstStyle/>
+          <a:p>
+            <a:pPr indent="0" marL="0">
+              <a:buNone/>
+            </a:pPr>
+            <a:r>
+              <a:rPr lang="en-US" sz="900" dirty="0">
+                <a:solidFill>
+                  <a:srgbClr val="6E86A8"/>
+                </a:solidFill>
+                <a:latin typeface="Courier New" pitchFamily="34" charset="0"/>
+                <a:ea typeface="Courier New" pitchFamily="34" charset="-122"/>
+                <a:cs typeface="Courier New" pitchFamily="34" charset="-120"/>
+              </a:rPr>
+              <a:t>          # storage, dnsZone, vnetLink, zoneGroup: same pattern</a:t>
+            </a:r>
+            <a:endParaRPr lang="en-US" sz="900" dirty="0"/>
+          </a:p>
+        </p:txBody>
+      </p:sp>
+      <p:sp>
+        <p:nvSpPr>
+          <p:cNvPr id="29" name="Text 27"/>
+          <p:cNvSpPr/>
+          <p:nvPr/>
+        </p:nvSpPr>
+        <p:spPr>
+          <a:xfrm>
+            <a:off x="749808" y="5495544"/>
+            <a:ext cx="5998464" cy="164592"/>
+          </a:xfrm>
+          <a:prstGeom prst="rect">
+            <a:avLst/>
+          </a:prstGeom>
+          <a:noFill/>
+          <a:ln/>
+        </p:spPr>
+        <p:txBody>
+          <a:bodyPr wrap="square" lIns="0" tIns="0" rIns="0" bIns="0" rtlCol="0" anchor="ctr"/>
+          <a:lstStyle/>
+          <a:p>
+            <a:pPr indent="0" marL="0">
+              <a:buNone/>
+            </a:pPr>
+            <a:r>
+              <a:rPr lang="en-US" sz="900" dirty="0">
+                <a:solidFill>
+                  <a:srgbClr val="5FD0C0"/>
+                </a:solidFill>
+                <a:latin typeface="Courier New" pitchFamily="34" charset="0"/>
+                <a:ea typeface="Courier New" pitchFamily="34" charset="-122"/>
+                <a:cs typeface="Courier New" pitchFamily="34" charset="-120"/>
+              </a:rPr>
+              <a:t>    - step: auto-ready</a:t>
+            </a:r>
+            <a:endParaRPr lang="en-US" sz="900" dirty="0"/>
+          </a:p>
+        </p:txBody>
+      </p:sp>
+      <p:sp>
+        <p:nvSpPr>
+          <p:cNvPr id="30" name="Text 28"/>
+          <p:cNvSpPr/>
+          <p:nvPr/>
+        </p:nvSpPr>
+        <p:spPr>
+          <a:xfrm>
+            <a:off x="749808" y="5660136"/>
+            <a:ext cx="5998464" cy="164592"/>
+          </a:xfrm>
+          <a:prstGeom prst="rect">
+            <a:avLst/>
+          </a:prstGeom>
+          <a:noFill/>
+          <a:ln/>
+        </p:spPr>
+        <p:txBody>
+          <a:bodyPr wrap="square" lIns="0" tIns="0" rIns="0" bIns="0" rtlCol="0" anchor="ctr"/>
+          <a:lstStyle/>
+          <a:p>
+            <a:pPr indent="0" marL="0">
+              <a:buNone/>
+            </a:pPr>
+            <a:r>
+              <a:rPr lang="en-US" sz="900" dirty="0">
+                <a:solidFill>
+                  <a:srgbClr val="D7E3F0"/>
+                </a:solidFill>
+                <a:latin typeface="Courier New" pitchFamily="34" charset="0"/>
+                <a:ea typeface="Courier New" pitchFamily="34" charset="-122"/>
+                <a:cs typeface="Courier New" pitchFamily="34" charset="-120"/>
+              </a:rPr>
+              <a:t>      functionRef: {name: function-auto-ready}</a:t>
+            </a:r>
+            <a:endParaRPr lang="en-US" sz="900" dirty="0"/>
+          </a:p>
+        </p:txBody>
+      </p:sp>
+      <p:sp>
+        <p:nvSpPr>
+          <p:cNvPr id="31" name="Shape 29"/>
+          <p:cNvSpPr/>
+          <p:nvPr/>
+        </p:nvSpPr>
+        <p:spPr>
+          <a:xfrm>
+            <a:off x="7223760" y="1325880"/>
+            <a:ext cx="4416552" cy="1865376"/>
+          </a:xfrm>
+          <a:prstGeom prst="roundRect">
+            <a:avLst>
+              <a:gd name="adj" fmla="val 3922"/>
+            </a:avLst>
+          </a:prstGeom>
+          <a:solidFill>
+            <a:srgbClr val="0A1830"/>
+          </a:solidFill>
+          <a:ln w="12700">
+            <a:solidFill>
+              <a:srgbClr val="1C7293"/>
+            </a:solidFill>
+            <a:prstDash val="solid"/>
+          </a:ln>
+        </p:spPr>
+      </p:sp>
+      <p:sp>
+        <p:nvSpPr>
+          <p:cNvPr id="32" name="Text 30"/>
+          <p:cNvSpPr/>
+          <p:nvPr/>
+        </p:nvSpPr>
+        <p:spPr>
+          <a:xfrm>
+            <a:off x="7424928" y="1453896"/>
+            <a:ext cx="4014216" cy="292608"/>
+          </a:xfrm>
+          <a:prstGeom prst="rect">
+            <a:avLst/>
+          </a:prstGeom>
+          <a:noFill/>
+          <a:ln/>
+        </p:spPr>
+        <p:txBody>
+          <a:bodyPr wrap="square" lIns="0" tIns="0" rIns="0" bIns="0" rtlCol="0" anchor="ctr"/>
+          <a:lstStyle/>
+          <a:p>
+            <a:pPr indent="0" marL="0">
+              <a:buNone/>
+            </a:pPr>
+            <a:r>
+              <a:rPr lang="en-US" sz="1000" b="1" dirty="0">
+                <a:solidFill>
+                  <a:srgbClr val="1C7293"/>
+                </a:solidFill>
+                <a:latin typeface="Calibri" pitchFamily="34" charset="0"/>
+                <a:ea typeface="Calibri" pitchFamily="34" charset="-122"/>
+                <a:cs typeface="Calibri" pitchFamily="34" charset="-120"/>
+              </a:rPr>
+              <a:t>applied by the developer</a:t>
+            </a:r>
+            <a:endParaRPr lang="en-US" sz="1000" dirty="0"/>
+          </a:p>
+        </p:txBody>
+      </p:sp>
+      <p:sp>
+        <p:nvSpPr>
+          <p:cNvPr id="33" name="Text 31"/>
+          <p:cNvSpPr/>
+          <p:nvPr/>
+        </p:nvSpPr>
+        <p:spPr>
+          <a:xfrm>
+            <a:off x="7424928" y="1764792"/>
+            <a:ext cx="4014216" cy="182880"/>
+          </a:xfrm>
+          <a:prstGeom prst="rect">
+            <a:avLst/>
+          </a:prstGeom>
+          <a:noFill/>
+          <a:ln/>
+        </p:spPr>
+        <p:txBody>
+          <a:bodyPr wrap="square" lIns="0" tIns="0" rIns="0" bIns="0" rtlCol="0" anchor="ctr"/>
+          <a:lstStyle/>
+          <a:p>
+            <a:pPr indent="0" marL="0">
+              <a:buNone/>
+            </a:pPr>
+            <a:r>
+              <a:rPr lang="en-US" sz="950" dirty="0">
+                <a:solidFill>
+                  <a:srgbClr val="5FD0C0"/>
+                </a:solidFill>
+                <a:latin typeface="Courier New" pitchFamily="34" charset="0"/>
+                <a:ea typeface="Courier New" pitchFamily="34" charset="-122"/>
+                <a:cs typeface="Courier New" pitchFamily="34" charset="-120"/>
+              </a:rPr>
+              <a:t>apiVersion: mycompany.com/v1</a:t>
+            </a:r>
+            <a:endParaRPr lang="en-US" sz="950" dirty="0"/>
+          </a:p>
+        </p:txBody>
+      </p:sp>
+      <p:sp>
+        <p:nvSpPr>
+          <p:cNvPr id="34" name="Text 32"/>
+          <p:cNvSpPr/>
+          <p:nvPr/>
+        </p:nvSpPr>
+        <p:spPr>
+          <a:xfrm>
+            <a:off x="7424928" y="1947672"/>
+            <a:ext cx="4014216" cy="182880"/>
+          </a:xfrm>
+          <a:prstGeom prst="rect">
+            <a:avLst/>
+          </a:prstGeom>
+          <a:noFill/>
+          <a:ln/>
+        </p:spPr>
+        <p:txBody>
+          <a:bodyPr wrap="square" lIns="0" tIns="0" rIns="0" bIns="0" rtlCol="0" anchor="ctr"/>
+          <a:lstStyle/>
+          <a:p>
+            <a:pPr indent="0" marL="0">
+              <a:buNone/>
+            </a:pPr>
+            <a:r>
+              <a:rPr lang="en-US" sz="950" dirty="0">
+                <a:solidFill>
+                  <a:srgbClr val="5FD0C0"/>
+                </a:solidFill>
+                <a:latin typeface="Courier New" pitchFamily="34" charset="0"/>
+                <a:ea typeface="Courier New" pitchFamily="34" charset="-122"/>
+                <a:cs typeface="Courier New" pitchFamily="34" charset="-120"/>
+              </a:rPr>
+              <a:t>kind: XPrivateStorage</a:t>
+            </a:r>
+            <a:endParaRPr lang="en-US" sz="950" dirty="0"/>
+          </a:p>
+        </p:txBody>
+      </p:sp>
+      <p:sp>
+        <p:nvSpPr>
+          <p:cNvPr id="35" name="Text 33"/>
+          <p:cNvSpPr/>
+          <p:nvPr/>
+        </p:nvSpPr>
+        <p:spPr>
+          <a:xfrm>
+            <a:off x="7424928" y="2130552"/>
+            <a:ext cx="4014216" cy="182880"/>
+          </a:xfrm>
+          <a:prstGeom prst="rect">
+            <a:avLst/>
+          </a:prstGeom>
+          <a:noFill/>
+          <a:ln/>
+        </p:spPr>
+        <p:txBody>
+          <a:bodyPr wrap="square" lIns="0" tIns="0" rIns="0" bIns="0" rtlCol="0" anchor="ctr"/>
+          <a:lstStyle/>
+          <a:p>
+            <a:pPr indent="0" marL="0">
+              <a:buNone/>
+            </a:pPr>
+            <a:r>
+              <a:rPr lang="en-US" sz="950" dirty="0">
+                <a:solidFill>
+                  <a:srgbClr val="5FD0C0"/>
+                </a:solidFill>
+                <a:latin typeface="Courier New" pitchFamily="34" charset="0"/>
+                <a:ea typeface="Courier New" pitchFamily="34" charset="-122"/>
+                <a:cs typeface="Courier New" pitchFamily="34" charset="-120"/>
+              </a:rPr>
+              <a:t>metadata:</a:t>
+            </a:r>
+            <a:endParaRPr lang="en-US" sz="950" dirty="0"/>
+          </a:p>
+        </p:txBody>
+      </p:sp>
+      <p:sp>
+        <p:nvSpPr>
+          <p:cNvPr id="36" name="Text 34"/>
+          <p:cNvSpPr/>
+          <p:nvPr/>
+        </p:nvSpPr>
+        <p:spPr>
+          <a:xfrm>
+            <a:off x="7424928" y="2313432"/>
+            <a:ext cx="4014216" cy="182880"/>
+          </a:xfrm>
+          <a:prstGeom prst="rect">
+            <a:avLst/>
+          </a:prstGeom>
+          <a:noFill/>
+          <a:ln/>
+        </p:spPr>
+        <p:txBody>
+          <a:bodyPr wrap="square" lIns="0" tIns="0" rIns="0" bIns="0" rtlCol="0" anchor="ctr"/>
+          <a:lstStyle/>
+          <a:p>
+            <a:pPr indent="0" marL="0">
+              <a:buNone/>
+            </a:pPr>
+            <a:r>
+              <a:rPr lang="en-US" sz="950" dirty="0">
+                <a:solidFill>
+                  <a:srgbClr val="D7E3F0"/>
+                </a:solidFill>
+                <a:latin typeface="Courier New" pitchFamily="34" charset="0"/>
+                <a:ea typeface="Courier New" pitchFamily="34" charset="-122"/>
+                <a:cs typeface="Courier New" pitchFamily="34" charset="-120"/>
+              </a:rPr>
+              <a:t>  name: team-a-storage</a:t>
+            </a:r>
+            <a:endParaRPr lang="en-US" sz="950" dirty="0"/>
+          </a:p>
+        </p:txBody>
+      </p:sp>
+      <p:sp>
+        <p:nvSpPr>
+          <p:cNvPr id="37" name="Text 35"/>
+          <p:cNvSpPr/>
+          <p:nvPr/>
+        </p:nvSpPr>
+        <p:spPr>
+          <a:xfrm>
+            <a:off x="7424928" y="2496312"/>
+            <a:ext cx="4014216" cy="182880"/>
+          </a:xfrm>
+          <a:prstGeom prst="rect">
+            <a:avLst/>
+          </a:prstGeom>
+          <a:noFill/>
+          <a:ln/>
+        </p:spPr>
+        <p:txBody>
+          <a:bodyPr wrap="square" lIns="0" tIns="0" rIns="0" bIns="0" rtlCol="0" anchor="ctr"/>
+          <a:lstStyle/>
+          <a:p>
+            <a:pPr indent="0" marL="0">
+              <a:buNone/>
+            </a:pPr>
+            <a:r>
+              <a:rPr lang="en-US" sz="950" dirty="0">
+                <a:solidFill>
+                  <a:srgbClr val="5FD0C0"/>
+                </a:solidFill>
+                <a:latin typeface="Courier New" pitchFamily="34" charset="0"/>
+                <a:ea typeface="Courier New" pitchFamily="34" charset="-122"/>
+                <a:cs typeface="Courier New" pitchFamily="34" charset="-120"/>
+              </a:rPr>
+              <a:t>  namespace: team-a</a:t>
+            </a:r>
+            <a:endParaRPr lang="en-US" sz="950" dirty="0"/>
+          </a:p>
+        </p:txBody>
+      </p:sp>
+      <p:sp>
+        <p:nvSpPr>
+          <p:cNvPr id="38" name="Text 36"/>
+          <p:cNvSpPr/>
+          <p:nvPr/>
+        </p:nvSpPr>
+        <p:spPr>
+          <a:xfrm>
+            <a:off x="7424928" y="2679192"/>
+            <a:ext cx="4014216" cy="182880"/>
+          </a:xfrm>
+          <a:prstGeom prst="rect">
+            <a:avLst/>
+          </a:prstGeom>
+          <a:noFill/>
+          <a:ln/>
+        </p:spPr>
+        <p:txBody>
+          <a:bodyPr wrap="square" lIns="0" tIns="0" rIns="0" bIns="0" rtlCol="0" anchor="ctr"/>
+          <a:lstStyle/>
+          <a:p>
+            <a:pPr indent="0" marL="0">
+              <a:buNone/>
+            </a:pPr>
+            <a:r>
+              <a:rPr lang="en-US" sz="950" dirty="0">
+                <a:solidFill>
+                  <a:srgbClr val="5FD0C0"/>
+                </a:solidFill>
+                <a:latin typeface="Courier New" pitchFamily="34" charset="0"/>
+                <a:ea typeface="Courier New" pitchFamily="34" charset="-122"/>
+                <a:cs typeface="Courier New" pitchFamily="34" charset="-120"/>
+              </a:rPr>
+              <a:t>spec:</a:t>
+            </a:r>
+            <a:endParaRPr lang="en-US" sz="950" dirty="0"/>
+          </a:p>
+        </p:txBody>
+      </p:sp>
+      <p:sp>
+        <p:nvSpPr>
+          <p:cNvPr id="39" name="Text 37"/>
+          <p:cNvSpPr/>
+          <p:nvPr/>
+        </p:nvSpPr>
+        <p:spPr>
+          <a:xfrm>
+            <a:off x="7424928" y="2862072"/>
+            <a:ext cx="4014216" cy="182880"/>
+          </a:xfrm>
+          <a:prstGeom prst="rect">
+            <a:avLst/>
+          </a:prstGeom>
+          <a:noFill/>
+          <a:ln/>
+        </p:spPr>
+        <p:txBody>
+          <a:bodyPr wrap="square" lIns="0" tIns="0" rIns="0" bIns="0" rtlCol="0" anchor="ctr"/>
+          <a:lstStyle/>
+          <a:p>
+            <a:pPr indent="0" marL="0">
+              <a:buNone/>
+            </a:pPr>
+            <a:r>
+              <a:rPr lang="en-US" sz="950" dirty="0">
+                <a:solidFill>
+                  <a:srgbClr val="D7E3F0"/>
+                </a:solidFill>
+                <a:latin typeface="Courier New" pitchFamily="34" charset="0"/>
+                <a:ea typeface="Courier New" pitchFamily="34" charset="-122"/>
+                <a:cs typeface="Courier New" pitchFamily="34" charset="-120"/>
+              </a:rPr>
+              <a:t>  location: westeurope</a:t>
+            </a:r>
+            <a:endParaRPr lang="en-US" sz="950" dirty="0"/>
+          </a:p>
+        </p:txBody>
+      </p:sp>
+      <p:sp>
+        <p:nvSpPr>
+          <p:cNvPr id="40" name="Shape 38"/>
+          <p:cNvSpPr/>
+          <p:nvPr/>
+        </p:nvSpPr>
+        <p:spPr>
+          <a:xfrm>
+            <a:off x="7223760" y="3419856"/>
+            <a:ext cx="4416552" cy="2843784"/>
+          </a:xfrm>
+          <a:prstGeom prst="roundRect">
+            <a:avLst>
+              <a:gd name="adj" fmla="val 3215"/>
+            </a:avLst>
+          </a:prstGeom>
+          <a:solidFill>
+            <a:srgbClr val="13294B"/>
+          </a:solidFill>
+          <a:ln w="12700">
+            <a:solidFill>
+              <a:srgbClr val="3E6B99"/>
+            </a:solidFill>
+            <a:prstDash val="solid"/>
+          </a:ln>
+        </p:spPr>
+      </p:sp>
+      <p:sp>
+        <p:nvSpPr>
+          <p:cNvPr id="41" name="Text 39"/>
+          <p:cNvSpPr/>
+          <p:nvPr/>
+        </p:nvSpPr>
+        <p:spPr>
+          <a:xfrm>
+            <a:off x="7452360" y="3602736"/>
+            <a:ext cx="3959352" cy="548640"/>
           </a:xfrm>
           <a:prstGeom prst="rect">
             <a:avLst/>
@@ -7532,527 +8372,51 @@
           </a:bodyPr>
           <a:lstStyle/>
           <a:p>
-            <a:pPr algn="ctr" indent="0" marL="0">
-              <a:buNone/>
-            </a:pPr>
-            <a:r>
-              <a:rPr lang="en-US" sz="1050" i="1" dirty="0">
-                <a:solidFill>
-                  <a:srgbClr val="6B7A8F"/>
-                </a:solidFill>
-                <a:latin typeface="Calibri" pitchFamily="34" charset="0"/>
-                <a:ea typeface="Calibri" pitchFamily="34" charset="-122"/>
-                <a:cs typeface="Calibri" pitchFamily="34" charset="-120"/>
-              </a:rPr>
-              <a:t>Resolves the storage account's private FQDN to the endpoint's private IP inside the VNet.</a:t>
-            </a:r>
-            <a:endParaRPr lang="en-US" sz="1050" dirty="0"/>
-          </a:p>
-        </p:txBody>
-      </p:sp>
-      <p:sp>
-        <p:nvSpPr>
-          <p:cNvPr id="24" name="Shape 22"/>
-          <p:cNvSpPr/>
-          <p:nvPr/>
-        </p:nvSpPr>
-        <p:spPr>
-          <a:xfrm>
-            <a:off x="8915400" y="1920240"/>
-            <a:ext cx="2724912" cy="3794760"/>
-          </a:xfrm>
-          <a:prstGeom prst="roundRect">
-            <a:avLst>
-              <a:gd name="adj" fmla="val 3356"/>
-            </a:avLst>
-          </a:prstGeom>
-          <a:solidFill>
-            <a:srgbClr val="F1F5F9"/>
-          </a:solidFill>
-          <a:ln w="12700">
-            <a:solidFill>
-              <a:srgbClr val="DCE4EC"/>
-            </a:solidFill>
-            <a:prstDash val="solid"/>
-          </a:ln>
-        </p:spPr>
-      </p:sp>
-      <p:sp>
-        <p:nvSpPr>
-          <p:cNvPr id="25" name="Text 23"/>
-          <p:cNvSpPr/>
-          <p:nvPr/>
-        </p:nvSpPr>
-        <p:spPr>
-          <a:xfrm>
-            <a:off x="9098280" y="2057400"/>
-            <a:ext cx="2359152" cy="320040"/>
-          </a:xfrm>
-          <a:prstGeom prst="rect">
-            <a:avLst/>
-          </a:prstGeom>
-          <a:noFill/>
-          <a:ln/>
-        </p:spPr>
-        <p:txBody>
-          <a:bodyPr wrap="square" lIns="0" tIns="0" rIns="0" bIns="0" rtlCol="0" anchor="ctr"/>
-          <a:lstStyle/>
-          <a:p>
-            <a:pPr indent="0" marL="0">
-              <a:buNone/>
-            </a:pPr>
-            <a:r>
-              <a:rPr lang="en-US" sz="1250" b="1" dirty="0">
-                <a:solidFill>
-                  <a:srgbClr val="0B1E3D"/>
-                </a:solidFill>
-                <a:latin typeface="Calibri" pitchFamily="34" charset="0"/>
-                <a:ea typeface="Calibri" pitchFamily="34" charset="-122"/>
-                <a:cs typeface="Calibri" pitchFamily="34" charset="-120"/>
-              </a:rPr>
-              <a:t>Resources involved</a:t>
-            </a:r>
-            <a:endParaRPr lang="en-US" sz="1250" dirty="0"/>
-          </a:p>
-        </p:txBody>
-      </p:sp>
-      <p:sp>
-        <p:nvSpPr>
-          <p:cNvPr id="26" name="Text 24"/>
-          <p:cNvSpPr/>
-          <p:nvPr/>
-        </p:nvSpPr>
-        <p:spPr>
-          <a:xfrm>
-            <a:off x="9281160" y="2468880"/>
-            <a:ext cx="2176272" cy="256032"/>
-          </a:xfrm>
-          <a:prstGeom prst="rect">
-            <a:avLst/>
-          </a:prstGeom>
-          <a:noFill/>
-          <a:ln/>
-        </p:spPr>
-        <p:txBody>
-          <a:bodyPr wrap="square" lIns="0" tIns="0" rIns="0" bIns="0" rtlCol="0" anchor="ctr">
-            <a:normAutofit/>
-          </a:bodyPr>
-          <a:lstStyle/>
-          <a:p>
-            <a:pPr indent="0" marL="0">
-              <a:buNone/>
-            </a:pPr>
-            <a:r>
-              <a:rPr lang="en-US" sz="800" dirty="0">
-                <a:solidFill>
-                  <a:srgbClr val="36454F"/>
-                </a:solidFill>
-                <a:latin typeface="Courier New" pitchFamily="34" charset="0"/>
-                <a:ea typeface="Courier New" pitchFamily="34" charset="-122"/>
-                <a:cs typeface="Courier New" pitchFamily="34" charset="-120"/>
-              </a:rPr>
-              <a:t>VirtualNetwork</a:t>
-            </a:r>
-            <a:endParaRPr lang="en-US" sz="800" dirty="0"/>
-          </a:p>
-        </p:txBody>
-      </p:sp>
-      <p:sp>
-        <p:nvSpPr>
-          <p:cNvPr id="27" name="Shape 25"/>
-          <p:cNvSpPr/>
-          <p:nvPr/>
-        </p:nvSpPr>
-        <p:spPr>
-          <a:xfrm>
-            <a:off x="9098280" y="2564892"/>
-            <a:ext cx="64008" cy="64008"/>
-          </a:xfrm>
-          <a:prstGeom prst="ellipse">
-            <a:avLst/>
-          </a:prstGeom>
-          <a:solidFill>
-            <a:srgbClr val="1C7293"/>
-          </a:solidFill>
-          <a:ln/>
-        </p:spPr>
-      </p:sp>
-      <p:sp>
-        <p:nvSpPr>
-          <p:cNvPr id="28" name="Text 26"/>
-          <p:cNvSpPr/>
-          <p:nvPr/>
-        </p:nvSpPr>
-        <p:spPr>
-          <a:xfrm>
-            <a:off x="9281160" y="2898648"/>
-            <a:ext cx="2176272" cy="256032"/>
-          </a:xfrm>
-          <a:prstGeom prst="rect">
-            <a:avLst/>
-          </a:prstGeom>
-          <a:noFill/>
-          <a:ln/>
-        </p:spPr>
-        <p:txBody>
-          <a:bodyPr wrap="square" lIns="0" tIns="0" rIns="0" bIns="0" rtlCol="0" anchor="ctr">
-            <a:normAutofit/>
-          </a:bodyPr>
-          <a:lstStyle/>
-          <a:p>
-            <a:pPr indent="0" marL="0">
-              <a:buNone/>
-            </a:pPr>
-            <a:r>
-              <a:rPr lang="en-US" sz="800" dirty="0">
-                <a:solidFill>
-                  <a:srgbClr val="36454F"/>
-                </a:solidFill>
-                <a:latin typeface="Courier New" pitchFamily="34" charset="0"/>
-                <a:ea typeface="Courier New" pitchFamily="34" charset="-122"/>
-                <a:cs typeface="Courier New" pitchFamily="34" charset="-120"/>
-              </a:rPr>
-              <a:t>Subnet</a:t>
-            </a:r>
-            <a:endParaRPr lang="en-US" sz="800" dirty="0"/>
-          </a:p>
-        </p:txBody>
-      </p:sp>
-      <p:sp>
-        <p:nvSpPr>
-          <p:cNvPr id="29" name="Shape 27"/>
-          <p:cNvSpPr/>
-          <p:nvPr/>
-        </p:nvSpPr>
-        <p:spPr>
-          <a:xfrm>
-            <a:off x="9098280" y="2994660"/>
-            <a:ext cx="64008" cy="64008"/>
-          </a:xfrm>
-          <a:prstGeom prst="ellipse">
-            <a:avLst/>
-          </a:prstGeom>
-          <a:solidFill>
-            <a:srgbClr val="1C7293"/>
-          </a:solidFill>
-          <a:ln/>
-        </p:spPr>
-      </p:sp>
-      <p:sp>
-        <p:nvSpPr>
-          <p:cNvPr id="30" name="Text 28"/>
-          <p:cNvSpPr/>
-          <p:nvPr/>
-        </p:nvSpPr>
-        <p:spPr>
-          <a:xfrm>
-            <a:off x="9281160" y="3328416"/>
-            <a:ext cx="2176272" cy="256032"/>
-          </a:xfrm>
-          <a:prstGeom prst="rect">
-            <a:avLst/>
-          </a:prstGeom>
-          <a:noFill/>
-          <a:ln/>
-        </p:spPr>
-        <p:txBody>
-          <a:bodyPr wrap="square" lIns="0" tIns="0" rIns="0" bIns="0" rtlCol="0" anchor="ctr">
-            <a:normAutofit/>
-          </a:bodyPr>
-          <a:lstStyle/>
-          <a:p>
-            <a:pPr indent="0" marL="0">
-              <a:buNone/>
-            </a:pPr>
-            <a:r>
-              <a:rPr lang="en-US" sz="800" dirty="0">
-                <a:solidFill>
-                  <a:srgbClr val="36454F"/>
-                </a:solidFill>
-                <a:latin typeface="Courier New" pitchFamily="34" charset="0"/>
-                <a:ea typeface="Courier New" pitchFamily="34" charset="-122"/>
-                <a:cs typeface="Courier New" pitchFamily="34" charset="-120"/>
-              </a:rPr>
-              <a:t>Account</a:t>
-            </a:r>
-            <a:endParaRPr lang="en-US" sz="800" dirty="0"/>
-          </a:p>
-        </p:txBody>
-      </p:sp>
-      <p:sp>
-        <p:nvSpPr>
-          <p:cNvPr id="31" name="Shape 29"/>
-          <p:cNvSpPr/>
-          <p:nvPr/>
-        </p:nvSpPr>
-        <p:spPr>
-          <a:xfrm>
-            <a:off x="9098280" y="3424428"/>
-            <a:ext cx="64008" cy="64008"/>
-          </a:xfrm>
-          <a:prstGeom prst="ellipse">
-            <a:avLst/>
-          </a:prstGeom>
-          <a:solidFill>
-            <a:srgbClr val="1C7293"/>
-          </a:solidFill>
-          <a:ln/>
-        </p:spPr>
-      </p:sp>
-      <p:sp>
-        <p:nvSpPr>
-          <p:cNvPr id="32" name="Text 30"/>
-          <p:cNvSpPr/>
-          <p:nvPr/>
-        </p:nvSpPr>
-        <p:spPr>
-          <a:xfrm>
-            <a:off x="9281160" y="3758184"/>
-            <a:ext cx="2176272" cy="256032"/>
-          </a:xfrm>
-          <a:prstGeom prst="rect">
-            <a:avLst/>
-          </a:prstGeom>
-          <a:noFill/>
-          <a:ln/>
-        </p:spPr>
-        <p:txBody>
-          <a:bodyPr wrap="square" lIns="0" tIns="0" rIns="0" bIns="0" rtlCol="0" anchor="ctr">
-            <a:normAutofit/>
-          </a:bodyPr>
-          <a:lstStyle/>
-          <a:p>
-            <a:pPr indent="0" marL="0">
-              <a:buNone/>
-            </a:pPr>
-            <a:r>
-              <a:rPr lang="en-US" sz="800" dirty="0">
-                <a:solidFill>
-                  <a:srgbClr val="36454F"/>
-                </a:solidFill>
-                <a:latin typeface="Courier New" pitchFamily="34" charset="0"/>
-                <a:ea typeface="Courier New" pitchFamily="34" charset="-122"/>
-                <a:cs typeface="Courier New" pitchFamily="34" charset="-120"/>
-              </a:rPr>
-              <a:t>PrivateEndpoint</a:t>
-            </a:r>
-            <a:endParaRPr lang="en-US" sz="800" dirty="0"/>
-          </a:p>
-        </p:txBody>
-      </p:sp>
-      <p:sp>
-        <p:nvSpPr>
-          <p:cNvPr id="33" name="Shape 31"/>
-          <p:cNvSpPr/>
-          <p:nvPr/>
-        </p:nvSpPr>
-        <p:spPr>
-          <a:xfrm>
-            <a:off x="9098280" y="3854196"/>
-            <a:ext cx="64008" cy="64008"/>
-          </a:xfrm>
-          <a:prstGeom prst="ellipse">
-            <a:avLst/>
-          </a:prstGeom>
-          <a:solidFill>
-            <a:srgbClr val="1C7293"/>
-          </a:solidFill>
-          <a:ln/>
-        </p:spPr>
-      </p:sp>
-      <p:sp>
-        <p:nvSpPr>
-          <p:cNvPr id="34" name="Text 32"/>
-          <p:cNvSpPr/>
-          <p:nvPr/>
-        </p:nvSpPr>
-        <p:spPr>
-          <a:xfrm>
-            <a:off x="9281160" y="4187952"/>
-            <a:ext cx="2176272" cy="256032"/>
-          </a:xfrm>
-          <a:prstGeom prst="rect">
-            <a:avLst/>
-          </a:prstGeom>
-          <a:noFill/>
-          <a:ln/>
-        </p:spPr>
-        <p:txBody>
-          <a:bodyPr wrap="square" lIns="0" tIns="0" rIns="0" bIns="0" rtlCol="0" anchor="ctr">
-            <a:normAutofit/>
-          </a:bodyPr>
-          <a:lstStyle/>
-          <a:p>
-            <a:pPr indent="0" marL="0">
-              <a:buNone/>
-            </a:pPr>
-            <a:r>
-              <a:rPr lang="en-US" sz="800" dirty="0">
-                <a:solidFill>
-                  <a:srgbClr val="36454F"/>
-                </a:solidFill>
-                <a:latin typeface="Courier New" pitchFamily="34" charset="0"/>
-                <a:ea typeface="Courier New" pitchFamily="34" charset="-122"/>
-                <a:cs typeface="Courier New" pitchFamily="34" charset="-120"/>
-              </a:rPr>
-              <a:t>PrivateDNSZone</a:t>
-            </a:r>
-            <a:endParaRPr lang="en-US" sz="800" dirty="0"/>
-          </a:p>
-        </p:txBody>
-      </p:sp>
-      <p:sp>
-        <p:nvSpPr>
-          <p:cNvPr id="35" name="Shape 33"/>
-          <p:cNvSpPr/>
-          <p:nvPr/>
-        </p:nvSpPr>
-        <p:spPr>
-          <a:xfrm>
-            <a:off x="9098280" y="4283964"/>
-            <a:ext cx="64008" cy="64008"/>
-          </a:xfrm>
-          <a:prstGeom prst="ellipse">
-            <a:avLst/>
-          </a:prstGeom>
-          <a:solidFill>
-            <a:srgbClr val="1C7293"/>
-          </a:solidFill>
-          <a:ln/>
-        </p:spPr>
-      </p:sp>
-      <p:sp>
-        <p:nvSpPr>
-          <p:cNvPr id="36" name="Text 34"/>
-          <p:cNvSpPr/>
-          <p:nvPr/>
-        </p:nvSpPr>
-        <p:spPr>
-          <a:xfrm>
-            <a:off x="9281160" y="4617720"/>
-            <a:ext cx="2176272" cy="256032"/>
-          </a:xfrm>
-          <a:prstGeom prst="rect">
-            <a:avLst/>
-          </a:prstGeom>
-          <a:noFill/>
-          <a:ln/>
-        </p:spPr>
-        <p:txBody>
-          <a:bodyPr wrap="square" lIns="0" tIns="0" rIns="0" bIns="0" rtlCol="0" anchor="ctr">
-            <a:normAutofit/>
-          </a:bodyPr>
-          <a:lstStyle/>
-          <a:p>
-            <a:pPr indent="0" marL="0">
-              <a:buNone/>
-            </a:pPr>
-            <a:r>
-              <a:rPr lang="en-US" sz="800" dirty="0">
-                <a:solidFill>
-                  <a:srgbClr val="36454F"/>
-                </a:solidFill>
-                <a:latin typeface="Courier New" pitchFamily="34" charset="0"/>
-                <a:ea typeface="Courier New" pitchFamily="34" charset="-122"/>
-                <a:cs typeface="Courier New" pitchFamily="34" charset="-120"/>
-              </a:rPr>
-              <a:t>PrivateDNSZoneVirtualNetworkLink</a:t>
-            </a:r>
-            <a:endParaRPr lang="en-US" sz="800" dirty="0"/>
-          </a:p>
-        </p:txBody>
-      </p:sp>
-      <p:sp>
-        <p:nvSpPr>
-          <p:cNvPr id="37" name="Shape 35"/>
-          <p:cNvSpPr/>
-          <p:nvPr/>
-        </p:nvSpPr>
-        <p:spPr>
-          <a:xfrm>
-            <a:off x="9098280" y="4713732"/>
-            <a:ext cx="64008" cy="64008"/>
-          </a:xfrm>
-          <a:prstGeom prst="ellipse">
-            <a:avLst/>
-          </a:prstGeom>
-          <a:solidFill>
-            <a:srgbClr val="1C7293"/>
-          </a:solidFill>
-          <a:ln/>
-        </p:spPr>
-      </p:sp>
-      <p:sp>
-        <p:nvSpPr>
-          <p:cNvPr id="38" name="Text 36"/>
-          <p:cNvSpPr/>
-          <p:nvPr/>
-        </p:nvSpPr>
-        <p:spPr>
-          <a:xfrm>
-            <a:off x="9281160" y="5047488"/>
-            <a:ext cx="2176272" cy="256032"/>
-          </a:xfrm>
-          <a:prstGeom prst="rect">
-            <a:avLst/>
-          </a:prstGeom>
-          <a:noFill/>
-          <a:ln/>
-        </p:spPr>
-        <p:txBody>
-          <a:bodyPr wrap="square" lIns="0" tIns="0" rIns="0" bIns="0" rtlCol="0" anchor="ctr">
-            <a:normAutofit/>
-          </a:bodyPr>
-          <a:lstStyle/>
-          <a:p>
-            <a:pPr indent="0" marL="0">
-              <a:buNone/>
-            </a:pPr>
-            <a:r>
-              <a:rPr lang="en-US" sz="800" dirty="0">
-                <a:solidFill>
-                  <a:srgbClr val="36454F"/>
-                </a:solidFill>
-                <a:latin typeface="Courier New" pitchFamily="34" charset="0"/>
-                <a:ea typeface="Courier New" pitchFamily="34" charset="-122"/>
-                <a:cs typeface="Courier New" pitchFamily="34" charset="-120"/>
-              </a:rPr>
-              <a:t>PrivateDNSZoneGroup</a:t>
-            </a:r>
-            <a:endParaRPr lang="en-US" sz="800" dirty="0"/>
-          </a:p>
-        </p:txBody>
-      </p:sp>
-      <p:sp>
-        <p:nvSpPr>
-          <p:cNvPr id="39" name="Shape 37"/>
-          <p:cNvSpPr/>
-          <p:nvPr/>
-        </p:nvSpPr>
-        <p:spPr>
-          <a:xfrm>
-            <a:off x="9098280" y="5143500"/>
-            <a:ext cx="64008" cy="64008"/>
-          </a:xfrm>
-          <a:prstGeom prst="ellipse">
-            <a:avLst/>
-          </a:prstGeom>
-          <a:solidFill>
-            <a:srgbClr val="1C7293"/>
-          </a:solidFill>
-          <a:ln/>
-        </p:spPr>
-      </p:sp>
-      <p:sp>
-        <p:nvSpPr>
-          <p:cNvPr id="40" name="Text 38"/>
-          <p:cNvSpPr/>
-          <p:nvPr/>
-        </p:nvSpPr>
-        <p:spPr>
-          <a:xfrm>
-            <a:off x="9098280" y="5522976"/>
-            <a:ext cx="2359152" cy="548640"/>
+            <a:pPr indent="0" marL="0">
+              <a:buNone/>
+            </a:pPr>
+            <a:r>
+              <a:rPr lang="en-US" sz="1150" b="1" dirty="0">
+                <a:solidFill>
+                  <a:srgbClr val="5FD0C0"/>
+                </a:solidFill>
+                <a:latin typeface="Calibri" pitchFamily="34" charset="0"/>
+                <a:ea typeface="Calibri" pitchFamily="34" charset="-122"/>
+                <a:cs typeface="Calibri" pitchFamily="34" charset="-120"/>
+              </a:rPr>
+              <a:t>Functions decide WHAT gets created.</a:t>
+            </a:r>
+            <a:endParaRPr lang="en-US" sz="1150" dirty="0"/>
+          </a:p>
+          <a:p>
+            <a:pPr indent="0" marL="0">
+              <a:buNone/>
+            </a:pPr>
+            <a:r>
+              <a:rPr lang="en-US" sz="1150" b="1" dirty="0">
+                <a:solidFill>
+                  <a:srgbClr val="5FD0C0"/>
+                </a:solidFill>
+                <a:latin typeface="Calibri" pitchFamily="34" charset="0"/>
+                <a:ea typeface="Calibri" pitchFamily="34" charset="-122"/>
+                <a:cs typeface="Calibri" pitchFamily="34" charset="-120"/>
+              </a:rPr>
+              <a:t>Refs decide HOW they connect.</a:t>
+            </a:r>
+            <a:endParaRPr lang="en-US" sz="1150" dirty="0"/>
+          </a:p>
+        </p:txBody>
+      </p:sp>
+      <p:sp>
+        <p:nvSpPr>
+          <p:cNvPr id="42" name="Text 40"/>
+          <p:cNvSpPr/>
+          <p:nvPr/>
+        </p:nvSpPr>
+        <p:spPr>
+          <a:xfrm>
+            <a:off x="7452360" y="4197096"/>
+            <a:ext cx="3959352" cy="1975104"/>
           </a:xfrm>
           <a:prstGeom prst="rect">
             <a:avLst/>
@@ -8070,23 +8434,23 @@
               <a:buNone/>
             </a:pPr>
             <a:r>
-              <a:rPr lang="en-US" sz="950" i="1" dirty="0">
-                <a:solidFill>
-                  <a:srgbClr val="6B7A8F"/>
-                </a:solidFill>
-                <a:latin typeface="Calibri" pitchFamily="34" charset="0"/>
-                <a:ea typeface="Calibri" pitchFamily="34" charset="-122"/>
-                <a:cs typeface="Calibri" pitchFamily="34" charset="-120"/>
-              </a:rPr>
-              <a:t>All namespaced — one team's network stack per namespace.</a:t>
-            </a:r>
-            <a:endParaRPr lang="en-US" sz="950" dirty="0"/>
-          </a:p>
-        </p:txBody>
-      </p:sp>
-      <p:sp>
-        <p:nvSpPr>
-          <p:cNvPr id="41" name="Text 39"/>
+              <a:rPr lang="en-US" sz="1000" dirty="0">
+                <a:solidFill>
+                  <a:srgbClr val="CADCFC"/>
+                </a:solidFill>
+                <a:latin typeface="Calibri" pitchFamily="34" charset="0"/>
+                <a:ea typeface="Calibri" pitchFamily="34" charset="-122"/>
+                <a:cs typeface="Calibri" pitchFamily="34" charset="-120"/>
+              </a:rPr>
+              <a:t>The pipeline's function-patch-and-transform step decides which 6 resources to compose from one XR. Each resource still resolves its own dependency — via the same matchControllerRef selectors as Demo 1 — regardless of whether it was applied directly or composed by a Function.</a:t>
+            </a:r>
+            <a:endParaRPr lang="en-US" sz="1000" dirty="0"/>
+          </a:p>
+        </p:txBody>
+      </p:sp>
+      <p:sp>
+        <p:nvSpPr>
+          <p:cNvPr id="43" name="Text 41"/>
           <p:cNvSpPr/>
           <p:nvPr/>
         </p:nvSpPr>
@@ -8111,7 +8475,7 @@
             <a:r>
               <a:rPr lang="en-US" sz="900" dirty="0">
                 <a:solidFill>
-                  <a:srgbClr val="9AA7B5"/>
+                  <a:srgbClr val="6E86A8"/>
                 </a:solidFill>
                 <a:latin typeface="Calibri" pitchFamily="34" charset="0"/>
                 <a:ea typeface="Calibri" pitchFamily="34" charset="-122"/>
@@ -8125,7 +8489,7 @@
       </p:sp>
       <p:sp>
         <p:nvSpPr>
-          <p:cNvPr id="42" name="Text 40"/>
+          <p:cNvPr id="44" name="Text 42"/>
           <p:cNvSpPr/>
           <p:nvPr/>
         </p:nvSpPr>
@@ -8150,7 +8514,7 @@
             <a:r>
               <a:rPr lang="en-US" sz="900" dirty="0">
                 <a:solidFill>
-                  <a:srgbClr val="9AA7B5"/>
+                  <a:srgbClr val="6E86A8"/>
                 </a:solidFill>
                 <a:latin typeface="Calibri" pitchFamily="34" charset="0"/>
                 <a:ea typeface="Calibri" pitchFamily="34" charset="-122"/>
@@ -8203,23 +8567,23 @@
         <p:spPr>
           <a:xfrm>
             <a:off x="548640" y="411480"/>
-            <a:ext cx="9875520" cy="640080"/>
-          </a:xfrm>
-          <a:prstGeom prst="rect">
-            <a:avLst/>
-          </a:prstGeom>
-          <a:noFill/>
-          <a:ln/>
-        </p:spPr>
-        <p:txBody>
-          <a:bodyPr wrap="square" lIns="0" tIns="0" rIns="0" bIns="0" rtlCol="0" anchor="ctr"/>
-          <a:lstStyle/>
-          <a:p>
-            <a:pPr indent="0" marL="0">
-              <a:buNone/>
-            </a:pPr>
-            <a:r>
-              <a:rPr lang="en-US" sz="2800" b="1" dirty="0">
+            <a:ext cx="9601200" cy="640080"/>
+          </a:xfrm>
+          <a:prstGeom prst="rect">
+            <a:avLst/>
+          </a:prstGeom>
+          <a:noFill/>
+          <a:ln/>
+        </p:spPr>
+        <p:txBody>
+          <a:bodyPr wrap="square" lIns="0" tIns="0" rIns="0" bIns="0" rtlCol="0" anchor="ctr"/>
+          <a:lstStyle/>
+          <a:p>
+            <a:pPr indent="0" marL="0">
+              <a:buNone/>
+            </a:pPr>
+            <a:r>
+              <a:rPr lang="en-US" sz="3000" b="1" dirty="0">
                 <a:solidFill>
                   <a:srgbClr val="0B1E3D"/>
                 </a:solidFill>
@@ -8227,9 +8591,9 @@
                 <a:ea typeface="Cambria" pitchFamily="34" charset="-122"/>
                 <a:cs typeface="Cambria" pitchFamily="34" charset="-120"/>
               </a:rPr>
-              <a:t>A Common Enterprise Adoption Pattern</a:t>
-            </a:r>
-            <a:endParaRPr lang="en-US" sz="2800" dirty="0"/>
+              <a:t>Why XRs &amp; XRDs?</a:t>
+            </a:r>
+            <a:endParaRPr lang="en-US" sz="3000" dirty="0"/>
           </a:p>
         </p:txBody>
       </p:sp>
@@ -8241,17 +8605,19 @@
         </p:nvSpPr>
         <p:spPr>
           <a:xfrm>
-            <a:off x="548640" y="1005840"/>
-            <a:ext cx="9144000" cy="365760"/>
-          </a:xfrm>
-          <a:prstGeom prst="rect">
-            <a:avLst/>
-          </a:prstGeom>
-          <a:noFill/>
-          <a:ln/>
-        </p:spPr>
-        <p:txBody>
-          <a:bodyPr wrap="square" lIns="0" tIns="0" rIns="0" bIns="0" rtlCol="0" anchor="ctr"/>
+            <a:off x="548640" y="1051560"/>
+            <a:ext cx="10789920" cy="365760"/>
+          </a:xfrm>
+          <a:prstGeom prst="rect">
+            <a:avLst/>
+          </a:prstGeom>
+          <a:noFill/>
+          <a:ln/>
+        </p:spPr>
+        <p:txBody>
+          <a:bodyPr wrap="square" lIns="0" tIns="0" rIns="0" bIns="0" rtlCol="0" anchor="ctr">
+            <a:normAutofit/>
+          </a:bodyPr>
           <a:lstStyle/>
           <a:p>
             <a:pPr indent="0" marL="0">
@@ -8260,13 +8626,13 @@
             <a:r>
               <a:rPr lang="en-US" sz="1250" i="1" dirty="0">
                 <a:solidFill>
-                  <a:srgbClr val="6B7A8F"/>
-                </a:solidFill>
-                <a:latin typeface="Calibri" pitchFamily="34" charset="0"/>
-                <a:ea typeface="Calibri" pitchFamily="34" charset="-122"/>
-                <a:cs typeface="Calibri" pitchFamily="34" charset="-120"/>
-              </a:rPr>
-              <a:t>Most organizations run these tools together, not instead of one another.</a:t>
+                  <a:srgbClr val="36454F"/>
+                </a:solidFill>
+                <a:latin typeface="Calibri" pitchFamily="34" charset="0"/>
+                <a:ea typeface="Calibri" pitchFamily="34" charset="-122"/>
+                <a:cs typeface="Calibri" pitchFamily="34" charset="-120"/>
+              </a:rPr>
+              <a:t>Demo 1 applied Managed Resources directly. Demo 2 went through an XR — here's what that abstraction buys you.</a:t>
             </a:r>
             <a:endParaRPr lang="en-US" sz="1250" dirty="0"/>
           </a:p>
@@ -8280,12 +8646,12 @@
         </p:nvSpPr>
         <p:spPr>
           <a:xfrm>
-            <a:off x="548640" y="1691640"/>
-            <a:ext cx="3520440" cy="3200400"/>
+            <a:off x="548640" y="1600200"/>
+            <a:ext cx="3611880" cy="1737360"/>
           </a:xfrm>
           <a:prstGeom prst="roundRect">
             <a:avLst>
-              <a:gd name="adj" fmla="val 2857"/>
+              <a:gd name="adj" fmla="val 5263"/>
             </a:avLst>
           </a:prstGeom>
           <a:solidFill>
@@ -8314,39 +8680,58 @@
         </p:nvSpPr>
         <p:spPr>
           <a:xfrm>
-            <a:off x="548640" y="1691640"/>
-            <a:ext cx="3520440" cy="502920"/>
+            <a:off x="749808" y="1801368"/>
+            <a:ext cx="457200" cy="457200"/>
           </a:xfrm>
           <a:prstGeom prst="roundRect">
             <a:avLst>
-              <a:gd name="adj" fmla="val 18182"/>
+              <a:gd name="adj" fmla="val 50000"/>
             </a:avLst>
           </a:prstGeom>
           <a:solidFill>
-            <a:srgbClr val="5B7FA6"/>
+            <a:srgbClr val="1C7293"/>
           </a:solidFill>
           <a:ln/>
         </p:spPr>
       </p:sp>
       <p:sp>
         <p:nvSpPr>
-          <p:cNvPr id="6" name="Shape 4"/>
-          <p:cNvSpPr/>
-          <p:nvPr/>
-        </p:nvSpPr>
-        <p:spPr>
-          <a:xfrm>
-            <a:off x="548640" y="1965960"/>
-            <a:ext cx="3520440" cy="228600"/>
-          </a:xfrm>
-          <a:prstGeom prst="rect">
-            <a:avLst/>
-          </a:prstGeom>
-          <a:solidFill>
-            <a:srgbClr val="5B7FA6"/>
-          </a:solidFill>
-          <a:ln/>
-        </p:spPr>
+          <p:cNvPr id="6" name="Text 4"/>
+          <p:cNvSpPr/>
+          <p:nvPr/>
+        </p:nvSpPr>
+        <p:spPr>
+          <a:xfrm>
+            <a:off x="749808" y="1801368"/>
+            <a:ext cx="457200" cy="457200"/>
+          </a:xfrm>
+          <a:prstGeom prst="rect">
+            <a:avLst/>
+          </a:prstGeom>
+          <a:noFill/>
+          <a:ln/>
+        </p:spPr>
+        <p:txBody>
+          <a:bodyPr wrap="square" lIns="0" tIns="0" rIns="0" bIns="0" rtlCol="0" anchor="ctr"/>
+          <a:lstStyle/>
+          <a:p>
+            <a:pPr algn="ctr" indent="0" marL="0">
+              <a:buNone/>
+            </a:pPr>
+            <a:r>
+              <a:rPr lang="en-US" sz="1600" b="1" dirty="0">
+                <a:solidFill>
+                  <a:srgbClr val="FFFFFF"/>
+                </a:solidFill>
+                <a:latin typeface="Calibri" pitchFamily="34" charset="0"/>
+                <a:ea typeface="Calibri" pitchFamily="34" charset="-122"/>
+                <a:cs typeface="Calibri" pitchFamily="34" charset="-120"/>
+              </a:rPr>
+              <a:t>1</a:t>
+            </a:r>
+            <a:endParaRPr lang="en-US" sz="1600" dirty="0"/>
+          </a:p>
+        </p:txBody>
       </p:sp>
       <p:sp>
         <p:nvSpPr>
@@ -8356,34 +8741,34 @@
         </p:nvSpPr>
         <p:spPr>
           <a:xfrm>
-            <a:off x="731520" y="1691640"/>
-            <a:ext cx="3154680" cy="502920"/>
-          </a:xfrm>
-          <a:prstGeom prst="rect">
-            <a:avLst/>
-          </a:prstGeom>
-          <a:noFill/>
-          <a:ln/>
-        </p:spPr>
-        <p:txBody>
-          <a:bodyPr wrap="square" lIns="0" tIns="0" rIns="0" bIns="0" rtlCol="0" anchor="ctr"/>
-          <a:lstStyle/>
-          <a:p>
-            <a:pPr indent="0" marL="0">
-              <a:buNone/>
-            </a:pPr>
-            <a:r>
-              <a:rPr lang="en-US" sz="1400" b="1" dirty="0">
-                <a:solidFill>
-                  <a:srgbClr val="FFFFFF"/>
-                </a:solidFill>
-                <a:latin typeface="Calibri" pitchFamily="34" charset="0"/>
-                <a:ea typeface="Calibri" pitchFamily="34" charset="-122"/>
-                <a:cs typeface="Calibri" pitchFamily="34" charset="-120"/>
-              </a:rPr>
-              <a:t>Day 0</a:t>
-            </a:r>
-            <a:endParaRPr lang="en-US" sz="1400" dirty="0"/>
+            <a:off x="749808" y="2350008"/>
+            <a:ext cx="3209544" cy="365760"/>
+          </a:xfrm>
+          <a:prstGeom prst="rect">
+            <a:avLst/>
+          </a:prstGeom>
+          <a:noFill/>
+          <a:ln/>
+        </p:spPr>
+        <p:txBody>
+          <a:bodyPr wrap="square" lIns="0" tIns="0" rIns="0" bIns="0" rtlCol="0" anchor="ctr"/>
+          <a:lstStyle/>
+          <a:p>
+            <a:pPr indent="0" marL="0">
+              <a:buNone/>
+            </a:pPr>
+            <a:r>
+              <a:rPr lang="en-US" sz="1350" b="1" dirty="0">
+                <a:solidFill>
+                  <a:srgbClr val="0B1E3D"/>
+                </a:solidFill>
+                <a:latin typeface="Calibri" pitchFamily="34" charset="0"/>
+                <a:ea typeface="Calibri" pitchFamily="34" charset="-122"/>
+                <a:cs typeface="Calibri" pitchFamily="34" charset="-120"/>
+              </a:rPr>
+              <a:t>Self-service API</a:t>
+            </a:r>
+            <a:endParaRPr lang="en-US" sz="1350" dirty="0"/>
           </a:p>
         </p:txBody>
       </p:sp>
@@ -8395,129 +8780,53 @@
         </p:nvSpPr>
         <p:spPr>
           <a:xfrm>
-            <a:off x="731520" y="2377440"/>
-            <a:ext cx="3154680" cy="411480"/>
-          </a:xfrm>
-          <a:prstGeom prst="rect">
-            <a:avLst/>
-          </a:prstGeom>
-          <a:noFill/>
-          <a:ln/>
-        </p:spPr>
-        <p:txBody>
-          <a:bodyPr wrap="square" lIns="0" tIns="0" rIns="0" bIns="0" rtlCol="0" anchor="ctr"/>
-          <a:lstStyle/>
-          <a:p>
-            <a:pPr indent="0" marL="0">
-              <a:buNone/>
-            </a:pPr>
-            <a:r>
-              <a:rPr lang="en-US" sz="1500" b="1" dirty="0">
-                <a:solidFill>
-                  <a:srgbClr val="0B1E3D"/>
-                </a:solidFill>
-                <a:latin typeface="Calibri" pitchFamily="34" charset="0"/>
-                <a:ea typeface="Calibri" pitchFamily="34" charset="-122"/>
-                <a:cs typeface="Calibri" pitchFamily="34" charset="-120"/>
-              </a:rPr>
-              <a:t>Foundational infra</a:t>
-            </a:r>
-            <a:endParaRPr lang="en-US" sz="1500" dirty="0"/>
-          </a:p>
-        </p:txBody>
-      </p:sp>
-      <p:sp>
-        <p:nvSpPr>
-          <p:cNvPr id="9" name="Text 7"/>
-          <p:cNvSpPr/>
-          <p:nvPr/>
-        </p:nvSpPr>
-        <p:spPr>
-          <a:xfrm>
-            <a:off x="731520" y="2834640"/>
-            <a:ext cx="3154680" cy="1874520"/>
-          </a:xfrm>
-          <a:prstGeom prst="rect">
-            <a:avLst/>
-          </a:prstGeom>
-          <a:noFill/>
-          <a:ln/>
-        </p:spPr>
-        <p:txBody>
-          <a:bodyPr wrap="square" lIns="0" tIns="0" rIns="0" bIns="0" rtlCol="0" anchor="ctr"/>
-          <a:lstStyle/>
-          <a:p>
-            <a:pPr indent="0" marL="0">
-              <a:buNone/>
-            </a:pPr>
-            <a:r>
-              <a:rPr lang="en-US" sz="1100" dirty="0">
-                <a:solidFill>
-                  <a:srgbClr val="36454F"/>
-                </a:solidFill>
-                <a:latin typeface="Calibri" pitchFamily="34" charset="0"/>
-                <a:ea typeface="Calibri" pitchFamily="34" charset="-122"/>
-                <a:cs typeface="Calibri" pitchFamily="34" charset="-120"/>
-              </a:rPr>
-              <a:t>Terraform / Bicep provisions accounts, networks, IAM, and the Kubernetes clusters themselves.</a:t>
-            </a:r>
-            <a:endParaRPr lang="en-US" sz="1100" dirty="0"/>
-          </a:p>
-        </p:txBody>
-      </p:sp>
-      <p:sp>
-        <p:nvSpPr>
-          <p:cNvPr id="10" name="Text 8"/>
-          <p:cNvSpPr/>
-          <p:nvPr/>
-        </p:nvSpPr>
-        <p:spPr>
-          <a:xfrm>
-            <a:off x="4069080" y="3063240"/>
-            <a:ext cx="274320" cy="457200"/>
-          </a:xfrm>
-          <a:prstGeom prst="rect">
-            <a:avLst/>
-          </a:prstGeom>
-          <a:noFill/>
-          <a:ln/>
-        </p:spPr>
-        <p:txBody>
-          <a:bodyPr wrap="square" lIns="0" tIns="0" rIns="0" bIns="0" rtlCol="0" anchor="ctr"/>
-          <a:lstStyle/>
-          <a:p>
-            <a:pPr algn="ctr" indent="0" marL="0">
-              <a:buNone/>
-            </a:pPr>
-            <a:r>
-              <a:rPr lang="en-US" sz="2000" b="1" dirty="0">
-                <a:solidFill>
-                  <a:srgbClr val="1C7293"/>
-                </a:solidFill>
-                <a:latin typeface="Calibri" pitchFamily="34" charset="0"/>
-                <a:ea typeface="Calibri" pitchFamily="34" charset="-122"/>
-                <a:cs typeface="Calibri" pitchFamily="34" charset="-120"/>
-              </a:rPr>
-              <a:t>→</a:t>
-            </a:r>
-            <a:endParaRPr lang="en-US" sz="2000" dirty="0"/>
-          </a:p>
-        </p:txBody>
-      </p:sp>
-      <p:sp>
-        <p:nvSpPr>
-          <p:cNvPr id="11" name="Shape 9"/>
-          <p:cNvSpPr/>
-          <p:nvPr/>
-        </p:nvSpPr>
-        <p:spPr>
-          <a:xfrm>
-            <a:off x="4343400" y="1691640"/>
-            <a:ext cx="3520440" cy="3200400"/>
+            <a:off x="749808" y="2697480"/>
+            <a:ext cx="3209544" cy="566928"/>
+          </a:xfrm>
+          <a:prstGeom prst="rect">
+            <a:avLst/>
+          </a:prstGeom>
+          <a:noFill/>
+          <a:ln/>
+        </p:spPr>
+        <p:txBody>
+          <a:bodyPr wrap="square" lIns="0" tIns="0" rIns="0" bIns="0" rtlCol="0" anchor="t">
+            <a:normAutofit/>
+          </a:bodyPr>
+          <a:lstStyle/>
+          <a:p>
+            <a:pPr indent="0" marL="0">
+              <a:buNone/>
+            </a:pPr>
+            <a:r>
+              <a:rPr lang="en-US" sz="950" dirty="0">
+                <a:solidFill>
+                  <a:srgbClr val="6B7A8F"/>
+                </a:solidFill>
+                <a:latin typeface="Calibri" pitchFamily="34" charset="0"/>
+                <a:ea typeface="Calibri" pitchFamily="34" charset="-122"/>
+                <a:cs typeface="Calibri" pitchFamily="34" charset="-120"/>
+              </a:rPr>
+              <a:t>Developers ask for “a private storage stack,” not 7 Azure resources wired the right way.</a:t>
+            </a:r>
+            <a:endParaRPr lang="en-US" sz="950" dirty="0"/>
+          </a:p>
+        </p:txBody>
+      </p:sp>
+      <p:sp>
+        <p:nvSpPr>
+          <p:cNvPr id="9" name="Shape 7"/>
+          <p:cNvSpPr/>
+          <p:nvPr/>
+        </p:nvSpPr>
+        <p:spPr>
+          <a:xfrm>
+            <a:off x="4361688" y="1600200"/>
+            <a:ext cx="3611880" cy="1737360"/>
           </a:xfrm>
           <a:prstGeom prst="roundRect">
             <a:avLst>
-              <a:gd name="adj" fmla="val 2857"/>
+              <a:gd name="adj" fmla="val 5263"/>
             </a:avLst>
           </a:prstGeom>
           <a:solidFill>
@@ -8540,72 +8849,52 @@
       </p:sp>
       <p:sp>
         <p:nvSpPr>
-          <p:cNvPr id="12" name="Shape 10"/>
-          <p:cNvSpPr/>
-          <p:nvPr/>
-        </p:nvSpPr>
-        <p:spPr>
-          <a:xfrm>
-            <a:off x="4343400" y="1691640"/>
-            <a:ext cx="3520440" cy="502920"/>
+          <p:cNvPr id="10" name="Shape 8"/>
+          <p:cNvSpPr/>
+          <p:nvPr/>
+        </p:nvSpPr>
+        <p:spPr>
+          <a:xfrm>
+            <a:off x="4562856" y="1801368"/>
+            <a:ext cx="457200" cy="457200"/>
           </a:xfrm>
           <a:prstGeom prst="roundRect">
             <a:avLst>
-              <a:gd name="adj" fmla="val 18182"/>
+              <a:gd name="adj" fmla="val 50000"/>
             </a:avLst>
           </a:prstGeom>
           <a:solidFill>
-            <a:srgbClr val="1C7293"/>
+            <a:srgbClr val="5FD0C0"/>
           </a:solidFill>
           <a:ln/>
         </p:spPr>
       </p:sp>
       <p:sp>
         <p:nvSpPr>
-          <p:cNvPr id="13" name="Shape 11"/>
-          <p:cNvSpPr/>
-          <p:nvPr/>
-        </p:nvSpPr>
-        <p:spPr>
-          <a:xfrm>
-            <a:off x="4343400" y="1965960"/>
-            <a:ext cx="3520440" cy="228600"/>
-          </a:xfrm>
-          <a:prstGeom prst="rect">
-            <a:avLst/>
-          </a:prstGeom>
-          <a:solidFill>
-            <a:srgbClr val="1C7293"/>
-          </a:solidFill>
-          <a:ln/>
-        </p:spPr>
-      </p:sp>
-      <p:sp>
-        <p:nvSpPr>
-          <p:cNvPr id="14" name="Text 12"/>
-          <p:cNvSpPr/>
-          <p:nvPr/>
-        </p:nvSpPr>
-        <p:spPr>
-          <a:xfrm>
-            <a:off x="4526280" y="1691640"/>
-            <a:ext cx="3154680" cy="502920"/>
-          </a:xfrm>
-          <a:prstGeom prst="rect">
-            <a:avLst/>
-          </a:prstGeom>
-          <a:noFill/>
-          <a:ln/>
-        </p:spPr>
-        <p:txBody>
-          <a:bodyPr wrap="square" lIns="0" tIns="0" rIns="0" bIns="0" rtlCol="0" anchor="ctr"/>
-          <a:lstStyle/>
-          <a:p>
-            <a:pPr indent="0" marL="0">
-              <a:buNone/>
-            </a:pPr>
-            <a:r>
-              <a:rPr lang="en-US" sz="1400" b="1" dirty="0">
+          <p:cNvPr id="11" name="Text 9"/>
+          <p:cNvSpPr/>
+          <p:nvPr/>
+        </p:nvSpPr>
+        <p:spPr>
+          <a:xfrm>
+            <a:off x="4562856" y="1801368"/>
+            <a:ext cx="457200" cy="457200"/>
+          </a:xfrm>
+          <a:prstGeom prst="rect">
+            <a:avLst/>
+          </a:prstGeom>
+          <a:noFill/>
+          <a:ln/>
+        </p:spPr>
+        <p:txBody>
+          <a:bodyPr wrap="square" lIns="0" tIns="0" rIns="0" bIns="0" rtlCol="0" anchor="ctr"/>
+          <a:lstStyle/>
+          <a:p>
+            <a:pPr algn="ctr" indent="0" marL="0">
+              <a:buNone/>
+            </a:pPr>
+            <a:r>
+              <a:rPr lang="en-US" sz="1600" b="1" dirty="0">
                 <a:solidFill>
                   <a:srgbClr val="FFFFFF"/>
                 </a:solidFill>
@@ -8613,38 +8902,38 @@
                 <a:ea typeface="Calibri" pitchFamily="34" charset="-122"/>
                 <a:cs typeface="Calibri" pitchFamily="34" charset="-120"/>
               </a:rPr>
-              <a:t>Day 1</a:t>
-            </a:r>
-            <a:endParaRPr lang="en-US" sz="1400" dirty="0"/>
-          </a:p>
-        </p:txBody>
-      </p:sp>
-      <p:sp>
-        <p:nvSpPr>
-          <p:cNvPr id="15" name="Text 13"/>
-          <p:cNvSpPr/>
-          <p:nvPr/>
-        </p:nvSpPr>
-        <p:spPr>
-          <a:xfrm>
-            <a:off x="4526280" y="2377440"/>
-            <a:ext cx="3154680" cy="411480"/>
-          </a:xfrm>
-          <a:prstGeom prst="rect">
-            <a:avLst/>
-          </a:prstGeom>
-          <a:noFill/>
-          <a:ln/>
-        </p:spPr>
-        <p:txBody>
-          <a:bodyPr wrap="square" lIns="0" tIns="0" rIns="0" bIns="0" rtlCol="0" anchor="ctr"/>
-          <a:lstStyle/>
-          <a:p>
-            <a:pPr indent="0" marL="0">
-              <a:buNone/>
-            </a:pPr>
-            <a:r>
-              <a:rPr lang="en-US" sz="1500" b="1" dirty="0">
+              <a:t>2</a:t>
+            </a:r>
+            <a:endParaRPr lang="en-US" sz="1600" dirty="0"/>
+          </a:p>
+        </p:txBody>
+      </p:sp>
+      <p:sp>
+        <p:nvSpPr>
+          <p:cNvPr id="12" name="Text 10"/>
+          <p:cNvSpPr/>
+          <p:nvPr/>
+        </p:nvSpPr>
+        <p:spPr>
+          <a:xfrm>
+            <a:off x="4562856" y="2350008"/>
+            <a:ext cx="3209544" cy="365760"/>
+          </a:xfrm>
+          <a:prstGeom prst="rect">
+            <a:avLst/>
+          </a:prstGeom>
+          <a:noFill/>
+          <a:ln/>
+        </p:spPr>
+        <p:txBody>
+          <a:bodyPr wrap="square" lIns="0" tIns="0" rIns="0" bIns="0" rtlCol="0" anchor="ctr"/>
+          <a:lstStyle/>
+          <a:p>
+            <a:pPr indent="0" marL="0">
+              <a:buNone/>
+            </a:pPr>
+            <a:r>
+              <a:rPr lang="en-US" sz="1350" b="1" dirty="0">
                 <a:solidFill>
                   <a:srgbClr val="0B1E3D"/>
                 </a:solidFill>
@@ -8652,104 +8941,67 @@
                 <a:ea typeface="Calibri" pitchFamily="34" charset="-122"/>
                 <a:cs typeface="Calibri" pitchFamily="34" charset="-120"/>
               </a:rPr>
-              <a:t>Platform layer</a:t>
-            </a:r>
-            <a:endParaRPr lang="en-US" sz="1500" dirty="0"/>
-          </a:p>
-        </p:txBody>
-      </p:sp>
-      <p:sp>
-        <p:nvSpPr>
-          <p:cNvPr id="16" name="Text 14"/>
-          <p:cNvSpPr/>
-          <p:nvPr/>
-        </p:nvSpPr>
-        <p:spPr>
-          <a:xfrm>
-            <a:off x="4526280" y="2834640"/>
-            <a:ext cx="3154680" cy="1874520"/>
-          </a:xfrm>
-          <a:prstGeom prst="rect">
-            <a:avLst/>
-          </a:prstGeom>
-          <a:noFill/>
-          <a:ln/>
-        </p:spPr>
-        <p:txBody>
-          <a:bodyPr wrap="square" lIns="0" tIns="0" rIns="0" bIns="0" rtlCol="0" anchor="ctr"/>
-          <a:lstStyle/>
-          <a:p>
-            <a:pPr indent="0" marL="0">
-              <a:buNone/>
-            </a:pPr>
-            <a:r>
-              <a:rPr lang="en-US" sz="1100" dirty="0">
-                <a:solidFill>
-                  <a:srgbClr val="36454F"/>
-                </a:solidFill>
-                <a:latin typeface="Calibri" pitchFamily="34" charset="0"/>
-                <a:ea typeface="Calibri" pitchFamily="34" charset="-122"/>
-                <a:cs typeface="Calibri" pitchFamily="34" charset="-120"/>
-              </a:rPr>
-              <a:t>Crossplane is installed onto those clusters; platform teams author Compositions exposing golden-path APIs.</a:t>
-            </a:r>
-            <a:endParaRPr lang="en-US" sz="1100" dirty="0"/>
-          </a:p>
-        </p:txBody>
-      </p:sp>
-      <p:sp>
-        <p:nvSpPr>
-          <p:cNvPr id="17" name="Text 15"/>
-          <p:cNvSpPr/>
-          <p:nvPr/>
-        </p:nvSpPr>
-        <p:spPr>
-          <a:xfrm>
-            <a:off x="7863840" y="3063240"/>
-            <a:ext cx="274320" cy="457200"/>
-          </a:xfrm>
-          <a:prstGeom prst="rect">
-            <a:avLst/>
-          </a:prstGeom>
-          <a:noFill/>
-          <a:ln/>
-        </p:spPr>
-        <p:txBody>
-          <a:bodyPr wrap="square" lIns="0" tIns="0" rIns="0" bIns="0" rtlCol="0" anchor="ctr"/>
-          <a:lstStyle/>
-          <a:p>
-            <a:pPr algn="ctr" indent="0" marL="0">
-              <a:buNone/>
-            </a:pPr>
-            <a:r>
-              <a:rPr lang="en-US" sz="2000" b="1" dirty="0">
-                <a:solidFill>
-                  <a:srgbClr val="1C7293"/>
-                </a:solidFill>
-                <a:latin typeface="Calibri" pitchFamily="34" charset="0"/>
-                <a:ea typeface="Calibri" pitchFamily="34" charset="-122"/>
-                <a:cs typeface="Calibri" pitchFamily="34" charset="-120"/>
-              </a:rPr>
-              <a:t>→</a:t>
-            </a:r>
-            <a:endParaRPr lang="en-US" sz="2000" dirty="0"/>
-          </a:p>
-        </p:txBody>
-      </p:sp>
-      <p:sp>
-        <p:nvSpPr>
-          <p:cNvPr id="18" name="Shape 16"/>
-          <p:cNvSpPr/>
-          <p:nvPr/>
-        </p:nvSpPr>
-        <p:spPr>
-          <a:xfrm>
-            <a:off x="8138160" y="1691640"/>
-            <a:ext cx="3520440" cy="3200400"/>
+              <a:t>Encapsulated wiring</a:t>
+            </a:r>
+            <a:endParaRPr lang="en-US" sz="1350" dirty="0"/>
+          </a:p>
+        </p:txBody>
+      </p:sp>
+      <p:sp>
+        <p:nvSpPr>
+          <p:cNvPr id="13" name="Text 11"/>
+          <p:cNvSpPr/>
+          <p:nvPr/>
+        </p:nvSpPr>
+        <p:spPr>
+          <a:xfrm>
+            <a:off x="4562856" y="2697480"/>
+            <a:ext cx="3209544" cy="566928"/>
+          </a:xfrm>
+          <a:prstGeom prst="rect">
+            <a:avLst/>
+          </a:prstGeom>
+          <a:noFill/>
+          <a:ln/>
+        </p:spPr>
+        <p:txBody>
+          <a:bodyPr wrap="square" lIns="0" tIns="0" rIns="0" bIns="0" rtlCol="0" anchor="t">
+            <a:normAutofit/>
+          </a:bodyPr>
+          <a:lstStyle/>
+          <a:p>
+            <a:pPr indent="0" marL="0">
+              <a:buNone/>
+            </a:pPr>
+            <a:r>
+              <a:rPr lang="en-US" sz="950" dirty="0">
+                <a:solidFill>
+                  <a:srgbClr val="6B7A8F"/>
+                </a:solidFill>
+                <a:latin typeface="Calibri" pitchFamily="34" charset="0"/>
+                <a:ea typeface="Calibri" pitchFamily="34" charset="-122"/>
+                <a:cs typeface="Calibri" pitchFamily="34" charset="-120"/>
+              </a:rPr>
+              <a:t>The platform team owns every selector and dependency; consumers can't misconfigure them.</a:t>
+            </a:r>
+            <a:endParaRPr lang="en-US" sz="950" dirty="0"/>
+          </a:p>
+        </p:txBody>
+      </p:sp>
+      <p:sp>
+        <p:nvSpPr>
+          <p:cNvPr id="14" name="Shape 12"/>
+          <p:cNvSpPr/>
+          <p:nvPr/>
+        </p:nvSpPr>
+        <p:spPr>
+          <a:xfrm>
+            <a:off x="8174736" y="1600200"/>
+            <a:ext cx="3611880" cy="1737360"/>
           </a:xfrm>
           <a:prstGeom prst="roundRect">
             <a:avLst>
-              <a:gd name="adj" fmla="val 2857"/>
+              <a:gd name="adj" fmla="val 5263"/>
             </a:avLst>
           </a:prstGeom>
           <a:solidFill>
@@ -8772,72 +9024,52 @@
       </p:sp>
       <p:sp>
         <p:nvSpPr>
-          <p:cNvPr id="19" name="Shape 17"/>
-          <p:cNvSpPr/>
-          <p:nvPr/>
-        </p:nvSpPr>
-        <p:spPr>
-          <a:xfrm>
-            <a:off x="8138160" y="1691640"/>
-            <a:ext cx="3520440" cy="502920"/>
+          <p:cNvPr id="15" name="Shape 13"/>
+          <p:cNvSpPr/>
+          <p:nvPr/>
+        </p:nvSpPr>
+        <p:spPr>
+          <a:xfrm>
+            <a:off x="8375904" y="1801368"/>
+            <a:ext cx="457200" cy="457200"/>
           </a:xfrm>
           <a:prstGeom prst="roundRect">
             <a:avLst>
-              <a:gd name="adj" fmla="val 18182"/>
+              <a:gd name="adj" fmla="val 50000"/>
             </a:avLst>
           </a:prstGeom>
           <a:solidFill>
-            <a:srgbClr val="5FD0C0"/>
+            <a:srgbClr val="3E6B99"/>
           </a:solidFill>
           <a:ln/>
         </p:spPr>
       </p:sp>
       <p:sp>
         <p:nvSpPr>
-          <p:cNvPr id="20" name="Shape 18"/>
-          <p:cNvSpPr/>
-          <p:nvPr/>
-        </p:nvSpPr>
-        <p:spPr>
-          <a:xfrm>
-            <a:off x="8138160" y="1965960"/>
-            <a:ext cx="3520440" cy="228600"/>
-          </a:xfrm>
-          <a:prstGeom prst="rect">
-            <a:avLst/>
-          </a:prstGeom>
-          <a:solidFill>
-            <a:srgbClr val="5FD0C0"/>
-          </a:solidFill>
-          <a:ln/>
-        </p:spPr>
-      </p:sp>
-      <p:sp>
-        <p:nvSpPr>
-          <p:cNvPr id="21" name="Text 19"/>
-          <p:cNvSpPr/>
-          <p:nvPr/>
-        </p:nvSpPr>
-        <p:spPr>
-          <a:xfrm>
-            <a:off x="8321040" y="1691640"/>
-            <a:ext cx="3154680" cy="502920"/>
-          </a:xfrm>
-          <a:prstGeom prst="rect">
-            <a:avLst/>
-          </a:prstGeom>
-          <a:noFill/>
-          <a:ln/>
-        </p:spPr>
-        <p:txBody>
-          <a:bodyPr wrap="square" lIns="0" tIns="0" rIns="0" bIns="0" rtlCol="0" anchor="ctr"/>
-          <a:lstStyle/>
-          <a:p>
-            <a:pPr indent="0" marL="0">
-              <a:buNone/>
-            </a:pPr>
-            <a:r>
-              <a:rPr lang="en-US" sz="1400" b="1" dirty="0">
+          <p:cNvPr id="16" name="Text 14"/>
+          <p:cNvSpPr/>
+          <p:nvPr/>
+        </p:nvSpPr>
+        <p:spPr>
+          <a:xfrm>
+            <a:off x="8375904" y="1801368"/>
+            <a:ext cx="457200" cy="457200"/>
+          </a:xfrm>
+          <a:prstGeom prst="rect">
+            <a:avLst/>
+          </a:prstGeom>
+          <a:noFill/>
+          <a:ln/>
+        </p:spPr>
+        <p:txBody>
+          <a:bodyPr wrap="square" lIns="0" tIns="0" rIns="0" bIns="0" rtlCol="0" anchor="ctr"/>
+          <a:lstStyle/>
+          <a:p>
+            <a:pPr algn="ctr" indent="0" marL="0">
+              <a:buNone/>
+            </a:pPr>
+            <a:r>
+              <a:rPr lang="en-US" sz="1600" b="1" dirty="0">
                 <a:solidFill>
                   <a:srgbClr val="FFFFFF"/>
                 </a:solidFill>
@@ -8845,38 +9077,38 @@
                 <a:ea typeface="Calibri" pitchFamily="34" charset="-122"/>
                 <a:cs typeface="Calibri" pitchFamily="34" charset="-120"/>
               </a:rPr>
-              <a:t>Day 2</a:t>
-            </a:r>
-            <a:endParaRPr lang="en-US" sz="1400" dirty="0"/>
-          </a:p>
-        </p:txBody>
-      </p:sp>
-      <p:sp>
-        <p:nvSpPr>
-          <p:cNvPr id="22" name="Text 20"/>
-          <p:cNvSpPr/>
-          <p:nvPr/>
-        </p:nvSpPr>
-        <p:spPr>
-          <a:xfrm>
-            <a:off x="8321040" y="2377440"/>
-            <a:ext cx="3154680" cy="411480"/>
-          </a:xfrm>
-          <a:prstGeom prst="rect">
-            <a:avLst/>
-          </a:prstGeom>
-          <a:noFill/>
-          <a:ln/>
-        </p:spPr>
-        <p:txBody>
-          <a:bodyPr wrap="square" lIns="0" tIns="0" rIns="0" bIns="0" rtlCol="0" anchor="ctr"/>
-          <a:lstStyle/>
-          <a:p>
-            <a:pPr indent="0" marL="0">
-              <a:buNone/>
-            </a:pPr>
-            <a:r>
-              <a:rPr lang="en-US" sz="1500" b="1" dirty="0">
+              <a:t>3</a:t>
+            </a:r>
+            <a:endParaRPr lang="en-US" sz="1600" dirty="0"/>
+          </a:p>
+        </p:txBody>
+      </p:sp>
+      <p:sp>
+        <p:nvSpPr>
+          <p:cNvPr id="17" name="Text 15"/>
+          <p:cNvSpPr/>
+          <p:nvPr/>
+        </p:nvSpPr>
+        <p:spPr>
+          <a:xfrm>
+            <a:off x="8375904" y="2350008"/>
+            <a:ext cx="3209544" cy="365760"/>
+          </a:xfrm>
+          <a:prstGeom prst="rect">
+            <a:avLst/>
+          </a:prstGeom>
+          <a:noFill/>
+          <a:ln/>
+        </p:spPr>
+        <p:txBody>
+          <a:bodyPr wrap="square" lIns="0" tIns="0" rIns="0" bIns="0" rtlCol="0" anchor="ctr"/>
+          <a:lstStyle/>
+          <a:p>
+            <a:pPr indent="0" marL="0">
+              <a:buNone/>
+            </a:pPr>
+            <a:r>
+              <a:rPr lang="en-US" sz="1350" b="1" dirty="0">
                 <a:solidFill>
                   <a:srgbClr val="0B1E3D"/>
                 </a:solidFill>
@@ -8884,99 +9116,174 @@
                 <a:ea typeface="Calibri" pitchFamily="34" charset="-122"/>
                 <a:cs typeface="Calibri" pitchFamily="34" charset="-120"/>
               </a:rPr>
-              <a:t>Developer self-service</a:t>
-            </a:r>
-            <a:endParaRPr lang="en-US" sz="1500" dirty="0"/>
-          </a:p>
-        </p:txBody>
-      </p:sp>
-      <p:sp>
-        <p:nvSpPr>
-          <p:cNvPr id="23" name="Text 21"/>
-          <p:cNvSpPr/>
-          <p:nvPr/>
-        </p:nvSpPr>
-        <p:spPr>
-          <a:xfrm>
-            <a:off x="8321040" y="2834640"/>
-            <a:ext cx="3154680" cy="1874520"/>
-          </a:xfrm>
-          <a:prstGeom prst="rect">
-            <a:avLst/>
-          </a:prstGeom>
-          <a:noFill/>
-          <a:ln/>
-        </p:spPr>
-        <p:txBody>
-          <a:bodyPr wrap="square" lIns="0" tIns="0" rIns="0" bIns="0" rtlCol="0" anchor="ctr"/>
-          <a:lstStyle/>
-          <a:p>
-            <a:pPr indent="0" marL="0">
-              <a:buNone/>
-            </a:pPr>
-            <a:r>
-              <a:rPr lang="en-US" sz="1100" dirty="0">
-                <a:solidFill>
-                  <a:srgbClr val="36454F"/>
-                </a:solidFill>
-                <a:latin typeface="Calibri" pitchFamily="34" charset="0"/>
-                <a:ea typeface="Calibri" pitchFamily="34" charset="-122"/>
-                <a:cs typeface="Calibri" pitchFamily="34" charset="-120"/>
-              </a:rPr>
-              <a:t>App teams submit namespaced XRs directly via GitOps; infra scales with the app lifecycle, drift self-heals.</a:t>
-            </a:r>
-            <a:endParaRPr lang="en-US" sz="1100" dirty="0"/>
-          </a:p>
-        </p:txBody>
-      </p:sp>
-      <p:sp>
-        <p:nvSpPr>
-          <p:cNvPr id="24" name="Shape 22"/>
-          <p:cNvSpPr/>
-          <p:nvPr/>
-        </p:nvSpPr>
-        <p:spPr>
-          <a:xfrm>
-            <a:off x="548640" y="5120640"/>
-            <a:ext cx="11064240" cy="777240"/>
+              <a:t>One object, one lifecycle</a:t>
+            </a:r>
+            <a:endParaRPr lang="en-US" sz="1350" dirty="0"/>
+          </a:p>
+        </p:txBody>
+      </p:sp>
+      <p:sp>
+        <p:nvSpPr>
+          <p:cNvPr id="18" name="Text 16"/>
+          <p:cNvSpPr/>
+          <p:nvPr/>
+        </p:nvSpPr>
+        <p:spPr>
+          <a:xfrm>
+            <a:off x="8375904" y="2697480"/>
+            <a:ext cx="3209544" cy="566928"/>
+          </a:xfrm>
+          <a:prstGeom prst="rect">
+            <a:avLst/>
+          </a:prstGeom>
+          <a:noFill/>
+          <a:ln/>
+        </p:spPr>
+        <p:txBody>
+          <a:bodyPr wrap="square" lIns="0" tIns="0" rIns="0" bIns="0" rtlCol="0" anchor="t">
+            <a:normAutofit/>
+          </a:bodyPr>
+          <a:lstStyle/>
+          <a:p>
+            <a:pPr indent="0" marL="0">
+              <a:buNone/>
+            </a:pPr>
+            <a:r>
+              <a:rPr lang="en-US" sz="950" dirty="0">
+                <a:solidFill>
+                  <a:srgbClr val="6B7A8F"/>
+                </a:solidFill>
+                <a:latin typeface="Calibri" pitchFamily="34" charset="0"/>
+                <a:ea typeface="Calibri" pitchFamily="34" charset="-122"/>
+                <a:cs typeface="Calibri" pitchFamily="34" charset="-120"/>
+              </a:rPr>
+              <a:t>The XR is the single source of truth — delete it and everything underneath goes with it.</a:t>
+            </a:r>
+            <a:endParaRPr lang="en-US" sz="950" dirty="0"/>
+          </a:p>
+        </p:txBody>
+      </p:sp>
+      <p:sp>
+        <p:nvSpPr>
+          <p:cNvPr id="19" name="Shape 17"/>
+          <p:cNvSpPr/>
+          <p:nvPr/>
+        </p:nvSpPr>
+        <p:spPr>
+          <a:xfrm>
+            <a:off x="548640" y="3538728"/>
+            <a:ext cx="3611880" cy="1737360"/>
           </a:xfrm>
           <a:prstGeom prst="roundRect">
             <a:avLst>
-              <a:gd name="adj" fmla="val 11765"/>
+              <a:gd name="adj" fmla="val 5263"/>
             </a:avLst>
           </a:prstGeom>
           <a:solidFill>
-            <a:srgbClr val="EAF1F8"/>
+            <a:srgbClr val="FFFFFF"/>
           </a:solidFill>
-          <a:ln/>
-        </p:spPr>
-      </p:sp>
-      <p:sp>
-        <p:nvSpPr>
-          <p:cNvPr id="25" name="Text 23"/>
-          <p:cNvSpPr/>
-          <p:nvPr/>
-        </p:nvSpPr>
-        <p:spPr>
-          <a:xfrm>
-            <a:off x="822960" y="5120640"/>
-            <a:ext cx="1371600" cy="777240"/>
-          </a:xfrm>
-          <a:prstGeom prst="rect">
-            <a:avLst/>
-          </a:prstGeom>
-          <a:noFill/>
-          <a:ln/>
-        </p:spPr>
-        <p:txBody>
-          <a:bodyPr wrap="square" lIns="0" tIns="0" rIns="0" bIns="0" rtlCol="0" anchor="ctr"/>
-          <a:lstStyle/>
-          <a:p>
-            <a:pPr indent="0" marL="0">
-              <a:buNone/>
-            </a:pPr>
-            <a:r>
-              <a:rPr lang="en-US" sz="1250" b="1" dirty="0">
+          <a:ln w="12700">
+            <a:solidFill>
+              <a:srgbClr val="DCE4EC"/>
+            </a:solidFill>
+            <a:prstDash val="solid"/>
+          </a:ln>
+          <a:effectLst>
+            <a:outerShdw sx="100000" sy="100000" kx="0" ky="0" algn="bl" rotWithShape="0" blurRad="63500" dist="25400" dir="5400000">
+              <a:srgbClr val="000000">
+                <a:alpha val="10000"/>
+              </a:srgbClr>
+            </a:outerShdw>
+          </a:effectLst>
+        </p:spPr>
+      </p:sp>
+      <p:sp>
+        <p:nvSpPr>
+          <p:cNvPr id="20" name="Shape 18"/>
+          <p:cNvSpPr/>
+          <p:nvPr/>
+        </p:nvSpPr>
+        <p:spPr>
+          <a:xfrm>
+            <a:off x="749808" y="3739896"/>
+            <a:ext cx="457200" cy="457200"/>
+          </a:xfrm>
+          <a:prstGeom prst="roundRect">
+            <a:avLst>
+              <a:gd name="adj" fmla="val 50000"/>
+            </a:avLst>
+          </a:prstGeom>
+          <a:solidFill>
+            <a:srgbClr val="5B7FA6"/>
+          </a:solidFill>
+          <a:ln/>
+        </p:spPr>
+      </p:sp>
+      <p:sp>
+        <p:nvSpPr>
+          <p:cNvPr id="21" name="Text 19"/>
+          <p:cNvSpPr/>
+          <p:nvPr/>
+        </p:nvSpPr>
+        <p:spPr>
+          <a:xfrm>
+            <a:off x="749808" y="3739896"/>
+            <a:ext cx="457200" cy="457200"/>
+          </a:xfrm>
+          <a:prstGeom prst="rect">
+            <a:avLst/>
+          </a:prstGeom>
+          <a:noFill/>
+          <a:ln/>
+        </p:spPr>
+        <p:txBody>
+          <a:bodyPr wrap="square" lIns="0" tIns="0" rIns="0" bIns="0" rtlCol="0" anchor="ctr"/>
+          <a:lstStyle/>
+          <a:p>
+            <a:pPr algn="ctr" indent="0" marL="0">
+              <a:buNone/>
+            </a:pPr>
+            <a:r>
+              <a:rPr lang="en-US" sz="1600" b="1" dirty="0">
+                <a:solidFill>
+                  <a:srgbClr val="FFFFFF"/>
+                </a:solidFill>
+                <a:latin typeface="Calibri" pitchFamily="34" charset="0"/>
+                <a:ea typeface="Calibri" pitchFamily="34" charset="-122"/>
+                <a:cs typeface="Calibri" pitchFamily="34" charset="-120"/>
+              </a:rPr>
+              <a:t>4</a:t>
+            </a:r>
+            <a:endParaRPr lang="en-US" sz="1600" dirty="0"/>
+          </a:p>
+        </p:txBody>
+      </p:sp>
+      <p:sp>
+        <p:nvSpPr>
+          <p:cNvPr id="22" name="Text 20"/>
+          <p:cNvSpPr/>
+          <p:nvPr/>
+        </p:nvSpPr>
+        <p:spPr>
+          <a:xfrm>
+            <a:off x="749808" y="4288536"/>
+            <a:ext cx="3209544" cy="365760"/>
+          </a:xfrm>
+          <a:prstGeom prst="rect">
+            <a:avLst/>
+          </a:prstGeom>
+          <a:noFill/>
+          <a:ln/>
+        </p:spPr>
+        <p:txBody>
+          <a:bodyPr wrap="square" lIns="0" tIns="0" rIns="0" bIns="0" rtlCol="0" anchor="ctr"/>
+          <a:lstStyle/>
+          <a:p>
+            <a:pPr indent="0" marL="0">
+              <a:buNone/>
+            </a:pPr>
+            <a:r>
+              <a:rPr lang="en-US" sz="1350" b="1" dirty="0">
                 <a:solidFill>
                   <a:srgbClr val="0B1E3D"/>
                 </a:solidFill>
@@ -8984,31 +9291,31 @@
                 <a:ea typeface="Calibri" pitchFamily="34" charset="-122"/>
                 <a:cs typeface="Calibri" pitchFamily="34" charset="-120"/>
               </a:rPr>
-              <a:t>Key insight:</a:t>
-            </a:r>
-            <a:endParaRPr lang="en-US" sz="1250" dirty="0"/>
-          </a:p>
-        </p:txBody>
-      </p:sp>
-      <p:sp>
-        <p:nvSpPr>
-          <p:cNvPr id="26" name="Text 24"/>
-          <p:cNvSpPr/>
-          <p:nvPr/>
-        </p:nvSpPr>
-        <p:spPr>
-          <a:xfrm>
-            <a:off x="2148840" y="5120640"/>
-            <a:ext cx="9189720" cy="777240"/>
-          </a:xfrm>
-          <a:prstGeom prst="rect">
-            <a:avLst/>
-          </a:prstGeom>
-          <a:noFill/>
-          <a:ln/>
-        </p:spPr>
-        <p:txBody>
-          <a:bodyPr wrap="square" lIns="0" tIns="0" rIns="0" bIns="0" rtlCol="0" anchor="ctr">
+              <a:t>Reusable across teams</a:t>
+            </a:r>
+            <a:endParaRPr lang="en-US" sz="1350" dirty="0"/>
+          </a:p>
+        </p:txBody>
+      </p:sp>
+      <p:sp>
+        <p:nvSpPr>
+          <p:cNvPr id="23" name="Text 21"/>
+          <p:cNvSpPr/>
+          <p:nvPr/>
+        </p:nvSpPr>
+        <p:spPr>
+          <a:xfrm>
+            <a:off x="749808" y="4636008"/>
+            <a:ext cx="3209544" cy="566928"/>
+          </a:xfrm>
+          <a:prstGeom prst="rect">
+            <a:avLst/>
+          </a:prstGeom>
+          <a:noFill/>
+          <a:ln/>
+        </p:spPr>
+        <p:txBody>
+          <a:bodyPr wrap="square" lIns="0" tIns="0" rIns="0" bIns="0" rtlCol="0" anchor="t">
             <a:normAutofit/>
           </a:bodyPr>
           <a:lstStyle/>
@@ -9017,23 +9324,373 @@
               <a:buNone/>
             </a:pPr>
             <a:r>
-              <a:rPr lang="en-US" sz="1250" dirty="0">
-                <a:solidFill>
-                  <a:srgbClr val="36454F"/>
-                </a:solidFill>
-                <a:latin typeface="Calibri" pitchFamily="34" charset="0"/>
-                <a:ea typeface="Calibri" pitchFamily="34" charset="-122"/>
-                <a:cs typeface="Calibri" pitchFamily="34" charset="-120"/>
-              </a:rPr>
-              <a:t>Crossplane doesn't replace Terraform or Bicep at Day 0 — it typically sits on top, turning what they provisioned into self-service platform APIs.</a:t>
-            </a:r>
-            <a:endParaRPr lang="en-US" sz="1250" dirty="0"/>
+              <a:rPr lang="en-US" sz="950" dirty="0">
+                <a:solidFill>
+                  <a:srgbClr val="6B7A8F"/>
+                </a:solidFill>
+                <a:latin typeface="Calibri" pitchFamily="34" charset="0"/>
+                <a:ea typeface="Calibri" pitchFamily="34" charset="-122"/>
+                <a:cs typeface="Calibri" pitchFamily="34" charset="-120"/>
+              </a:rPr>
+              <a:t>The same Composition serves every namespace that creates an XPrivateStorage.</a:t>
+            </a:r>
+            <a:endParaRPr lang="en-US" sz="950" dirty="0"/>
+          </a:p>
+        </p:txBody>
+      </p:sp>
+      <p:sp>
+        <p:nvSpPr>
+          <p:cNvPr id="24" name="Shape 22"/>
+          <p:cNvSpPr/>
+          <p:nvPr/>
+        </p:nvSpPr>
+        <p:spPr>
+          <a:xfrm>
+            <a:off x="4361688" y="3538728"/>
+            <a:ext cx="3611880" cy="1737360"/>
+          </a:xfrm>
+          <a:prstGeom prst="roundRect">
+            <a:avLst>
+              <a:gd name="adj" fmla="val 5263"/>
+            </a:avLst>
+          </a:prstGeom>
+          <a:solidFill>
+            <a:srgbClr val="FFFFFF"/>
+          </a:solidFill>
+          <a:ln w="12700">
+            <a:solidFill>
+              <a:srgbClr val="DCE4EC"/>
+            </a:solidFill>
+            <a:prstDash val="solid"/>
+          </a:ln>
+          <a:effectLst>
+            <a:outerShdw sx="100000" sy="100000" kx="0" ky="0" algn="bl" rotWithShape="0" blurRad="63500" dist="25400" dir="5400000">
+              <a:srgbClr val="000000">
+                <a:alpha val="10000"/>
+              </a:srgbClr>
+            </a:outerShdw>
+          </a:effectLst>
+        </p:spPr>
+      </p:sp>
+      <p:sp>
+        <p:nvSpPr>
+          <p:cNvPr id="25" name="Shape 23"/>
+          <p:cNvSpPr/>
+          <p:nvPr/>
+        </p:nvSpPr>
+        <p:spPr>
+          <a:xfrm>
+            <a:off x="4562856" y="3739896"/>
+            <a:ext cx="457200" cy="457200"/>
+          </a:xfrm>
+          <a:prstGeom prst="roundRect">
+            <a:avLst>
+              <a:gd name="adj" fmla="val 50000"/>
+            </a:avLst>
+          </a:prstGeom>
+          <a:solidFill>
+            <a:srgbClr val="84A6C9"/>
+          </a:solidFill>
+          <a:ln/>
+        </p:spPr>
+      </p:sp>
+      <p:sp>
+        <p:nvSpPr>
+          <p:cNvPr id="26" name="Text 24"/>
+          <p:cNvSpPr/>
+          <p:nvPr/>
+        </p:nvSpPr>
+        <p:spPr>
+          <a:xfrm>
+            <a:off x="4562856" y="3739896"/>
+            <a:ext cx="457200" cy="457200"/>
+          </a:xfrm>
+          <a:prstGeom prst="rect">
+            <a:avLst/>
+          </a:prstGeom>
+          <a:noFill/>
+          <a:ln/>
+        </p:spPr>
+        <p:txBody>
+          <a:bodyPr wrap="square" lIns="0" tIns="0" rIns="0" bIns="0" rtlCol="0" anchor="ctr"/>
+          <a:lstStyle/>
+          <a:p>
+            <a:pPr algn="ctr" indent="0" marL="0">
+              <a:buNone/>
+            </a:pPr>
+            <a:r>
+              <a:rPr lang="en-US" sz="1600" b="1" dirty="0">
+                <a:solidFill>
+                  <a:srgbClr val="FFFFFF"/>
+                </a:solidFill>
+                <a:latin typeface="Calibri" pitchFamily="34" charset="0"/>
+                <a:ea typeface="Calibri" pitchFamily="34" charset="-122"/>
+                <a:cs typeface="Calibri" pitchFamily="34" charset="-120"/>
+              </a:rPr>
+              <a:t>5</a:t>
+            </a:r>
+            <a:endParaRPr lang="en-US" sz="1600" dirty="0"/>
           </a:p>
         </p:txBody>
       </p:sp>
       <p:sp>
         <p:nvSpPr>
           <p:cNvPr id="27" name="Text 25"/>
+          <p:cNvSpPr/>
+          <p:nvPr/>
+        </p:nvSpPr>
+        <p:spPr>
+          <a:xfrm>
+            <a:off x="4562856" y="4288536"/>
+            <a:ext cx="3209544" cy="365760"/>
+          </a:xfrm>
+          <a:prstGeom prst="rect">
+            <a:avLst/>
+          </a:prstGeom>
+          <a:noFill/>
+          <a:ln/>
+        </p:spPr>
+        <p:txBody>
+          <a:bodyPr wrap="square" lIns="0" tIns="0" rIns="0" bIns="0" rtlCol="0" anchor="ctr"/>
+          <a:lstStyle/>
+          <a:p>
+            <a:pPr indent="0" marL="0">
+              <a:buNone/>
+            </a:pPr>
+            <a:r>
+              <a:rPr lang="en-US" sz="1350" b="1" dirty="0">
+                <a:solidFill>
+                  <a:srgbClr val="0B1E3D"/>
+                </a:solidFill>
+                <a:latin typeface="Calibri" pitchFamily="34" charset="0"/>
+                <a:ea typeface="Calibri" pitchFamily="34" charset="-122"/>
+                <a:cs typeface="Calibri" pitchFamily="34" charset="-120"/>
+              </a:rPr>
+              <a:t>Upgradeable independently</a:t>
+            </a:r>
+            <a:endParaRPr lang="en-US" sz="1350" dirty="0"/>
+          </a:p>
+        </p:txBody>
+      </p:sp>
+      <p:sp>
+        <p:nvSpPr>
+          <p:cNvPr id="28" name="Text 26"/>
+          <p:cNvSpPr/>
+          <p:nvPr/>
+        </p:nvSpPr>
+        <p:spPr>
+          <a:xfrm>
+            <a:off x="4562856" y="4636008"/>
+            <a:ext cx="3209544" cy="566928"/>
+          </a:xfrm>
+          <a:prstGeom prst="rect">
+            <a:avLst/>
+          </a:prstGeom>
+          <a:noFill/>
+          <a:ln/>
+        </p:spPr>
+        <p:txBody>
+          <a:bodyPr wrap="square" lIns="0" tIns="0" rIns="0" bIns="0" rtlCol="0" anchor="t">
+            <a:normAutofit/>
+          </a:bodyPr>
+          <a:lstStyle/>
+          <a:p>
+            <a:pPr indent="0" marL="0">
+              <a:buNone/>
+            </a:pPr>
+            <a:r>
+              <a:rPr lang="en-US" sz="950" dirty="0">
+                <a:solidFill>
+                  <a:srgbClr val="6B7A8F"/>
+                </a:solidFill>
+                <a:latin typeface="Calibri" pitchFamily="34" charset="0"/>
+                <a:ea typeface="Calibri" pitchFamily="34" charset="-122"/>
+                <a:cs typeface="Calibri" pitchFamily="34" charset="-120"/>
+              </a:rPr>
+              <a:t>Swap the Composition's implementation (a new Function, a new resource) — consumer YAML never changes.</a:t>
+            </a:r>
+            <a:endParaRPr lang="en-US" sz="950" dirty="0"/>
+          </a:p>
+        </p:txBody>
+      </p:sp>
+      <p:sp>
+        <p:nvSpPr>
+          <p:cNvPr id="29" name="Shape 27"/>
+          <p:cNvSpPr/>
+          <p:nvPr/>
+        </p:nvSpPr>
+        <p:spPr>
+          <a:xfrm>
+            <a:off x="8174736" y="3538728"/>
+            <a:ext cx="3611880" cy="1737360"/>
+          </a:xfrm>
+          <a:prstGeom prst="roundRect">
+            <a:avLst>
+              <a:gd name="adj" fmla="val 5263"/>
+            </a:avLst>
+          </a:prstGeom>
+          <a:solidFill>
+            <a:srgbClr val="FFFFFF"/>
+          </a:solidFill>
+          <a:ln w="12700">
+            <a:solidFill>
+              <a:srgbClr val="DCE4EC"/>
+            </a:solidFill>
+            <a:prstDash val="solid"/>
+          </a:ln>
+          <a:effectLst>
+            <a:outerShdw sx="100000" sy="100000" kx="0" ky="0" algn="bl" rotWithShape="0" blurRad="63500" dist="25400" dir="5400000">
+              <a:srgbClr val="000000">
+                <a:alpha val="10000"/>
+              </a:srgbClr>
+            </a:outerShdw>
+          </a:effectLst>
+        </p:spPr>
+      </p:sp>
+      <p:sp>
+        <p:nvSpPr>
+          <p:cNvPr id="30" name="Shape 28"/>
+          <p:cNvSpPr/>
+          <p:nvPr/>
+        </p:nvSpPr>
+        <p:spPr>
+          <a:xfrm>
+            <a:off x="8375904" y="3739896"/>
+            <a:ext cx="457200" cy="457200"/>
+          </a:xfrm>
+          <a:prstGeom prst="roundRect">
+            <a:avLst>
+              <a:gd name="adj" fmla="val 50000"/>
+            </a:avLst>
+          </a:prstGeom>
+          <a:solidFill>
+            <a:srgbClr val="0E8C74"/>
+          </a:solidFill>
+          <a:ln/>
+        </p:spPr>
+      </p:sp>
+      <p:sp>
+        <p:nvSpPr>
+          <p:cNvPr id="31" name="Text 29"/>
+          <p:cNvSpPr/>
+          <p:nvPr/>
+        </p:nvSpPr>
+        <p:spPr>
+          <a:xfrm>
+            <a:off x="8375904" y="3739896"/>
+            <a:ext cx="457200" cy="457200"/>
+          </a:xfrm>
+          <a:prstGeom prst="rect">
+            <a:avLst/>
+          </a:prstGeom>
+          <a:noFill/>
+          <a:ln/>
+        </p:spPr>
+        <p:txBody>
+          <a:bodyPr wrap="square" lIns="0" tIns="0" rIns="0" bIns="0" rtlCol="0" anchor="ctr"/>
+          <a:lstStyle/>
+          <a:p>
+            <a:pPr algn="ctr" indent="0" marL="0">
+              <a:buNone/>
+            </a:pPr>
+            <a:r>
+              <a:rPr lang="en-US" sz="1600" b="1" dirty="0">
+                <a:solidFill>
+                  <a:srgbClr val="FFFFFF"/>
+                </a:solidFill>
+                <a:latin typeface="Calibri" pitchFamily="34" charset="0"/>
+                <a:ea typeface="Calibri" pitchFamily="34" charset="-122"/>
+                <a:cs typeface="Calibri" pitchFamily="34" charset="-120"/>
+              </a:rPr>
+              <a:t>6</a:t>
+            </a:r>
+            <a:endParaRPr lang="en-US" sz="1600" dirty="0"/>
+          </a:p>
+        </p:txBody>
+      </p:sp>
+      <p:sp>
+        <p:nvSpPr>
+          <p:cNvPr id="32" name="Text 30"/>
+          <p:cNvSpPr/>
+          <p:nvPr/>
+        </p:nvSpPr>
+        <p:spPr>
+          <a:xfrm>
+            <a:off x="8375904" y="4288536"/>
+            <a:ext cx="3209544" cy="365760"/>
+          </a:xfrm>
+          <a:prstGeom prst="rect">
+            <a:avLst/>
+          </a:prstGeom>
+          <a:noFill/>
+          <a:ln/>
+        </p:spPr>
+        <p:txBody>
+          <a:bodyPr wrap="square" lIns="0" tIns="0" rIns="0" bIns="0" rtlCol="0" anchor="ctr"/>
+          <a:lstStyle/>
+          <a:p>
+            <a:pPr indent="0" marL="0">
+              <a:buNone/>
+            </a:pPr>
+            <a:r>
+              <a:rPr lang="en-US" sz="1350" b="1" dirty="0">
+                <a:solidFill>
+                  <a:srgbClr val="0B1E3D"/>
+                </a:solidFill>
+                <a:latin typeface="Calibri" pitchFamily="34" charset="0"/>
+                <a:ea typeface="Calibri" pitchFamily="34" charset="-122"/>
+                <a:cs typeface="Calibri" pitchFamily="34" charset="-120"/>
+              </a:rPr>
+              <a:t>Namespaced in v2</a:t>
+            </a:r>
+            <a:endParaRPr lang="en-US" sz="1350" dirty="0"/>
+          </a:p>
+        </p:txBody>
+      </p:sp>
+      <p:sp>
+        <p:nvSpPr>
+          <p:cNvPr id="33" name="Text 31"/>
+          <p:cNvSpPr/>
+          <p:nvPr/>
+        </p:nvSpPr>
+        <p:spPr>
+          <a:xfrm>
+            <a:off x="8375904" y="4636008"/>
+            <a:ext cx="3209544" cy="566928"/>
+          </a:xfrm>
+          <a:prstGeom prst="rect">
+            <a:avLst/>
+          </a:prstGeom>
+          <a:noFill/>
+          <a:ln/>
+        </p:spPr>
+        <p:txBody>
+          <a:bodyPr wrap="square" lIns="0" tIns="0" rIns="0" bIns="0" rtlCol="0" anchor="t">
+            <a:normAutofit/>
+          </a:bodyPr>
+          <a:lstStyle/>
+          <a:p>
+            <a:pPr indent="0" marL="0">
+              <a:buNone/>
+            </a:pPr>
+            <a:r>
+              <a:rPr lang="en-US" sz="950" dirty="0">
+                <a:solidFill>
+                  <a:srgbClr val="6B7A8F"/>
+                </a:solidFill>
+                <a:latin typeface="Calibri" pitchFamily="34" charset="0"/>
+                <a:ea typeface="Calibri" pitchFamily="34" charset="-122"/>
+                <a:cs typeface="Calibri" pitchFamily="34" charset="-120"/>
+              </a:rPr>
+              <a:t>Teams get their own XR instances, scoped and RBAC'd like any other namespaced object — no Claim needed.</a:t>
+            </a:r>
+            <a:endParaRPr lang="en-US" sz="950" dirty="0"/>
+          </a:p>
+        </p:txBody>
+      </p:sp>
+      <p:sp>
+        <p:nvSpPr>
+          <p:cNvPr id="34" name="Text 32"/>
           <p:cNvSpPr/>
           <p:nvPr/>
         </p:nvSpPr>
@@ -9072,7 +9729,7 @@
       </p:sp>
       <p:sp>
         <p:nvSpPr>
-          <p:cNvPr id="28" name="Text 26"/>
+          <p:cNvPr id="35" name="Text 33"/>
           <p:cNvSpPr/>
           <p:nvPr/>
         </p:nvSpPr>
@@ -9123,7 +9780,7 @@
     <p:bg>
       <p:bgPr>
         <a:solidFill>
-          <a:srgbClr val="0B1E3D"/>
+          <a:srgbClr val="F4F7FA"/>
         </a:solidFill>
       </p:bgPr>
     </p:bg>
@@ -9150,133 +9807,130 @@
         <p:spPr>
           <a:xfrm>
             <a:off x="548640" y="411480"/>
-            <a:ext cx="8229600" cy="640080"/>
-          </a:xfrm>
-          <a:prstGeom prst="rect">
-            <a:avLst/>
-          </a:prstGeom>
-          <a:noFill/>
-          <a:ln/>
-        </p:spPr>
-        <p:txBody>
-          <a:bodyPr wrap="square" lIns="0" tIns="0" rIns="0" bIns="0" rtlCol="0" anchor="ctr"/>
-          <a:lstStyle/>
-          <a:p>
-            <a:pPr indent="0" marL="0">
-              <a:buNone/>
-            </a:pPr>
-            <a:r>
-              <a:rPr lang="en-US" sz="3200" b="1" dirty="0">
-                <a:solidFill>
-                  <a:srgbClr val="FFFFFF"/>
+            <a:ext cx="9875520" cy="640080"/>
+          </a:xfrm>
+          <a:prstGeom prst="rect">
+            <a:avLst/>
+          </a:prstGeom>
+          <a:noFill/>
+          <a:ln/>
+        </p:spPr>
+        <p:txBody>
+          <a:bodyPr wrap="square" lIns="0" tIns="0" rIns="0" bIns="0" rtlCol="0" anchor="ctr"/>
+          <a:lstStyle/>
+          <a:p>
+            <a:pPr indent="0" marL="0">
+              <a:buNone/>
+            </a:pPr>
+            <a:r>
+              <a:rPr lang="en-US" sz="2800" b="1" dirty="0">
+                <a:solidFill>
+                  <a:srgbClr val="0B1E3D"/>
                 </a:solidFill>
                 <a:latin typeface="Cambria" pitchFamily="34" charset="0"/>
                 <a:ea typeface="Cambria" pitchFamily="34" charset="-122"/>
                 <a:cs typeface="Cambria" pitchFamily="34" charset="-120"/>
               </a:rPr>
-              <a:t>Risks &amp; Considerations</a:t>
-            </a:r>
-            <a:endParaRPr lang="en-US" sz="3200" dirty="0"/>
-          </a:p>
-        </p:txBody>
-      </p:sp>
-      <p:sp>
-        <p:nvSpPr>
-          <p:cNvPr id="3" name="Shape 1"/>
-          <p:cNvSpPr/>
-          <p:nvPr/>
-        </p:nvSpPr>
-        <p:spPr>
-          <a:xfrm>
-            <a:off x="548640" y="1463040"/>
-            <a:ext cx="128016" cy="777240"/>
+              <a:t>A Common Enterprise Adoption Pattern</a:t>
+            </a:r>
+            <a:endParaRPr lang="en-US" sz="2800" dirty="0"/>
+          </a:p>
+        </p:txBody>
+      </p:sp>
+      <p:sp>
+        <p:nvSpPr>
+          <p:cNvPr id="3" name="Text 1"/>
+          <p:cNvSpPr/>
+          <p:nvPr/>
+        </p:nvSpPr>
+        <p:spPr>
+          <a:xfrm>
+            <a:off x="548640" y="1005840"/>
+            <a:ext cx="9144000" cy="365760"/>
+          </a:xfrm>
+          <a:prstGeom prst="rect">
+            <a:avLst/>
+          </a:prstGeom>
+          <a:noFill/>
+          <a:ln/>
+        </p:spPr>
+        <p:txBody>
+          <a:bodyPr wrap="square" lIns="0" tIns="0" rIns="0" bIns="0" rtlCol="0" anchor="ctr"/>
+          <a:lstStyle/>
+          <a:p>
+            <a:pPr indent="0" marL="0">
+              <a:buNone/>
+            </a:pPr>
+            <a:r>
+              <a:rPr lang="en-US" sz="1250" i="1" dirty="0">
+                <a:solidFill>
+                  <a:srgbClr val="6B7A8F"/>
+                </a:solidFill>
+                <a:latin typeface="Calibri" pitchFamily="34" charset="0"/>
+                <a:ea typeface="Calibri" pitchFamily="34" charset="-122"/>
+                <a:cs typeface="Calibri" pitchFamily="34" charset="-120"/>
+              </a:rPr>
+              <a:t>Most organizations run these tools together, not instead of one another.</a:t>
+            </a:r>
+            <a:endParaRPr lang="en-US" sz="1250" dirty="0"/>
+          </a:p>
+        </p:txBody>
+      </p:sp>
+      <p:sp>
+        <p:nvSpPr>
+          <p:cNvPr id="4" name="Shape 2"/>
+          <p:cNvSpPr/>
+          <p:nvPr/>
+        </p:nvSpPr>
+        <p:spPr>
+          <a:xfrm>
+            <a:off x="548640" y="1691640"/>
+            <a:ext cx="3520440" cy="3200400"/>
           </a:xfrm>
           <a:prstGeom prst="roundRect">
-            <a:avLst/>
+            <a:avLst>
+              <a:gd name="adj" fmla="val 2857"/>
+            </a:avLst>
           </a:prstGeom>
           <a:solidFill>
-            <a:srgbClr val="C97A3E"/>
+            <a:srgbClr val="FFFFFF"/>
           </a:solidFill>
-          <a:ln/>
-        </p:spPr>
-      </p:sp>
-      <p:sp>
-        <p:nvSpPr>
-          <p:cNvPr id="4" name="Text 2"/>
-          <p:cNvSpPr/>
-          <p:nvPr/>
-        </p:nvSpPr>
-        <p:spPr>
-          <a:xfrm>
-            <a:off x="822960" y="1444752"/>
-            <a:ext cx="3931920" cy="457200"/>
-          </a:xfrm>
-          <a:prstGeom prst="rect">
-            <a:avLst/>
-          </a:prstGeom>
-          <a:noFill/>
-          <a:ln/>
-        </p:spPr>
-        <p:txBody>
-          <a:bodyPr wrap="square" lIns="0" tIns="0" rIns="0" bIns="0" rtlCol="0" anchor="t"/>
-          <a:lstStyle/>
-          <a:p>
-            <a:pPr indent="0" marL="0">
-              <a:buNone/>
-            </a:pPr>
-            <a:r>
-              <a:rPr lang="en-US" sz="1350" b="1" dirty="0">
-                <a:solidFill>
-                  <a:srgbClr val="F2C79B"/>
-                </a:solidFill>
-                <a:latin typeface="Calibri" pitchFamily="34" charset="0"/>
-                <a:ea typeface="Calibri" pitchFamily="34" charset="-122"/>
-                <a:cs typeface="Calibri" pitchFamily="34" charset="-120"/>
-              </a:rPr>
-              <a:t>Operational overhead</a:t>
-            </a:r>
-            <a:endParaRPr lang="en-US" sz="1350" dirty="0"/>
-          </a:p>
-        </p:txBody>
-      </p:sp>
-      <p:sp>
-        <p:nvSpPr>
-          <p:cNvPr id="5" name="Text 3"/>
-          <p:cNvSpPr/>
-          <p:nvPr/>
-        </p:nvSpPr>
-        <p:spPr>
-          <a:xfrm>
-            <a:off x="4846320" y="1444752"/>
-            <a:ext cx="6675120" cy="822960"/>
-          </a:xfrm>
-          <a:prstGeom prst="rect">
-            <a:avLst/>
-          </a:prstGeom>
-          <a:noFill/>
-          <a:ln/>
-        </p:spPr>
-        <p:txBody>
-          <a:bodyPr wrap="square" lIns="0" tIns="0" rIns="0" bIns="0" rtlCol="0" anchor="t"/>
-          <a:lstStyle/>
-          <a:p>
-            <a:pPr indent="0" marL="0">
-              <a:buNone/>
-            </a:pPr>
-            <a:r>
-              <a:rPr lang="en-US" sz="1150" dirty="0">
-                <a:solidFill>
-                  <a:srgbClr val="CADCFC"/>
-                </a:solidFill>
-                <a:latin typeface="Calibri" pitchFamily="34" charset="0"/>
-                <a:ea typeface="Calibri" pitchFamily="34" charset="-122"/>
-                <a:cs typeface="Calibri" pitchFamily="34" charset="-120"/>
-              </a:rPr>
-              <a:t>Requires running &amp; maintaining a Kubernetes cluster as critical infrastructure — not a trivial dependency to add.</a:t>
-            </a:r>
-            <a:endParaRPr lang="en-US" sz="1150" dirty="0"/>
-          </a:p>
-        </p:txBody>
+          <a:ln w="12700">
+            <a:solidFill>
+              <a:srgbClr val="DCE4EC"/>
+            </a:solidFill>
+            <a:prstDash val="solid"/>
+          </a:ln>
+          <a:effectLst>
+            <a:outerShdw sx="100000" sy="100000" kx="0" ky="0" algn="bl" rotWithShape="0" blurRad="63500" dist="25400" dir="5400000">
+              <a:srgbClr val="000000">
+                <a:alpha val="10000"/>
+              </a:srgbClr>
+            </a:outerShdw>
+          </a:effectLst>
+        </p:spPr>
+      </p:sp>
+      <p:sp>
+        <p:nvSpPr>
+          <p:cNvPr id="5" name="Shape 3"/>
+          <p:cNvSpPr/>
+          <p:nvPr/>
+        </p:nvSpPr>
+        <p:spPr>
+          <a:xfrm>
+            <a:off x="548640" y="1691640"/>
+            <a:ext cx="3520440" cy="502920"/>
+          </a:xfrm>
+          <a:prstGeom prst="roundRect">
+            <a:avLst>
+              <a:gd name="adj" fmla="val 18182"/>
+            </a:avLst>
+          </a:prstGeom>
+          <a:solidFill>
+            <a:srgbClr val="5B7FA6"/>
+          </a:solidFill>
+          <a:ln/>
+        </p:spPr>
       </p:sp>
       <p:sp>
         <p:nvSpPr>
@@ -9286,393 +9940,704 @@
         </p:nvSpPr>
         <p:spPr>
           <a:xfrm>
-            <a:off x="548640" y="2377440"/>
-            <a:ext cx="128016" cy="777240"/>
+            <a:off x="548640" y="1965960"/>
+            <a:ext cx="3520440" cy="228600"/>
+          </a:xfrm>
+          <a:prstGeom prst="rect">
+            <a:avLst/>
+          </a:prstGeom>
+          <a:solidFill>
+            <a:srgbClr val="5B7FA6"/>
+          </a:solidFill>
+          <a:ln/>
+        </p:spPr>
+      </p:sp>
+      <p:sp>
+        <p:nvSpPr>
+          <p:cNvPr id="7" name="Text 5"/>
+          <p:cNvSpPr/>
+          <p:nvPr/>
+        </p:nvSpPr>
+        <p:spPr>
+          <a:xfrm>
+            <a:off x="731520" y="1691640"/>
+            <a:ext cx="3154680" cy="502920"/>
+          </a:xfrm>
+          <a:prstGeom prst="rect">
+            <a:avLst/>
+          </a:prstGeom>
+          <a:noFill/>
+          <a:ln/>
+        </p:spPr>
+        <p:txBody>
+          <a:bodyPr wrap="square" lIns="0" tIns="0" rIns="0" bIns="0" rtlCol="0" anchor="ctr"/>
+          <a:lstStyle/>
+          <a:p>
+            <a:pPr indent="0" marL="0">
+              <a:buNone/>
+            </a:pPr>
+            <a:r>
+              <a:rPr lang="en-US" sz="1400" b="1" dirty="0">
+                <a:solidFill>
+                  <a:srgbClr val="FFFFFF"/>
+                </a:solidFill>
+                <a:latin typeface="Calibri" pitchFamily="34" charset="0"/>
+                <a:ea typeface="Calibri" pitchFamily="34" charset="-122"/>
+                <a:cs typeface="Calibri" pitchFamily="34" charset="-120"/>
+              </a:rPr>
+              <a:t>Day 0</a:t>
+            </a:r>
+            <a:endParaRPr lang="en-US" sz="1400" dirty="0"/>
+          </a:p>
+        </p:txBody>
+      </p:sp>
+      <p:sp>
+        <p:nvSpPr>
+          <p:cNvPr id="8" name="Text 6"/>
+          <p:cNvSpPr/>
+          <p:nvPr/>
+        </p:nvSpPr>
+        <p:spPr>
+          <a:xfrm>
+            <a:off x="731520" y="2377440"/>
+            <a:ext cx="3154680" cy="411480"/>
+          </a:xfrm>
+          <a:prstGeom prst="rect">
+            <a:avLst/>
+          </a:prstGeom>
+          <a:noFill/>
+          <a:ln/>
+        </p:spPr>
+        <p:txBody>
+          <a:bodyPr wrap="square" lIns="0" tIns="0" rIns="0" bIns="0" rtlCol="0" anchor="ctr"/>
+          <a:lstStyle/>
+          <a:p>
+            <a:pPr indent="0" marL="0">
+              <a:buNone/>
+            </a:pPr>
+            <a:r>
+              <a:rPr lang="en-US" sz="1500" b="1" dirty="0">
+                <a:solidFill>
+                  <a:srgbClr val="0B1E3D"/>
+                </a:solidFill>
+                <a:latin typeface="Calibri" pitchFamily="34" charset="0"/>
+                <a:ea typeface="Calibri" pitchFamily="34" charset="-122"/>
+                <a:cs typeface="Calibri" pitchFamily="34" charset="-120"/>
+              </a:rPr>
+              <a:t>Foundational infra</a:t>
+            </a:r>
+            <a:endParaRPr lang="en-US" sz="1500" dirty="0"/>
+          </a:p>
+        </p:txBody>
+      </p:sp>
+      <p:sp>
+        <p:nvSpPr>
+          <p:cNvPr id="9" name="Text 7"/>
+          <p:cNvSpPr/>
+          <p:nvPr/>
+        </p:nvSpPr>
+        <p:spPr>
+          <a:xfrm>
+            <a:off x="731520" y="2834640"/>
+            <a:ext cx="3154680" cy="1874520"/>
+          </a:xfrm>
+          <a:prstGeom prst="rect">
+            <a:avLst/>
+          </a:prstGeom>
+          <a:noFill/>
+          <a:ln/>
+        </p:spPr>
+        <p:txBody>
+          <a:bodyPr wrap="square" lIns="0" tIns="0" rIns="0" bIns="0" rtlCol="0" anchor="ctr"/>
+          <a:lstStyle/>
+          <a:p>
+            <a:pPr indent="0" marL="0">
+              <a:buNone/>
+            </a:pPr>
+            <a:r>
+              <a:rPr lang="en-US" sz="1100" dirty="0">
+                <a:solidFill>
+                  <a:srgbClr val="36454F"/>
+                </a:solidFill>
+                <a:latin typeface="Calibri" pitchFamily="34" charset="0"/>
+                <a:ea typeface="Calibri" pitchFamily="34" charset="-122"/>
+                <a:cs typeface="Calibri" pitchFamily="34" charset="-120"/>
+              </a:rPr>
+              <a:t>Terraform / Bicep provisions accounts, networks, IAM, and the Kubernetes clusters themselves.</a:t>
+            </a:r>
+            <a:endParaRPr lang="en-US" sz="1100" dirty="0"/>
+          </a:p>
+        </p:txBody>
+      </p:sp>
+      <p:sp>
+        <p:nvSpPr>
+          <p:cNvPr id="10" name="Text 8"/>
+          <p:cNvSpPr/>
+          <p:nvPr/>
+        </p:nvSpPr>
+        <p:spPr>
+          <a:xfrm>
+            <a:off x="4069080" y="3063240"/>
+            <a:ext cx="274320" cy="457200"/>
+          </a:xfrm>
+          <a:prstGeom prst="rect">
+            <a:avLst/>
+          </a:prstGeom>
+          <a:noFill/>
+          <a:ln/>
+        </p:spPr>
+        <p:txBody>
+          <a:bodyPr wrap="square" lIns="0" tIns="0" rIns="0" bIns="0" rtlCol="0" anchor="ctr"/>
+          <a:lstStyle/>
+          <a:p>
+            <a:pPr algn="ctr" indent="0" marL="0">
+              <a:buNone/>
+            </a:pPr>
+            <a:r>
+              <a:rPr lang="en-US" sz="2000" b="1" dirty="0">
+                <a:solidFill>
+                  <a:srgbClr val="1C7293"/>
+                </a:solidFill>
+                <a:latin typeface="Calibri" pitchFamily="34" charset="0"/>
+                <a:ea typeface="Calibri" pitchFamily="34" charset="-122"/>
+                <a:cs typeface="Calibri" pitchFamily="34" charset="-120"/>
+              </a:rPr>
+              <a:t>→</a:t>
+            </a:r>
+            <a:endParaRPr lang="en-US" sz="2000" dirty="0"/>
+          </a:p>
+        </p:txBody>
+      </p:sp>
+      <p:sp>
+        <p:nvSpPr>
+          <p:cNvPr id="11" name="Shape 9"/>
+          <p:cNvSpPr/>
+          <p:nvPr/>
+        </p:nvSpPr>
+        <p:spPr>
+          <a:xfrm>
+            <a:off x="4343400" y="1691640"/>
+            <a:ext cx="3520440" cy="3200400"/>
           </a:xfrm>
           <a:prstGeom prst="roundRect">
-            <a:avLst/>
+            <a:avLst>
+              <a:gd name="adj" fmla="val 2857"/>
+            </a:avLst>
           </a:prstGeom>
           <a:solidFill>
-            <a:srgbClr val="C97A3E"/>
+            <a:srgbClr val="FFFFFF"/>
           </a:solidFill>
-          <a:ln/>
-        </p:spPr>
-      </p:sp>
-      <p:sp>
-        <p:nvSpPr>
-          <p:cNvPr id="7" name="Text 5"/>
-          <p:cNvSpPr/>
-          <p:nvPr/>
-        </p:nvSpPr>
-        <p:spPr>
-          <a:xfrm>
-            <a:off x="822960" y="2359152"/>
-            <a:ext cx="3931920" cy="457200"/>
-          </a:xfrm>
-          <a:prstGeom prst="rect">
-            <a:avLst/>
-          </a:prstGeom>
-          <a:noFill/>
-          <a:ln/>
-        </p:spPr>
-        <p:txBody>
-          <a:bodyPr wrap="square" lIns="0" tIns="0" rIns="0" bIns="0" rtlCol="0" anchor="t"/>
-          <a:lstStyle/>
-          <a:p>
-            <a:pPr indent="0" marL="0">
-              <a:buNone/>
-            </a:pPr>
-            <a:r>
-              <a:rPr lang="en-US" sz="1350" b="1" dirty="0">
-                <a:solidFill>
-                  <a:srgbClr val="F2C79B"/>
-                </a:solidFill>
-                <a:latin typeface="Calibri" pitchFamily="34" charset="0"/>
-                <a:ea typeface="Calibri" pitchFamily="34" charset="-122"/>
-                <a:cs typeface="Calibri" pitchFamily="34" charset="-120"/>
-              </a:rPr>
-              <a:t>Ecosystem maturity gap</a:t>
-            </a:r>
-            <a:endParaRPr lang="en-US" sz="1350" dirty="0"/>
-          </a:p>
-        </p:txBody>
-      </p:sp>
-      <p:sp>
-        <p:nvSpPr>
-          <p:cNvPr id="8" name="Text 6"/>
-          <p:cNvSpPr/>
-          <p:nvPr/>
-        </p:nvSpPr>
-        <p:spPr>
-          <a:xfrm>
-            <a:off x="4846320" y="2359152"/>
-            <a:ext cx="6675120" cy="822960"/>
-          </a:xfrm>
-          <a:prstGeom prst="rect">
-            <a:avLst/>
-          </a:prstGeom>
-          <a:noFill/>
-          <a:ln/>
-        </p:spPr>
-        <p:txBody>
-          <a:bodyPr wrap="square" lIns="0" tIns="0" rIns="0" bIns="0" rtlCol="0" anchor="t"/>
-          <a:lstStyle/>
-          <a:p>
-            <a:pPr indent="0" marL="0">
-              <a:buNone/>
-            </a:pPr>
-            <a:r>
-              <a:rPr lang="en-US" sz="1150" dirty="0">
-                <a:solidFill>
-                  <a:srgbClr val="CADCFC"/>
-                </a:solidFill>
-                <a:latin typeface="Calibri" pitchFamily="34" charset="0"/>
-                <a:ea typeface="Calibri" pitchFamily="34" charset="-122"/>
-                <a:cs typeface="Calibri" pitchFamily="34" charset="-120"/>
-              </a:rPr>
-              <a:t>Fewer providers and less community content than Terraform's decade-long head start; some APIs lag behind cloud releases.</a:t>
-            </a:r>
-            <a:endParaRPr lang="en-US" sz="1150" dirty="0"/>
-          </a:p>
-        </p:txBody>
-      </p:sp>
-      <p:sp>
-        <p:nvSpPr>
-          <p:cNvPr id="9" name="Shape 7"/>
-          <p:cNvSpPr/>
-          <p:nvPr/>
-        </p:nvSpPr>
-        <p:spPr>
-          <a:xfrm>
-            <a:off x="548640" y="3291840"/>
-            <a:ext cx="128016" cy="777240"/>
+          <a:ln w="12700">
+            <a:solidFill>
+              <a:srgbClr val="DCE4EC"/>
+            </a:solidFill>
+            <a:prstDash val="solid"/>
+          </a:ln>
+          <a:effectLst>
+            <a:outerShdw sx="100000" sy="100000" kx="0" ky="0" algn="bl" rotWithShape="0" blurRad="63500" dist="25400" dir="5400000">
+              <a:srgbClr val="000000">
+                <a:alpha val="10000"/>
+              </a:srgbClr>
+            </a:outerShdw>
+          </a:effectLst>
+        </p:spPr>
+      </p:sp>
+      <p:sp>
+        <p:nvSpPr>
+          <p:cNvPr id="12" name="Shape 10"/>
+          <p:cNvSpPr/>
+          <p:nvPr/>
+        </p:nvSpPr>
+        <p:spPr>
+          <a:xfrm>
+            <a:off x="4343400" y="1691640"/>
+            <a:ext cx="3520440" cy="502920"/>
           </a:xfrm>
           <a:prstGeom prst="roundRect">
-            <a:avLst/>
+            <a:avLst>
+              <a:gd name="adj" fmla="val 18182"/>
+            </a:avLst>
           </a:prstGeom>
           <a:solidFill>
-            <a:srgbClr val="C97A3E"/>
+            <a:srgbClr val="1C7293"/>
           </a:solidFill>
           <a:ln/>
         </p:spPr>
       </p:sp>
       <p:sp>
         <p:nvSpPr>
-          <p:cNvPr id="10" name="Text 8"/>
-          <p:cNvSpPr/>
-          <p:nvPr/>
-        </p:nvSpPr>
-        <p:spPr>
-          <a:xfrm>
-            <a:off x="822960" y="3273552"/>
-            <a:ext cx="3931920" cy="457200"/>
-          </a:xfrm>
-          <a:prstGeom prst="rect">
-            <a:avLst/>
-          </a:prstGeom>
-          <a:noFill/>
-          <a:ln/>
-        </p:spPr>
-        <p:txBody>
-          <a:bodyPr wrap="square" lIns="0" tIns="0" rIns="0" bIns="0" rtlCol="0" anchor="t"/>
-          <a:lstStyle/>
-          <a:p>
-            <a:pPr indent="0" marL="0">
-              <a:buNone/>
-            </a:pPr>
-            <a:r>
-              <a:rPr lang="en-US" sz="1350" b="1" dirty="0">
-                <a:solidFill>
-                  <a:srgbClr val="F2C79B"/>
-                </a:solidFill>
-                <a:latin typeface="Calibri" pitchFamily="34" charset="0"/>
-                <a:ea typeface="Calibri" pitchFamily="34" charset="-122"/>
-                <a:cs typeface="Calibri" pitchFamily="34" charset="-120"/>
-              </a:rPr>
-              <a:t>Learning curve</a:t>
-            </a:r>
-            <a:endParaRPr lang="en-US" sz="1350" dirty="0"/>
-          </a:p>
-        </p:txBody>
-      </p:sp>
-      <p:sp>
-        <p:nvSpPr>
-          <p:cNvPr id="11" name="Text 9"/>
-          <p:cNvSpPr/>
-          <p:nvPr/>
-        </p:nvSpPr>
-        <p:spPr>
-          <a:xfrm>
-            <a:off x="4846320" y="3273552"/>
-            <a:ext cx="6675120" cy="822960"/>
-          </a:xfrm>
-          <a:prstGeom prst="rect">
-            <a:avLst/>
-          </a:prstGeom>
-          <a:noFill/>
-          <a:ln/>
-        </p:spPr>
-        <p:txBody>
-          <a:bodyPr wrap="square" lIns="0" tIns="0" rIns="0" bIns="0" rtlCol="0" anchor="t"/>
-          <a:lstStyle/>
-          <a:p>
-            <a:pPr indent="0" marL="0">
-              <a:buNone/>
-            </a:pPr>
-            <a:r>
-              <a:rPr lang="en-US" sz="1150" dirty="0">
-                <a:solidFill>
-                  <a:srgbClr val="CADCFC"/>
-                </a:solidFill>
-                <a:latin typeface="Calibri" pitchFamily="34" charset="0"/>
-                <a:ea typeface="Calibri" pitchFamily="34" charset="-122"/>
-                <a:cs typeface="Calibri" pitchFamily="34" charset="-120"/>
-              </a:rPr>
-              <a:t>Teams must think in Kubernetes reconciliation and CRDs, a mental model unfamiliar to traditional infra engineers.</a:t>
-            </a:r>
-            <a:endParaRPr lang="en-US" sz="1150" dirty="0"/>
-          </a:p>
-        </p:txBody>
-      </p:sp>
-      <p:sp>
-        <p:nvSpPr>
-          <p:cNvPr id="12" name="Shape 10"/>
-          <p:cNvSpPr/>
-          <p:nvPr/>
-        </p:nvSpPr>
-        <p:spPr>
-          <a:xfrm>
-            <a:off x="548640" y="4206240"/>
-            <a:ext cx="128016" cy="777240"/>
+          <p:cNvPr id="13" name="Shape 11"/>
+          <p:cNvSpPr/>
+          <p:nvPr/>
+        </p:nvSpPr>
+        <p:spPr>
+          <a:xfrm>
+            <a:off x="4343400" y="1965960"/>
+            <a:ext cx="3520440" cy="228600"/>
+          </a:xfrm>
+          <a:prstGeom prst="rect">
+            <a:avLst/>
+          </a:prstGeom>
+          <a:solidFill>
+            <a:srgbClr val="1C7293"/>
+          </a:solidFill>
+          <a:ln/>
+        </p:spPr>
+      </p:sp>
+      <p:sp>
+        <p:nvSpPr>
+          <p:cNvPr id="14" name="Text 12"/>
+          <p:cNvSpPr/>
+          <p:nvPr/>
+        </p:nvSpPr>
+        <p:spPr>
+          <a:xfrm>
+            <a:off x="4526280" y="1691640"/>
+            <a:ext cx="3154680" cy="502920"/>
+          </a:xfrm>
+          <a:prstGeom prst="rect">
+            <a:avLst/>
+          </a:prstGeom>
+          <a:noFill/>
+          <a:ln/>
+        </p:spPr>
+        <p:txBody>
+          <a:bodyPr wrap="square" lIns="0" tIns="0" rIns="0" bIns="0" rtlCol="0" anchor="ctr"/>
+          <a:lstStyle/>
+          <a:p>
+            <a:pPr indent="0" marL="0">
+              <a:buNone/>
+            </a:pPr>
+            <a:r>
+              <a:rPr lang="en-US" sz="1400" b="1" dirty="0">
+                <a:solidFill>
+                  <a:srgbClr val="FFFFFF"/>
+                </a:solidFill>
+                <a:latin typeface="Calibri" pitchFamily="34" charset="0"/>
+                <a:ea typeface="Calibri" pitchFamily="34" charset="-122"/>
+                <a:cs typeface="Calibri" pitchFamily="34" charset="-120"/>
+              </a:rPr>
+              <a:t>Day 1</a:t>
+            </a:r>
+            <a:endParaRPr lang="en-US" sz="1400" dirty="0"/>
+          </a:p>
+        </p:txBody>
+      </p:sp>
+      <p:sp>
+        <p:nvSpPr>
+          <p:cNvPr id="15" name="Text 13"/>
+          <p:cNvSpPr/>
+          <p:nvPr/>
+        </p:nvSpPr>
+        <p:spPr>
+          <a:xfrm>
+            <a:off x="4526280" y="2377440"/>
+            <a:ext cx="3154680" cy="411480"/>
+          </a:xfrm>
+          <a:prstGeom prst="rect">
+            <a:avLst/>
+          </a:prstGeom>
+          <a:noFill/>
+          <a:ln/>
+        </p:spPr>
+        <p:txBody>
+          <a:bodyPr wrap="square" lIns="0" tIns="0" rIns="0" bIns="0" rtlCol="0" anchor="ctr"/>
+          <a:lstStyle/>
+          <a:p>
+            <a:pPr indent="0" marL="0">
+              <a:buNone/>
+            </a:pPr>
+            <a:r>
+              <a:rPr lang="en-US" sz="1500" b="1" dirty="0">
+                <a:solidFill>
+                  <a:srgbClr val="0B1E3D"/>
+                </a:solidFill>
+                <a:latin typeface="Calibri" pitchFamily="34" charset="0"/>
+                <a:ea typeface="Calibri" pitchFamily="34" charset="-122"/>
+                <a:cs typeface="Calibri" pitchFamily="34" charset="-120"/>
+              </a:rPr>
+              <a:t>Platform layer</a:t>
+            </a:r>
+            <a:endParaRPr lang="en-US" sz="1500" dirty="0"/>
+          </a:p>
+        </p:txBody>
+      </p:sp>
+      <p:sp>
+        <p:nvSpPr>
+          <p:cNvPr id="16" name="Text 14"/>
+          <p:cNvSpPr/>
+          <p:nvPr/>
+        </p:nvSpPr>
+        <p:spPr>
+          <a:xfrm>
+            <a:off x="4526280" y="2834640"/>
+            <a:ext cx="3154680" cy="1874520"/>
+          </a:xfrm>
+          <a:prstGeom prst="rect">
+            <a:avLst/>
+          </a:prstGeom>
+          <a:noFill/>
+          <a:ln/>
+        </p:spPr>
+        <p:txBody>
+          <a:bodyPr wrap="square" lIns="0" tIns="0" rIns="0" bIns="0" rtlCol="0" anchor="ctr"/>
+          <a:lstStyle/>
+          <a:p>
+            <a:pPr indent="0" marL="0">
+              <a:buNone/>
+            </a:pPr>
+            <a:r>
+              <a:rPr lang="en-US" sz="1100" dirty="0">
+                <a:solidFill>
+                  <a:srgbClr val="36454F"/>
+                </a:solidFill>
+                <a:latin typeface="Calibri" pitchFamily="34" charset="0"/>
+                <a:ea typeface="Calibri" pitchFamily="34" charset="-122"/>
+                <a:cs typeface="Calibri" pitchFamily="34" charset="-120"/>
+              </a:rPr>
+              <a:t>Crossplane is installed onto those clusters; platform teams author Compositions exposing golden-path APIs.</a:t>
+            </a:r>
+            <a:endParaRPr lang="en-US" sz="1100" dirty="0"/>
+          </a:p>
+        </p:txBody>
+      </p:sp>
+      <p:sp>
+        <p:nvSpPr>
+          <p:cNvPr id="17" name="Text 15"/>
+          <p:cNvSpPr/>
+          <p:nvPr/>
+        </p:nvSpPr>
+        <p:spPr>
+          <a:xfrm>
+            <a:off x="7863840" y="3063240"/>
+            <a:ext cx="274320" cy="457200"/>
+          </a:xfrm>
+          <a:prstGeom prst="rect">
+            <a:avLst/>
+          </a:prstGeom>
+          <a:noFill/>
+          <a:ln/>
+        </p:spPr>
+        <p:txBody>
+          <a:bodyPr wrap="square" lIns="0" tIns="0" rIns="0" bIns="0" rtlCol="0" anchor="ctr"/>
+          <a:lstStyle/>
+          <a:p>
+            <a:pPr algn="ctr" indent="0" marL="0">
+              <a:buNone/>
+            </a:pPr>
+            <a:r>
+              <a:rPr lang="en-US" sz="2000" b="1" dirty="0">
+                <a:solidFill>
+                  <a:srgbClr val="1C7293"/>
+                </a:solidFill>
+                <a:latin typeface="Calibri" pitchFamily="34" charset="0"/>
+                <a:ea typeface="Calibri" pitchFamily="34" charset="-122"/>
+                <a:cs typeface="Calibri" pitchFamily="34" charset="-120"/>
+              </a:rPr>
+              <a:t>→</a:t>
+            </a:r>
+            <a:endParaRPr lang="en-US" sz="2000" dirty="0"/>
+          </a:p>
+        </p:txBody>
+      </p:sp>
+      <p:sp>
+        <p:nvSpPr>
+          <p:cNvPr id="18" name="Shape 16"/>
+          <p:cNvSpPr/>
+          <p:nvPr/>
+        </p:nvSpPr>
+        <p:spPr>
+          <a:xfrm>
+            <a:off x="8138160" y="1691640"/>
+            <a:ext cx="3520440" cy="3200400"/>
           </a:xfrm>
           <a:prstGeom prst="roundRect">
-            <a:avLst/>
+            <a:avLst>
+              <a:gd name="adj" fmla="val 2857"/>
+            </a:avLst>
           </a:prstGeom>
           <a:solidFill>
-            <a:srgbClr val="C97A3E"/>
+            <a:srgbClr val="FFFFFF"/>
           </a:solidFill>
-          <a:ln/>
-        </p:spPr>
-      </p:sp>
-      <p:sp>
-        <p:nvSpPr>
-          <p:cNvPr id="13" name="Text 11"/>
-          <p:cNvSpPr/>
-          <p:nvPr/>
-        </p:nvSpPr>
-        <p:spPr>
-          <a:xfrm>
-            <a:off x="822960" y="4187952"/>
-            <a:ext cx="3931920" cy="457200"/>
-          </a:xfrm>
-          <a:prstGeom prst="rect">
-            <a:avLst/>
-          </a:prstGeom>
-          <a:noFill/>
-          <a:ln/>
-        </p:spPr>
-        <p:txBody>
-          <a:bodyPr wrap="square" lIns="0" tIns="0" rIns="0" bIns="0" rtlCol="0" anchor="t"/>
-          <a:lstStyle/>
-          <a:p>
-            <a:pPr indent="0" marL="0">
-              <a:buNone/>
-            </a:pPr>
-            <a:r>
-              <a:rPr lang="en-US" sz="1350" b="1" dirty="0">
-                <a:solidFill>
-                  <a:srgbClr val="F2C79B"/>
-                </a:solidFill>
-                <a:latin typeface="Calibri" pitchFamily="34" charset="0"/>
-                <a:ea typeface="Calibri" pitchFamily="34" charset="-122"/>
-                <a:cs typeface="Calibri" pitchFamily="34" charset="-120"/>
-              </a:rPr>
-              <a:t>Composition complexity</a:t>
-            </a:r>
-            <a:endParaRPr lang="en-US" sz="1350" dirty="0"/>
-          </a:p>
-        </p:txBody>
-      </p:sp>
-      <p:sp>
-        <p:nvSpPr>
-          <p:cNvPr id="14" name="Text 12"/>
-          <p:cNvSpPr/>
-          <p:nvPr/>
-        </p:nvSpPr>
-        <p:spPr>
-          <a:xfrm>
-            <a:off x="4846320" y="4187952"/>
-            <a:ext cx="6675120" cy="822960"/>
-          </a:xfrm>
-          <a:prstGeom prst="rect">
-            <a:avLst/>
-          </a:prstGeom>
-          <a:noFill/>
-          <a:ln/>
-        </p:spPr>
-        <p:txBody>
-          <a:bodyPr wrap="square" lIns="0" tIns="0" rIns="0" bIns="0" rtlCol="0" anchor="t"/>
-          <a:lstStyle/>
-          <a:p>
-            <a:pPr indent="0" marL="0">
-              <a:buNone/>
-            </a:pPr>
-            <a:r>
-              <a:rPr lang="en-US" sz="1150" dirty="0">
-                <a:solidFill>
-                  <a:srgbClr val="CADCFC"/>
-                </a:solidFill>
-                <a:latin typeface="Calibri" pitchFamily="34" charset="0"/>
-                <a:ea typeface="Calibri" pitchFamily="34" charset="-122"/>
-                <a:cs typeface="Calibri" pitchFamily="34" charset="-120"/>
-              </a:rPr>
-              <a:t>Advanced Compositions (functions, patch-and-transform) can become as intricate as the Terraform modules they replace.</a:t>
-            </a:r>
-            <a:endParaRPr lang="en-US" sz="1150" dirty="0"/>
-          </a:p>
-        </p:txBody>
-      </p:sp>
-      <p:sp>
-        <p:nvSpPr>
-          <p:cNvPr id="15" name="Shape 13"/>
+          <a:ln w="12700">
+            <a:solidFill>
+              <a:srgbClr val="DCE4EC"/>
+            </a:solidFill>
+            <a:prstDash val="solid"/>
+          </a:ln>
+          <a:effectLst>
+            <a:outerShdw sx="100000" sy="100000" kx="0" ky="0" algn="bl" rotWithShape="0" blurRad="63500" dist="25400" dir="5400000">
+              <a:srgbClr val="000000">
+                <a:alpha val="10000"/>
+              </a:srgbClr>
+            </a:outerShdw>
+          </a:effectLst>
+        </p:spPr>
+      </p:sp>
+      <p:sp>
+        <p:nvSpPr>
+          <p:cNvPr id="19" name="Shape 17"/>
+          <p:cNvSpPr/>
+          <p:nvPr/>
+        </p:nvSpPr>
+        <p:spPr>
+          <a:xfrm>
+            <a:off x="8138160" y="1691640"/>
+            <a:ext cx="3520440" cy="502920"/>
+          </a:xfrm>
+          <a:prstGeom prst="roundRect">
+            <a:avLst>
+              <a:gd name="adj" fmla="val 18182"/>
+            </a:avLst>
+          </a:prstGeom>
+          <a:solidFill>
+            <a:srgbClr val="5FD0C0"/>
+          </a:solidFill>
+          <a:ln/>
+        </p:spPr>
+      </p:sp>
+      <p:sp>
+        <p:nvSpPr>
+          <p:cNvPr id="20" name="Shape 18"/>
+          <p:cNvSpPr/>
+          <p:nvPr/>
+        </p:nvSpPr>
+        <p:spPr>
+          <a:xfrm>
+            <a:off x="8138160" y="1965960"/>
+            <a:ext cx="3520440" cy="228600"/>
+          </a:xfrm>
+          <a:prstGeom prst="rect">
+            <a:avLst/>
+          </a:prstGeom>
+          <a:solidFill>
+            <a:srgbClr val="5FD0C0"/>
+          </a:solidFill>
+          <a:ln/>
+        </p:spPr>
+      </p:sp>
+      <p:sp>
+        <p:nvSpPr>
+          <p:cNvPr id="21" name="Text 19"/>
+          <p:cNvSpPr/>
+          <p:nvPr/>
+        </p:nvSpPr>
+        <p:spPr>
+          <a:xfrm>
+            <a:off x="8321040" y="1691640"/>
+            <a:ext cx="3154680" cy="502920"/>
+          </a:xfrm>
+          <a:prstGeom prst="rect">
+            <a:avLst/>
+          </a:prstGeom>
+          <a:noFill/>
+          <a:ln/>
+        </p:spPr>
+        <p:txBody>
+          <a:bodyPr wrap="square" lIns="0" tIns="0" rIns="0" bIns="0" rtlCol="0" anchor="ctr"/>
+          <a:lstStyle/>
+          <a:p>
+            <a:pPr indent="0" marL="0">
+              <a:buNone/>
+            </a:pPr>
+            <a:r>
+              <a:rPr lang="en-US" sz="1400" b="1" dirty="0">
+                <a:solidFill>
+                  <a:srgbClr val="FFFFFF"/>
+                </a:solidFill>
+                <a:latin typeface="Calibri" pitchFamily="34" charset="0"/>
+                <a:ea typeface="Calibri" pitchFamily="34" charset="-122"/>
+                <a:cs typeface="Calibri" pitchFamily="34" charset="-120"/>
+              </a:rPr>
+              <a:t>Day 2</a:t>
+            </a:r>
+            <a:endParaRPr lang="en-US" sz="1400" dirty="0"/>
+          </a:p>
+        </p:txBody>
+      </p:sp>
+      <p:sp>
+        <p:nvSpPr>
+          <p:cNvPr id="22" name="Text 20"/>
+          <p:cNvSpPr/>
+          <p:nvPr/>
+        </p:nvSpPr>
+        <p:spPr>
+          <a:xfrm>
+            <a:off x="8321040" y="2377440"/>
+            <a:ext cx="3154680" cy="411480"/>
+          </a:xfrm>
+          <a:prstGeom prst="rect">
+            <a:avLst/>
+          </a:prstGeom>
+          <a:noFill/>
+          <a:ln/>
+        </p:spPr>
+        <p:txBody>
+          <a:bodyPr wrap="square" lIns="0" tIns="0" rIns="0" bIns="0" rtlCol="0" anchor="ctr"/>
+          <a:lstStyle/>
+          <a:p>
+            <a:pPr indent="0" marL="0">
+              <a:buNone/>
+            </a:pPr>
+            <a:r>
+              <a:rPr lang="en-US" sz="1500" b="1" dirty="0">
+                <a:solidFill>
+                  <a:srgbClr val="0B1E3D"/>
+                </a:solidFill>
+                <a:latin typeface="Calibri" pitchFamily="34" charset="0"/>
+                <a:ea typeface="Calibri" pitchFamily="34" charset="-122"/>
+                <a:cs typeface="Calibri" pitchFamily="34" charset="-120"/>
+              </a:rPr>
+              <a:t>Developer self-service</a:t>
+            </a:r>
+            <a:endParaRPr lang="en-US" sz="1500" dirty="0"/>
+          </a:p>
+        </p:txBody>
+      </p:sp>
+      <p:sp>
+        <p:nvSpPr>
+          <p:cNvPr id="23" name="Text 21"/>
+          <p:cNvSpPr/>
+          <p:nvPr/>
+        </p:nvSpPr>
+        <p:spPr>
+          <a:xfrm>
+            <a:off x="8321040" y="2834640"/>
+            <a:ext cx="3154680" cy="1874520"/>
+          </a:xfrm>
+          <a:prstGeom prst="rect">
+            <a:avLst/>
+          </a:prstGeom>
+          <a:noFill/>
+          <a:ln/>
+        </p:spPr>
+        <p:txBody>
+          <a:bodyPr wrap="square" lIns="0" tIns="0" rIns="0" bIns="0" rtlCol="0" anchor="ctr"/>
+          <a:lstStyle/>
+          <a:p>
+            <a:pPr indent="0" marL="0">
+              <a:buNone/>
+            </a:pPr>
+            <a:r>
+              <a:rPr lang="en-US" sz="1100" dirty="0">
+                <a:solidFill>
+                  <a:srgbClr val="36454F"/>
+                </a:solidFill>
+                <a:latin typeface="Calibri" pitchFamily="34" charset="0"/>
+                <a:ea typeface="Calibri" pitchFamily="34" charset="-122"/>
+                <a:cs typeface="Calibri" pitchFamily="34" charset="-120"/>
+              </a:rPr>
+              <a:t>App teams submit namespaced XRs directly via GitOps; infra scales with the app lifecycle, drift self-heals.</a:t>
+            </a:r>
+            <a:endParaRPr lang="en-US" sz="1100" dirty="0"/>
+          </a:p>
+        </p:txBody>
+      </p:sp>
+      <p:sp>
+        <p:nvSpPr>
+          <p:cNvPr id="24" name="Shape 22"/>
           <p:cNvSpPr/>
           <p:nvPr/>
         </p:nvSpPr>
         <p:spPr>
           <a:xfrm>
             <a:off x="548640" y="5120640"/>
-            <a:ext cx="128016" cy="777240"/>
+            <a:ext cx="11064240" cy="777240"/>
           </a:xfrm>
           <a:prstGeom prst="roundRect">
-            <a:avLst/>
+            <a:avLst>
+              <a:gd name="adj" fmla="val 11765"/>
+            </a:avLst>
           </a:prstGeom>
           <a:solidFill>
-            <a:srgbClr val="C97A3E"/>
+            <a:srgbClr val="EAF1F8"/>
           </a:solidFill>
           <a:ln/>
         </p:spPr>
       </p:sp>
       <p:sp>
         <p:nvSpPr>
-          <p:cNvPr id="16" name="Text 14"/>
-          <p:cNvSpPr/>
-          <p:nvPr/>
-        </p:nvSpPr>
-        <p:spPr>
-          <a:xfrm>
-            <a:off x="822960" y="5102352"/>
-            <a:ext cx="3931920" cy="457200"/>
-          </a:xfrm>
-          <a:prstGeom prst="rect">
-            <a:avLst/>
-          </a:prstGeom>
-          <a:noFill/>
-          <a:ln/>
-        </p:spPr>
-        <p:txBody>
-          <a:bodyPr wrap="square" lIns="0" tIns="0" rIns="0" bIns="0" rtlCol="0" anchor="t"/>
-          <a:lstStyle/>
-          <a:p>
-            <a:pPr indent="0" marL="0">
-              <a:buNone/>
-            </a:pPr>
-            <a:r>
-              <a:rPr lang="en-US" sz="1350" b="1" dirty="0">
-                <a:solidFill>
-                  <a:srgbClr val="F2C79B"/>
-                </a:solidFill>
-                <a:latin typeface="Calibri" pitchFamily="34" charset="0"/>
-                <a:ea typeface="Calibri" pitchFamily="34" charset="-122"/>
-                <a:cs typeface="Calibri" pitchFamily="34" charset="-120"/>
-              </a:rPr>
-              <a:t>Tooling &amp; debugging</a:t>
-            </a:r>
-            <a:endParaRPr lang="en-US" sz="1350" dirty="0"/>
-          </a:p>
-        </p:txBody>
-      </p:sp>
-      <p:sp>
-        <p:nvSpPr>
-          <p:cNvPr id="17" name="Text 15"/>
-          <p:cNvSpPr/>
-          <p:nvPr/>
-        </p:nvSpPr>
-        <p:spPr>
-          <a:xfrm>
-            <a:off x="4846320" y="5102352"/>
-            <a:ext cx="6675120" cy="822960"/>
-          </a:xfrm>
-          <a:prstGeom prst="rect">
-            <a:avLst/>
-          </a:prstGeom>
-          <a:noFill/>
-          <a:ln/>
-        </p:spPr>
-        <p:txBody>
-          <a:bodyPr wrap="square" lIns="0" tIns="0" rIns="0" bIns="0" rtlCol="0" anchor="t"/>
-          <a:lstStyle/>
-          <a:p>
-            <a:pPr indent="0" marL="0">
-              <a:buNone/>
-            </a:pPr>
-            <a:r>
-              <a:rPr lang="en-US" sz="1150" dirty="0">
-                <a:solidFill>
-                  <a:srgbClr val="CADCFC"/>
-                </a:solidFill>
-                <a:latin typeface="Calibri" pitchFamily="34" charset="0"/>
-                <a:ea typeface="Calibri" pitchFamily="34" charset="-122"/>
-                <a:cs typeface="Calibri" pitchFamily="34" charset="-120"/>
-              </a:rPr>
-              <a:t>Troubleshooting spans kubectl, controller logs, and cloud consoles — less mature UX than `terraform plan` diffs.</a:t>
-            </a:r>
-            <a:endParaRPr lang="en-US" sz="1150" dirty="0"/>
-          </a:p>
-        </p:txBody>
-      </p:sp>
-      <p:sp>
-        <p:nvSpPr>
-          <p:cNvPr id="18" name="Text 16"/>
+          <p:cNvPr id="25" name="Text 23"/>
+          <p:cNvSpPr/>
+          <p:nvPr/>
+        </p:nvSpPr>
+        <p:spPr>
+          <a:xfrm>
+            <a:off x="822960" y="5120640"/>
+            <a:ext cx="1371600" cy="777240"/>
+          </a:xfrm>
+          <a:prstGeom prst="rect">
+            <a:avLst/>
+          </a:prstGeom>
+          <a:noFill/>
+          <a:ln/>
+        </p:spPr>
+        <p:txBody>
+          <a:bodyPr wrap="square" lIns="0" tIns="0" rIns="0" bIns="0" rtlCol="0" anchor="ctr"/>
+          <a:lstStyle/>
+          <a:p>
+            <a:pPr indent="0" marL="0">
+              <a:buNone/>
+            </a:pPr>
+            <a:r>
+              <a:rPr lang="en-US" sz="1250" b="1" dirty="0">
+                <a:solidFill>
+                  <a:srgbClr val="0B1E3D"/>
+                </a:solidFill>
+                <a:latin typeface="Calibri" pitchFamily="34" charset="0"/>
+                <a:ea typeface="Calibri" pitchFamily="34" charset="-122"/>
+                <a:cs typeface="Calibri" pitchFamily="34" charset="-120"/>
+              </a:rPr>
+              <a:t>Key insight:</a:t>
+            </a:r>
+            <a:endParaRPr lang="en-US" sz="1250" dirty="0"/>
+          </a:p>
+        </p:txBody>
+      </p:sp>
+      <p:sp>
+        <p:nvSpPr>
+          <p:cNvPr id="26" name="Text 24"/>
+          <p:cNvSpPr/>
+          <p:nvPr/>
+        </p:nvSpPr>
+        <p:spPr>
+          <a:xfrm>
+            <a:off x="2148840" y="5120640"/>
+            <a:ext cx="9189720" cy="777240"/>
+          </a:xfrm>
+          <a:prstGeom prst="rect">
+            <a:avLst/>
+          </a:prstGeom>
+          <a:noFill/>
+          <a:ln/>
+        </p:spPr>
+        <p:txBody>
+          <a:bodyPr wrap="square" lIns="0" tIns="0" rIns="0" bIns="0" rtlCol="0" anchor="ctr">
+            <a:normAutofit/>
+          </a:bodyPr>
+          <a:lstStyle/>
+          <a:p>
+            <a:pPr indent="0" marL="0">
+              <a:buNone/>
+            </a:pPr>
+            <a:r>
+              <a:rPr lang="en-US" sz="1250" dirty="0">
+                <a:solidFill>
+                  <a:srgbClr val="36454F"/>
+                </a:solidFill>
+                <a:latin typeface="Calibri" pitchFamily="34" charset="0"/>
+                <a:ea typeface="Calibri" pitchFamily="34" charset="-122"/>
+                <a:cs typeface="Calibri" pitchFamily="34" charset="-120"/>
+              </a:rPr>
+              <a:t>Crossplane doesn't replace Terraform or Bicep at Day 0 — it typically sits on top, turning what they provisioned into self-service platform APIs.</a:t>
+            </a:r>
+            <a:endParaRPr lang="en-US" sz="1250" dirty="0"/>
+          </a:p>
+        </p:txBody>
+      </p:sp>
+      <p:sp>
+        <p:nvSpPr>
+          <p:cNvPr id="27" name="Text 25"/>
           <p:cNvSpPr/>
           <p:nvPr/>
         </p:nvSpPr>
@@ -9697,7 +10662,7 @@
             <a:r>
               <a:rPr lang="en-US" sz="900" dirty="0">
                 <a:solidFill>
-                  <a:srgbClr val="6E86A8"/>
+                  <a:srgbClr val="9AA7B5"/>
                 </a:solidFill>
                 <a:latin typeface="Calibri" pitchFamily="34" charset="0"/>
                 <a:ea typeface="Calibri" pitchFamily="34" charset="-122"/>
@@ -9711,7 +10676,7 @@
       </p:sp>
       <p:sp>
         <p:nvSpPr>
-          <p:cNvPr id="19" name="Text 17"/>
+          <p:cNvPr id="28" name="Text 26"/>
           <p:cNvSpPr/>
           <p:nvPr/>
         </p:nvSpPr>
@@ -9736,7 +10701,7 @@
             <a:r>
               <a:rPr lang="en-US" sz="900" dirty="0">
                 <a:solidFill>
-                  <a:srgbClr val="6E86A8"/>
+                  <a:srgbClr val="9AA7B5"/>
                 </a:solidFill>
                 <a:latin typeface="Calibri" pitchFamily="34" charset="0"/>
                 <a:ea typeface="Calibri" pitchFamily="34" charset="-122"/>
@@ -9782,6 +10747,645 @@
       </p:grpSpPr>
       <p:sp>
         <p:nvSpPr>
+          <p:cNvPr id="2" name="Text 0"/>
+          <p:cNvSpPr/>
+          <p:nvPr/>
+        </p:nvSpPr>
+        <p:spPr>
+          <a:xfrm>
+            <a:off x="548640" y="411480"/>
+            <a:ext cx="8229600" cy="640080"/>
+          </a:xfrm>
+          <a:prstGeom prst="rect">
+            <a:avLst/>
+          </a:prstGeom>
+          <a:noFill/>
+          <a:ln/>
+        </p:spPr>
+        <p:txBody>
+          <a:bodyPr wrap="square" lIns="0" tIns="0" rIns="0" bIns="0" rtlCol="0" anchor="ctr"/>
+          <a:lstStyle/>
+          <a:p>
+            <a:pPr indent="0" marL="0">
+              <a:buNone/>
+            </a:pPr>
+            <a:r>
+              <a:rPr lang="en-US" sz="3200" b="1" dirty="0">
+                <a:solidFill>
+                  <a:srgbClr val="FFFFFF"/>
+                </a:solidFill>
+                <a:latin typeface="Cambria" pitchFamily="34" charset="0"/>
+                <a:ea typeface="Cambria" pitchFamily="34" charset="-122"/>
+                <a:cs typeface="Cambria" pitchFamily="34" charset="-120"/>
+              </a:rPr>
+              <a:t>Risks &amp; Considerations</a:t>
+            </a:r>
+            <a:endParaRPr lang="en-US" sz="3200" dirty="0"/>
+          </a:p>
+        </p:txBody>
+      </p:sp>
+      <p:sp>
+        <p:nvSpPr>
+          <p:cNvPr id="3" name="Shape 1"/>
+          <p:cNvSpPr/>
+          <p:nvPr/>
+        </p:nvSpPr>
+        <p:spPr>
+          <a:xfrm>
+            <a:off x="548640" y="1463040"/>
+            <a:ext cx="128016" cy="777240"/>
+          </a:xfrm>
+          <a:prstGeom prst="roundRect">
+            <a:avLst/>
+          </a:prstGeom>
+          <a:solidFill>
+            <a:srgbClr val="C97A3E"/>
+          </a:solidFill>
+          <a:ln/>
+        </p:spPr>
+      </p:sp>
+      <p:sp>
+        <p:nvSpPr>
+          <p:cNvPr id="4" name="Text 2"/>
+          <p:cNvSpPr/>
+          <p:nvPr/>
+        </p:nvSpPr>
+        <p:spPr>
+          <a:xfrm>
+            <a:off x="822960" y="1444752"/>
+            <a:ext cx="3931920" cy="457200"/>
+          </a:xfrm>
+          <a:prstGeom prst="rect">
+            <a:avLst/>
+          </a:prstGeom>
+          <a:noFill/>
+          <a:ln/>
+        </p:spPr>
+        <p:txBody>
+          <a:bodyPr wrap="square" lIns="0" tIns="0" rIns="0" bIns="0" rtlCol="0" anchor="t"/>
+          <a:lstStyle/>
+          <a:p>
+            <a:pPr indent="0" marL="0">
+              <a:buNone/>
+            </a:pPr>
+            <a:r>
+              <a:rPr lang="en-US" sz="1350" b="1" dirty="0">
+                <a:solidFill>
+                  <a:srgbClr val="F2C79B"/>
+                </a:solidFill>
+                <a:latin typeface="Calibri" pitchFamily="34" charset="0"/>
+                <a:ea typeface="Calibri" pitchFamily="34" charset="-122"/>
+                <a:cs typeface="Calibri" pitchFamily="34" charset="-120"/>
+              </a:rPr>
+              <a:t>Operational overhead</a:t>
+            </a:r>
+            <a:endParaRPr lang="en-US" sz="1350" dirty="0"/>
+          </a:p>
+        </p:txBody>
+      </p:sp>
+      <p:sp>
+        <p:nvSpPr>
+          <p:cNvPr id="5" name="Text 3"/>
+          <p:cNvSpPr/>
+          <p:nvPr/>
+        </p:nvSpPr>
+        <p:spPr>
+          <a:xfrm>
+            <a:off x="4846320" y="1444752"/>
+            <a:ext cx="6675120" cy="822960"/>
+          </a:xfrm>
+          <a:prstGeom prst="rect">
+            <a:avLst/>
+          </a:prstGeom>
+          <a:noFill/>
+          <a:ln/>
+        </p:spPr>
+        <p:txBody>
+          <a:bodyPr wrap="square" lIns="0" tIns="0" rIns="0" bIns="0" rtlCol="0" anchor="t"/>
+          <a:lstStyle/>
+          <a:p>
+            <a:pPr indent="0" marL="0">
+              <a:buNone/>
+            </a:pPr>
+            <a:r>
+              <a:rPr lang="en-US" sz="1150" dirty="0">
+                <a:solidFill>
+                  <a:srgbClr val="CADCFC"/>
+                </a:solidFill>
+                <a:latin typeface="Calibri" pitchFamily="34" charset="0"/>
+                <a:ea typeface="Calibri" pitchFamily="34" charset="-122"/>
+                <a:cs typeface="Calibri" pitchFamily="34" charset="-120"/>
+              </a:rPr>
+              <a:t>Requires running &amp; maintaining a Kubernetes cluster as critical infrastructure — not a trivial dependency to add.</a:t>
+            </a:r>
+            <a:endParaRPr lang="en-US" sz="1150" dirty="0"/>
+          </a:p>
+        </p:txBody>
+      </p:sp>
+      <p:sp>
+        <p:nvSpPr>
+          <p:cNvPr id="6" name="Shape 4"/>
+          <p:cNvSpPr/>
+          <p:nvPr/>
+        </p:nvSpPr>
+        <p:spPr>
+          <a:xfrm>
+            <a:off x="548640" y="2377440"/>
+            <a:ext cx="128016" cy="777240"/>
+          </a:xfrm>
+          <a:prstGeom prst="roundRect">
+            <a:avLst/>
+          </a:prstGeom>
+          <a:solidFill>
+            <a:srgbClr val="C97A3E"/>
+          </a:solidFill>
+          <a:ln/>
+        </p:spPr>
+      </p:sp>
+      <p:sp>
+        <p:nvSpPr>
+          <p:cNvPr id="7" name="Text 5"/>
+          <p:cNvSpPr/>
+          <p:nvPr/>
+        </p:nvSpPr>
+        <p:spPr>
+          <a:xfrm>
+            <a:off x="822960" y="2359152"/>
+            <a:ext cx="3931920" cy="457200"/>
+          </a:xfrm>
+          <a:prstGeom prst="rect">
+            <a:avLst/>
+          </a:prstGeom>
+          <a:noFill/>
+          <a:ln/>
+        </p:spPr>
+        <p:txBody>
+          <a:bodyPr wrap="square" lIns="0" tIns="0" rIns="0" bIns="0" rtlCol="0" anchor="t"/>
+          <a:lstStyle/>
+          <a:p>
+            <a:pPr indent="0" marL="0">
+              <a:buNone/>
+            </a:pPr>
+            <a:r>
+              <a:rPr lang="en-US" sz="1350" b="1" dirty="0">
+                <a:solidFill>
+                  <a:srgbClr val="F2C79B"/>
+                </a:solidFill>
+                <a:latin typeface="Calibri" pitchFamily="34" charset="0"/>
+                <a:ea typeface="Calibri" pitchFamily="34" charset="-122"/>
+                <a:cs typeface="Calibri" pitchFamily="34" charset="-120"/>
+              </a:rPr>
+              <a:t>Ecosystem maturity gap</a:t>
+            </a:r>
+            <a:endParaRPr lang="en-US" sz="1350" dirty="0"/>
+          </a:p>
+        </p:txBody>
+      </p:sp>
+      <p:sp>
+        <p:nvSpPr>
+          <p:cNvPr id="8" name="Text 6"/>
+          <p:cNvSpPr/>
+          <p:nvPr/>
+        </p:nvSpPr>
+        <p:spPr>
+          <a:xfrm>
+            <a:off x="4846320" y="2359152"/>
+            <a:ext cx="6675120" cy="822960"/>
+          </a:xfrm>
+          <a:prstGeom prst="rect">
+            <a:avLst/>
+          </a:prstGeom>
+          <a:noFill/>
+          <a:ln/>
+        </p:spPr>
+        <p:txBody>
+          <a:bodyPr wrap="square" lIns="0" tIns="0" rIns="0" bIns="0" rtlCol="0" anchor="t"/>
+          <a:lstStyle/>
+          <a:p>
+            <a:pPr indent="0" marL="0">
+              <a:buNone/>
+            </a:pPr>
+            <a:r>
+              <a:rPr lang="en-US" sz="1150" dirty="0">
+                <a:solidFill>
+                  <a:srgbClr val="CADCFC"/>
+                </a:solidFill>
+                <a:latin typeface="Calibri" pitchFamily="34" charset="0"/>
+                <a:ea typeface="Calibri" pitchFamily="34" charset="-122"/>
+                <a:cs typeface="Calibri" pitchFamily="34" charset="-120"/>
+              </a:rPr>
+              <a:t>Fewer providers and less community content than Terraform's decade-long head start; some APIs lag behind cloud releases.</a:t>
+            </a:r>
+            <a:endParaRPr lang="en-US" sz="1150" dirty="0"/>
+          </a:p>
+        </p:txBody>
+      </p:sp>
+      <p:sp>
+        <p:nvSpPr>
+          <p:cNvPr id="9" name="Shape 7"/>
+          <p:cNvSpPr/>
+          <p:nvPr/>
+        </p:nvSpPr>
+        <p:spPr>
+          <a:xfrm>
+            <a:off x="548640" y="3291840"/>
+            <a:ext cx="128016" cy="777240"/>
+          </a:xfrm>
+          <a:prstGeom prst="roundRect">
+            <a:avLst/>
+          </a:prstGeom>
+          <a:solidFill>
+            <a:srgbClr val="C97A3E"/>
+          </a:solidFill>
+          <a:ln/>
+        </p:spPr>
+      </p:sp>
+      <p:sp>
+        <p:nvSpPr>
+          <p:cNvPr id="10" name="Text 8"/>
+          <p:cNvSpPr/>
+          <p:nvPr/>
+        </p:nvSpPr>
+        <p:spPr>
+          <a:xfrm>
+            <a:off x="822960" y="3273552"/>
+            <a:ext cx="3931920" cy="457200"/>
+          </a:xfrm>
+          <a:prstGeom prst="rect">
+            <a:avLst/>
+          </a:prstGeom>
+          <a:noFill/>
+          <a:ln/>
+        </p:spPr>
+        <p:txBody>
+          <a:bodyPr wrap="square" lIns="0" tIns="0" rIns="0" bIns="0" rtlCol="0" anchor="t"/>
+          <a:lstStyle/>
+          <a:p>
+            <a:pPr indent="0" marL="0">
+              <a:buNone/>
+            </a:pPr>
+            <a:r>
+              <a:rPr lang="en-US" sz="1350" b="1" dirty="0">
+                <a:solidFill>
+                  <a:srgbClr val="F2C79B"/>
+                </a:solidFill>
+                <a:latin typeface="Calibri" pitchFamily="34" charset="0"/>
+                <a:ea typeface="Calibri" pitchFamily="34" charset="-122"/>
+                <a:cs typeface="Calibri" pitchFamily="34" charset="-120"/>
+              </a:rPr>
+              <a:t>Learning curve</a:t>
+            </a:r>
+            <a:endParaRPr lang="en-US" sz="1350" dirty="0"/>
+          </a:p>
+        </p:txBody>
+      </p:sp>
+      <p:sp>
+        <p:nvSpPr>
+          <p:cNvPr id="11" name="Text 9"/>
+          <p:cNvSpPr/>
+          <p:nvPr/>
+        </p:nvSpPr>
+        <p:spPr>
+          <a:xfrm>
+            <a:off x="4846320" y="3273552"/>
+            <a:ext cx="6675120" cy="822960"/>
+          </a:xfrm>
+          <a:prstGeom prst="rect">
+            <a:avLst/>
+          </a:prstGeom>
+          <a:noFill/>
+          <a:ln/>
+        </p:spPr>
+        <p:txBody>
+          <a:bodyPr wrap="square" lIns="0" tIns="0" rIns="0" bIns="0" rtlCol="0" anchor="t"/>
+          <a:lstStyle/>
+          <a:p>
+            <a:pPr indent="0" marL="0">
+              <a:buNone/>
+            </a:pPr>
+            <a:r>
+              <a:rPr lang="en-US" sz="1150" dirty="0">
+                <a:solidFill>
+                  <a:srgbClr val="CADCFC"/>
+                </a:solidFill>
+                <a:latin typeface="Calibri" pitchFamily="34" charset="0"/>
+                <a:ea typeface="Calibri" pitchFamily="34" charset="-122"/>
+                <a:cs typeface="Calibri" pitchFamily="34" charset="-120"/>
+              </a:rPr>
+              <a:t>Teams must think in Kubernetes reconciliation and CRDs, a mental model unfamiliar to traditional infra engineers.</a:t>
+            </a:r>
+            <a:endParaRPr lang="en-US" sz="1150" dirty="0"/>
+          </a:p>
+        </p:txBody>
+      </p:sp>
+      <p:sp>
+        <p:nvSpPr>
+          <p:cNvPr id="12" name="Shape 10"/>
+          <p:cNvSpPr/>
+          <p:nvPr/>
+        </p:nvSpPr>
+        <p:spPr>
+          <a:xfrm>
+            <a:off x="548640" y="4206240"/>
+            <a:ext cx="128016" cy="777240"/>
+          </a:xfrm>
+          <a:prstGeom prst="roundRect">
+            <a:avLst/>
+          </a:prstGeom>
+          <a:solidFill>
+            <a:srgbClr val="C97A3E"/>
+          </a:solidFill>
+          <a:ln/>
+        </p:spPr>
+      </p:sp>
+      <p:sp>
+        <p:nvSpPr>
+          <p:cNvPr id="13" name="Text 11"/>
+          <p:cNvSpPr/>
+          <p:nvPr/>
+        </p:nvSpPr>
+        <p:spPr>
+          <a:xfrm>
+            <a:off x="822960" y="4187952"/>
+            <a:ext cx="3931920" cy="457200"/>
+          </a:xfrm>
+          <a:prstGeom prst="rect">
+            <a:avLst/>
+          </a:prstGeom>
+          <a:noFill/>
+          <a:ln/>
+        </p:spPr>
+        <p:txBody>
+          <a:bodyPr wrap="square" lIns="0" tIns="0" rIns="0" bIns="0" rtlCol="0" anchor="t"/>
+          <a:lstStyle/>
+          <a:p>
+            <a:pPr indent="0" marL="0">
+              <a:buNone/>
+            </a:pPr>
+            <a:r>
+              <a:rPr lang="en-US" sz="1350" b="1" dirty="0">
+                <a:solidFill>
+                  <a:srgbClr val="F2C79B"/>
+                </a:solidFill>
+                <a:latin typeface="Calibri" pitchFamily="34" charset="0"/>
+                <a:ea typeface="Calibri" pitchFamily="34" charset="-122"/>
+                <a:cs typeface="Calibri" pitchFamily="34" charset="-120"/>
+              </a:rPr>
+              <a:t>Composition complexity</a:t>
+            </a:r>
+            <a:endParaRPr lang="en-US" sz="1350" dirty="0"/>
+          </a:p>
+        </p:txBody>
+      </p:sp>
+      <p:sp>
+        <p:nvSpPr>
+          <p:cNvPr id="14" name="Text 12"/>
+          <p:cNvSpPr/>
+          <p:nvPr/>
+        </p:nvSpPr>
+        <p:spPr>
+          <a:xfrm>
+            <a:off x="4846320" y="4187952"/>
+            <a:ext cx="6675120" cy="822960"/>
+          </a:xfrm>
+          <a:prstGeom prst="rect">
+            <a:avLst/>
+          </a:prstGeom>
+          <a:noFill/>
+          <a:ln/>
+        </p:spPr>
+        <p:txBody>
+          <a:bodyPr wrap="square" lIns="0" tIns="0" rIns="0" bIns="0" rtlCol="0" anchor="t"/>
+          <a:lstStyle/>
+          <a:p>
+            <a:pPr indent="0" marL="0">
+              <a:buNone/>
+            </a:pPr>
+            <a:r>
+              <a:rPr lang="en-US" sz="1150" dirty="0">
+                <a:solidFill>
+                  <a:srgbClr val="CADCFC"/>
+                </a:solidFill>
+                <a:latin typeface="Calibri" pitchFamily="34" charset="0"/>
+                <a:ea typeface="Calibri" pitchFamily="34" charset="-122"/>
+                <a:cs typeface="Calibri" pitchFamily="34" charset="-120"/>
+              </a:rPr>
+              <a:t>Advanced Compositions (functions, patch-and-transform) can become as intricate as the Terraform modules they replace.</a:t>
+            </a:r>
+            <a:endParaRPr lang="en-US" sz="1150" dirty="0"/>
+          </a:p>
+        </p:txBody>
+      </p:sp>
+      <p:sp>
+        <p:nvSpPr>
+          <p:cNvPr id="15" name="Shape 13"/>
+          <p:cNvSpPr/>
+          <p:nvPr/>
+        </p:nvSpPr>
+        <p:spPr>
+          <a:xfrm>
+            <a:off x="548640" y="5120640"/>
+            <a:ext cx="128016" cy="777240"/>
+          </a:xfrm>
+          <a:prstGeom prst="roundRect">
+            <a:avLst/>
+          </a:prstGeom>
+          <a:solidFill>
+            <a:srgbClr val="C97A3E"/>
+          </a:solidFill>
+          <a:ln/>
+        </p:spPr>
+      </p:sp>
+      <p:sp>
+        <p:nvSpPr>
+          <p:cNvPr id="16" name="Text 14"/>
+          <p:cNvSpPr/>
+          <p:nvPr/>
+        </p:nvSpPr>
+        <p:spPr>
+          <a:xfrm>
+            <a:off x="822960" y="5102352"/>
+            <a:ext cx="3931920" cy="457200"/>
+          </a:xfrm>
+          <a:prstGeom prst="rect">
+            <a:avLst/>
+          </a:prstGeom>
+          <a:noFill/>
+          <a:ln/>
+        </p:spPr>
+        <p:txBody>
+          <a:bodyPr wrap="square" lIns="0" tIns="0" rIns="0" bIns="0" rtlCol="0" anchor="t"/>
+          <a:lstStyle/>
+          <a:p>
+            <a:pPr indent="0" marL="0">
+              <a:buNone/>
+            </a:pPr>
+            <a:r>
+              <a:rPr lang="en-US" sz="1350" b="1" dirty="0">
+                <a:solidFill>
+                  <a:srgbClr val="F2C79B"/>
+                </a:solidFill>
+                <a:latin typeface="Calibri" pitchFamily="34" charset="0"/>
+                <a:ea typeface="Calibri" pitchFamily="34" charset="-122"/>
+                <a:cs typeface="Calibri" pitchFamily="34" charset="-120"/>
+              </a:rPr>
+              <a:t>Tooling &amp; debugging</a:t>
+            </a:r>
+            <a:endParaRPr lang="en-US" sz="1350" dirty="0"/>
+          </a:p>
+        </p:txBody>
+      </p:sp>
+      <p:sp>
+        <p:nvSpPr>
+          <p:cNvPr id="17" name="Text 15"/>
+          <p:cNvSpPr/>
+          <p:nvPr/>
+        </p:nvSpPr>
+        <p:spPr>
+          <a:xfrm>
+            <a:off x="4846320" y="5102352"/>
+            <a:ext cx="6675120" cy="822960"/>
+          </a:xfrm>
+          <a:prstGeom prst="rect">
+            <a:avLst/>
+          </a:prstGeom>
+          <a:noFill/>
+          <a:ln/>
+        </p:spPr>
+        <p:txBody>
+          <a:bodyPr wrap="square" lIns="0" tIns="0" rIns="0" bIns="0" rtlCol="0" anchor="t"/>
+          <a:lstStyle/>
+          <a:p>
+            <a:pPr indent="0" marL="0">
+              <a:buNone/>
+            </a:pPr>
+            <a:r>
+              <a:rPr lang="en-US" sz="1150" dirty="0">
+                <a:solidFill>
+                  <a:srgbClr val="CADCFC"/>
+                </a:solidFill>
+                <a:latin typeface="Calibri" pitchFamily="34" charset="0"/>
+                <a:ea typeface="Calibri" pitchFamily="34" charset="-122"/>
+                <a:cs typeface="Calibri" pitchFamily="34" charset="-120"/>
+              </a:rPr>
+              <a:t>Troubleshooting spans kubectl, controller logs, and cloud consoles — less mature UX than `terraform plan` diffs.</a:t>
+            </a:r>
+            <a:endParaRPr lang="en-US" sz="1150" dirty="0"/>
+          </a:p>
+        </p:txBody>
+      </p:sp>
+      <p:sp>
+        <p:nvSpPr>
+          <p:cNvPr id="18" name="Text 16"/>
+          <p:cNvSpPr/>
+          <p:nvPr/>
+        </p:nvSpPr>
+        <p:spPr>
+          <a:xfrm>
+            <a:off x="457200" y="6446520"/>
+            <a:ext cx="6400800" cy="274320"/>
+          </a:xfrm>
+          <a:prstGeom prst="rect">
+            <a:avLst/>
+          </a:prstGeom>
+          <a:noFill/>
+          <a:ln/>
+        </p:spPr>
+        <p:txBody>
+          <a:bodyPr wrap="square" rtlCol="0" anchor="ctr"/>
+          <a:lstStyle/>
+          <a:p>
+            <a:pPr algn="l" indent="0" marL="0">
+              <a:buNone/>
+            </a:pPr>
+            <a:r>
+              <a:rPr lang="en-US" sz="900" dirty="0">
+                <a:solidFill>
+                  <a:srgbClr val="6E86A8"/>
+                </a:solidFill>
+                <a:latin typeface="Calibri" pitchFamily="34" charset="0"/>
+                <a:ea typeface="Calibri" pitchFamily="34" charset="-122"/>
+                <a:cs typeface="Calibri" pitchFamily="34" charset="-120"/>
+              </a:rPr>
+              <a:t>Crossplane in the Modern Enterprise</a:t>
+            </a:r>
+            <a:endParaRPr lang="en-US" sz="900" dirty="0"/>
+          </a:p>
+        </p:txBody>
+      </p:sp>
+      <p:sp>
+        <p:nvSpPr>
+          <p:cNvPr id="19" name="Text 17"/>
+          <p:cNvSpPr/>
+          <p:nvPr/>
+        </p:nvSpPr>
+        <p:spPr>
+          <a:xfrm>
+            <a:off x="11274552" y="6446520"/>
+            <a:ext cx="457200" cy="274320"/>
+          </a:xfrm>
+          <a:prstGeom prst="rect">
+            <a:avLst/>
+          </a:prstGeom>
+          <a:noFill/>
+          <a:ln/>
+        </p:spPr>
+        <p:txBody>
+          <a:bodyPr wrap="square" rtlCol="0" anchor="ctr"/>
+          <a:lstStyle/>
+          <a:p>
+            <a:pPr algn="r" indent="0" marL="0">
+              <a:buNone/>
+            </a:pPr>
+            <a:r>
+              <a:rPr lang="en-US" sz="900" dirty="0">
+                <a:solidFill>
+                  <a:srgbClr val="6E86A8"/>
+                </a:solidFill>
+                <a:latin typeface="Calibri" pitchFamily="34" charset="0"/>
+                <a:ea typeface="Calibri" pitchFamily="34" charset="-122"/>
+                <a:cs typeface="Calibri" pitchFamily="34" charset="-120"/>
+              </a:rPr>
+              <a:t>16</a:t>
+            </a:r>
+            <a:endParaRPr lang="en-US" sz="900" dirty="0"/>
+          </a:p>
+        </p:txBody>
+      </p:sp>
+    </p:spTree>
+  </p:cSld>
+  <p:clrMapOvr>
+    <a:masterClrMapping/>
+  </p:clrMapOvr>
+</p:sld>
+</file>
+
+<file path=ppt/slides/slide17.xml><?xml version="1.0" encoding="utf-8"?>
+<p:sld xmlns:a="http://schemas.openxmlformats.org/drawingml/2006/main" xmlns:r="http://schemas.openxmlformats.org/officeDocument/2006/relationships" xmlns:p="http://schemas.openxmlformats.org/presentationml/2006/main">
+  <p:cSld name="Slide 17">
+    <p:bg>
+      <p:bgPr>
+        <a:solidFill>
+          <a:srgbClr val="0B1E3D"/>
+        </a:solidFill>
+      </p:bgPr>
+    </p:bg>
+    <p:spTree>
+      <p:nvGrpSpPr>
+        <p:cNvPr id="1" name=""/>
+        <p:cNvGrpSpPr/>
+        <p:nvPr/>
+      </p:nvGrpSpPr>
+      <p:grpSpPr>
+        <a:xfrm>
+          <a:off x="0" y="0"/>
+          <a:ext cx="0" cy="0"/>
+          <a:chOff x="0" y="0"/>
+          <a:chExt cx="0" cy="0"/>
+        </a:xfrm>
+      </p:grpSpPr>
+      <p:sp>
+        <p:nvSpPr>
           <p:cNvPr id="2" name="Shape 0"/>
           <p:cNvSpPr/>
           <p:nvPr/>
@@ -10388,7 +11992,7 @@
                 <a:ea typeface="Calibri" pitchFamily="34" charset="-122"/>
                 <a:cs typeface="Calibri" pitchFamily="34" charset="-120"/>
               </a:rPr>
-              <a:t>16</a:t>
+              <a:t>17</a:t>
             </a:r>
             <a:endParaRPr lang="en-US" sz="900" dirty="0"/>
           </a:p>
